--- a/docs/eventus_architecture.pptx
+++ b/docs/eventus_architecture.pptx
@@ -5,7 +5,7 @@
     <p:sldMasterId id="2147483648" r:id="rId1"/>
   </p:sldMasterIdLst>
   <p:notesMasterIdLst>
-    <p:notesMasterId r:id="rId46"/>
+    <p:notesMasterId r:id="rId48"/>
   </p:notesMasterIdLst>
   <p:sldIdLst>
     <p:sldId id="270" r:id="rId2"/>
@@ -29,29 +29,31 @@
     <p:sldId id="301" r:id="rId20"/>
     <p:sldId id="298" r:id="rId21"/>
     <p:sldId id="299" r:id="rId22"/>
-    <p:sldId id="279" r:id="rId23"/>
-    <p:sldId id="286" r:id="rId24"/>
-    <p:sldId id="280" r:id="rId25"/>
-    <p:sldId id="281" r:id="rId26"/>
-    <p:sldId id="265" r:id="rId27"/>
-    <p:sldId id="267" r:id="rId28"/>
-    <p:sldId id="269" r:id="rId29"/>
-    <p:sldId id="266" r:id="rId30"/>
-    <p:sldId id="273" r:id="rId31"/>
-    <p:sldId id="287" r:id="rId32"/>
-    <p:sldId id="282" r:id="rId33"/>
-    <p:sldId id="283" r:id="rId34"/>
-    <p:sldId id="284" r:id="rId35"/>
-    <p:sldId id="285" r:id="rId36"/>
-    <p:sldId id="256" r:id="rId37"/>
-    <p:sldId id="257" r:id="rId38"/>
-    <p:sldId id="258" r:id="rId39"/>
-    <p:sldId id="259" r:id="rId40"/>
-    <p:sldId id="260" r:id="rId41"/>
-    <p:sldId id="261" r:id="rId42"/>
-    <p:sldId id="262" r:id="rId43"/>
-    <p:sldId id="263" r:id="rId44"/>
-    <p:sldId id="264" r:id="rId45"/>
+    <p:sldId id="303" r:id="rId23"/>
+    <p:sldId id="304" r:id="rId24"/>
+    <p:sldId id="279" r:id="rId25"/>
+    <p:sldId id="286" r:id="rId26"/>
+    <p:sldId id="280" r:id="rId27"/>
+    <p:sldId id="281" r:id="rId28"/>
+    <p:sldId id="265" r:id="rId29"/>
+    <p:sldId id="267" r:id="rId30"/>
+    <p:sldId id="269" r:id="rId31"/>
+    <p:sldId id="266" r:id="rId32"/>
+    <p:sldId id="273" r:id="rId33"/>
+    <p:sldId id="287" r:id="rId34"/>
+    <p:sldId id="282" r:id="rId35"/>
+    <p:sldId id="283" r:id="rId36"/>
+    <p:sldId id="284" r:id="rId37"/>
+    <p:sldId id="285" r:id="rId38"/>
+    <p:sldId id="256" r:id="rId39"/>
+    <p:sldId id="257" r:id="rId40"/>
+    <p:sldId id="258" r:id="rId41"/>
+    <p:sldId id="259" r:id="rId42"/>
+    <p:sldId id="260" r:id="rId43"/>
+    <p:sldId id="261" r:id="rId44"/>
+    <p:sldId id="262" r:id="rId45"/>
+    <p:sldId id="263" r:id="rId46"/>
+    <p:sldId id="264" r:id="rId47"/>
   </p:sldIdLst>
   <p:sldSz cx="9144000" cy="5143500" type="screen16x9"/>
   <p:notesSz cx="5143500" cy="9144000"/>
@@ -541,7 +543,7 @@
           <a:p>
             <a:fld id="{F7021451-1387-4CA6-816F-3879F97B5CBC}" type="slidenum">
               <a:rPr lang="en-US"/>
-              <a:t>36</a:t>
+              <a:t>38</a:t>
             </a:fld>
             <a:endParaRPr lang="en-US"/>
           </a:p>
@@ -625,7 +627,7 @@
           <a:p>
             <a:fld id="{F7021451-1387-4CA6-816F-3879F97B5CBC}" type="slidenum">
               <a:rPr lang="en-US"/>
-              <a:t>37</a:t>
+              <a:t>39</a:t>
             </a:fld>
             <a:endParaRPr lang="en-US"/>
           </a:p>
@@ -709,7 +711,7 @@
           <a:p>
             <a:fld id="{F7021451-1387-4CA6-816F-3879F97B5CBC}" type="slidenum">
               <a:rPr lang="en-US"/>
-              <a:t>38</a:t>
+              <a:t>40</a:t>
             </a:fld>
             <a:endParaRPr lang="en-US"/>
           </a:p>
@@ -793,7 +795,7 @@
           <a:p>
             <a:fld id="{F7021451-1387-4CA6-816F-3879F97B5CBC}" type="slidenum">
               <a:rPr lang="en-US"/>
-              <a:t>39</a:t>
+              <a:t>41</a:t>
             </a:fld>
             <a:endParaRPr lang="en-US"/>
           </a:p>
@@ -877,7 +879,7 @@
           <a:p>
             <a:fld id="{F7021451-1387-4CA6-816F-3879F97B5CBC}" type="slidenum">
               <a:rPr lang="en-US"/>
-              <a:t>40</a:t>
+              <a:t>42</a:t>
             </a:fld>
             <a:endParaRPr lang="en-US"/>
           </a:p>
@@ -961,7 +963,7 @@
           <a:p>
             <a:fld id="{F7021451-1387-4CA6-816F-3879F97B5CBC}" type="slidenum">
               <a:rPr lang="en-US"/>
-              <a:t>41</a:t>
+              <a:t>43</a:t>
             </a:fld>
             <a:endParaRPr lang="en-US"/>
           </a:p>
@@ -1045,7 +1047,7 @@
           <a:p>
             <a:fld id="{F7021451-1387-4CA6-816F-3879F97B5CBC}" type="slidenum">
               <a:rPr lang="en-US"/>
-              <a:t>42</a:t>
+              <a:t>44</a:t>
             </a:fld>
             <a:endParaRPr lang="en-US"/>
           </a:p>
@@ -1129,7 +1131,7 @@
           <a:p>
             <a:fld id="{F7021451-1387-4CA6-816F-3879F97B5CBC}" type="slidenum">
               <a:rPr lang="en-US"/>
-              <a:t>43</a:t>
+              <a:t>45</a:t>
             </a:fld>
             <a:endParaRPr lang="en-US"/>
           </a:p>
@@ -1213,7 +1215,7 @@
           <a:p>
             <a:fld id="{F7021451-1387-4CA6-816F-3879F97B5CBC}" type="slidenum">
               <a:rPr lang="en-US"/>
-              <a:t>44</a:t>
+              <a:t>46</a:t>
             </a:fld>
             <a:endParaRPr lang="en-US"/>
           </a:p>
@@ -1590,95 +1592,95 @@
           <a:lstStyle/>
           <a:p>
             <a:r>
-              <a:rPr lang="en-US" sz="1400" b="1"/>
+              <a:rPr lang="en-US" sz="1400" b="1" dirty="0"/>
               <a:t>Vignette # 1:</a:t>
             </a:r>
           </a:p>
           <a:p>
             <a:r>
-              <a:rPr lang="en-US" sz="1400"/>
-              <a:t>You are a clinical researcher studying the relationship between inpatient hospitalizations and subsequent emergency department visits in a Medicaid population. Your institution's data warehouse gives you a hospitalization file — one row per claim, not one row per visit. </a:t>
-            </a:r>
-          </a:p>
-          <a:p>
-            <a:r>
-              <a:rPr lang="en-US" sz="1400"/>
-              <a:t>Before you can ask any scientific question, you need to answer a more mundane one:"Do I actually know how many times each patient was hospitalized?"This sounds simple. It is not.</a:t>
-            </a:r>
-          </a:p>
-          <a:p>
-            <a:endParaRPr lang="en-US" sz="1400"/>
-          </a:p>
-          <a:p>
-            <a:r>
-              <a:rPr lang="en-US" sz="1400" b="1"/>
+              <a:rPr lang="en-US" sz="1400" dirty="0"/>
+              <a:t>You are a clinical researcher studying the relationship between hospitalizations and subsequent emergency department visits in a Medicaid population. Your institution's data warehouse gives you a hospitalization file — one row per claim, not one row per hospitalization. </a:t>
+            </a:r>
+          </a:p>
+          <a:p>
+            <a:r>
+              <a:rPr lang="en-US" sz="1400" dirty="0"/>
+              <a:t>Before you can ask any scientific question, you need to answer a more mundane one: "Do I know how many times each patient was hospitalized?“ This sounds simple. It is not.</a:t>
+            </a:r>
+          </a:p>
+          <a:p>
+            <a:endParaRPr lang="en-US" sz="1400" dirty="0"/>
+          </a:p>
+          <a:p>
+            <a:r>
+              <a:rPr lang="en-US" sz="1400" b="1" dirty="0"/>
               <a:t>Problem 1 — Duplicate claims:</a:t>
             </a:r>
             <a:r>
-              <a:rPr lang="en-US" sz="1400"/>
-              <a:t> A single 5-day hospitalization generates multiple rows — one per billing day, or one per diagnosis code, or one per provider. You have 47,000 rows but far fewer actual visits.</a:t>
-            </a:r>
-          </a:p>
-          <a:p>
-            <a:endParaRPr lang="en-US" sz="1400"/>
-          </a:p>
-          <a:p>
-            <a:r>
-              <a:rPr lang="en-US" sz="1400" b="1"/>
+              <a:rPr lang="en-US" sz="1400" dirty="0"/>
+              <a:t> A single 5-day hospitalization generates multiple rows — one per billing day, or one per diagnosis code, or one per provider. You have 47,000 rows but far fewer visits.</a:t>
+            </a:r>
+          </a:p>
+          <a:p>
+            <a:endParaRPr lang="en-US" sz="1400" dirty="0"/>
+          </a:p>
+          <a:p>
+            <a:r>
+              <a:rPr lang="en-US" sz="1400" b="1" dirty="0"/>
               <a:t>Problem 2 — Overlapping stays:</a:t>
             </a:r>
             <a:r>
-              <a:rPr lang="en-US" sz="1400"/>
-              <a:t> A patient transferred between units or facilities generates two overlapping intervals. Naively counting rows double-counts this patient's hospitalization burden.</a:t>
-            </a:r>
-          </a:p>
-          <a:p>
-            <a:endParaRPr lang="en-US" sz="1400"/>
-          </a:p>
-          <a:p>
-            <a:r>
-              <a:rPr lang="en-US" sz="1400" b="1"/>
+              <a:rPr lang="en-US" sz="1400" dirty="0"/>
+              <a:t> A patient transferred between units or facilities generates two overlapping intervals. Counting rows overestimates this patient's hospitalization burden.</a:t>
+            </a:r>
+          </a:p>
+          <a:p>
+            <a:endParaRPr lang="en-US" sz="1400" dirty="0"/>
+          </a:p>
+          <a:p>
+            <a:r>
+              <a:rPr lang="en-US" sz="1400" b="1" dirty="0"/>
               <a:t>Problem 3 — Missing admit dates:</a:t>
             </a:r>
             <a:r>
-              <a:rPr lang="en-US" sz="1400"/>
-              <a:t> 3% of rows have null admit_date. Another 1% have null patient_id. These need to be removed — but you need to know how many and why, because your IRB report will ask.</a:t>
-            </a:r>
-          </a:p>
-          <a:p>
-            <a:endParaRPr lang="en-US" sz="1400"/>
-          </a:p>
-          <a:p>
-            <a:r>
-              <a:rPr lang="en-US" sz="1400" b="1"/>
+              <a:rPr lang="en-US" sz="1400" dirty="0"/>
+              <a:t> 3% of rows have null admit date. Another 1% have null patient ID. These need to be removed. However, you need to know how many and why because your IRB report will ask.</a:t>
+            </a:r>
+          </a:p>
+          <a:p>
+            <a:endParaRPr lang="en-US" sz="1400" dirty="0"/>
+          </a:p>
+          <a:p>
+            <a:r>
+              <a:rPr lang="en-US" sz="1400" b="1" dirty="0"/>
               <a:t>Problem 4 — Implausible dates:</a:t>
             </a:r>
             <a:r>
-              <a:rPr lang="en-US" sz="1400"/>
+              <a:rPr lang="en-US" sz="1400" dirty="0"/>
               <a:t> System errors produce admit dates in 1899 or 2087. A script that silently keeps these will corrupt every downstream analysis.</a:t>
             </a:r>
           </a:p>
           <a:p>
-            <a:endParaRPr lang="en-US" sz="1400"/>
-          </a:p>
-          <a:p>
-            <a:r>
-              <a:rPr lang="en-US" sz="1400" b="1"/>
-              <a:t>Problem 5 — Same-day readmissions vs. continuous stays:</a:t>
-            </a:r>
-            <a:r>
-              <a:rPr lang="en-US" sz="1400"/>
-              <a:t> A patient discharged on Monday and readmitted on Tuesday — is that one stay or two? The answer depends on your research question and needs to be a conscious, documented choice, not an accident of how you sorted a DataFrame.</a:t>
-            </a:r>
-          </a:p>
-          <a:p>
-            <a:endParaRPr lang="en-US" sz="1400"/>
-          </a:p>
-          <a:p>
-            <a:endParaRPr lang="en-US" sz="1400"/>
-          </a:p>
-          <a:p>
-            <a:endParaRPr lang="en-US" sz="1400"/>
+            <a:endParaRPr lang="en-US" sz="1400" dirty="0"/>
+          </a:p>
+          <a:p>
+            <a:r>
+              <a:rPr lang="en-US" sz="1400" b="1" dirty="0"/>
+              <a:t>Problem 5 — Same-day readmissions vs. continuous stays: </a:t>
+            </a:r>
+            <a:r>
+              <a:rPr lang="en-US" sz="1400" dirty="0"/>
+              <a:t>For a patient discharged on Monday and readmitted on Tuesday, it is unclear whether this should count as one or two stays. The answer depends on your research question and needs to be a deliberate and documented choice.</a:t>
+            </a:r>
+          </a:p>
+          <a:p>
+            <a:endParaRPr lang="en-US" sz="1400" dirty="0"/>
+          </a:p>
+          <a:p>
+            <a:endParaRPr lang="en-US" sz="1400" dirty="0"/>
+          </a:p>
+          <a:p>
+            <a:endParaRPr lang="en-US" sz="1400" dirty="0"/>
           </a:p>
         </p:txBody>
       </p:sp>
@@ -3663,60 +3665,68 @@
           <a:lstStyle/>
           <a:p>
             <a:r>
-              <a:rPr lang="en-US" sz="1400" b="1"/>
+              <a:rPr lang="en-US" sz="1400" b="1" dirty="0"/>
               <a:t>Vignette #3A</a:t>
             </a:r>
           </a:p>
           <a:p>
             <a:r>
-              <a:rPr lang="en-US" sz="1400"/>
-              <a:t>You have cleaned your hospitalization data. You now have 11,200 stays across 8,400 patients. Before you can ask any scientific question about hospitalization burden, you want to do something simple first: look at the data.Not a table. Not a summary statistic. A picture — one row per patient, showing where in the year their hospitalizations fell, how long each stay lasted, and how much of the year they spent not hospitalized.</a:t>
-            </a:r>
-          </a:p>
-          <a:p>
-            <a:r>
-              <a:rPr lang="en-US" sz="1400" b="1"/>
+              <a:rPr lang="en-US" sz="1400" dirty="0"/>
+              <a:t>You have cleaned your hospitalization data. You now have 11,200 hospitalizations across 8,400 patients. Before you can ask any scientific question about hospitalization burden, you want to do something simple first: look at the </a:t>
+            </a:r>
+            <a:r>
+              <a:rPr lang="en-US" sz="1400" dirty="0" err="1"/>
+              <a:t>data.Not</a:t>
+            </a:r>
+            <a:r>
+              <a:rPr lang="en-US" sz="1400" dirty="0"/>
+              <a:t> a table. Not a summary statistic. A picture — one row per patient, showing where in the year their hospitalizations fell, how long each stay lasted, and how much of the year they spent not hospitalized.</a:t>
+            </a:r>
+          </a:p>
+          <a:p>
+            <a:r>
+              <a:rPr lang="en-US" sz="1400" b="1" dirty="0"/>
               <a:t>Problem 1 — </a:t>
             </a:r>
             <a:r>
-              <a:rPr lang="en-US" sz="1400"/>
-              <a:t>The observation period is a first-class object: Every patient shares the same calendar window — January 1 to December 31, 2022. But a hospitalization admitted December 15 and discharged January 20 must be clipped to December 31. A script that does not clip overcounts active days and draws bars that extend past the observation window.</a:t>
-            </a:r>
-          </a:p>
-          <a:p>
-            <a:r>
-              <a:rPr lang="en-US" sz="1400" b="1"/>
+              <a:rPr lang="en-US" sz="1400" dirty="0"/>
+              <a:t>The observation period is a first-class object: Every patient shares the same calendar window — January 1 to December 31, 2022. But a hospitalization admitted December 15, 2022 and discharged January 20, 2023 must be clipped to December 31, 2022. A script that does not clip, overcounts active days and draws bars that extend past the observation window.</a:t>
+            </a:r>
+          </a:p>
+          <a:p>
+            <a:r>
+              <a:rPr lang="en-US" sz="1400" b="1" dirty="0"/>
               <a:t>Problem 2 — </a:t>
             </a:r>
             <a:r>
-              <a:rPr lang="en-US" sz="1400"/>
-              <a:t>Patients with no hospitalizations are real patients: They have an observation period. They belong in the plot — as a full bar with no event segments. A script that joins on hospitalizations silently drops them. Your denominator is wrong and the plot is misleading.</a:t>
-            </a:r>
-          </a:p>
-          <a:p>
-            <a:r>
-              <a:rPr lang="en-US" sz="1400" b="1"/>
+              <a:rPr lang="en-US" sz="1400" dirty="0"/>
+              <a:t>Patients with no hospitalizations are real patients: They have an observation period. They belong in the plot as a full bar with no event segments. A script that joins on hospitalizations silently drops them. Your denominator is wrong and the plot is misleading.</a:t>
+            </a:r>
+          </a:p>
+          <a:p>
+            <a:r>
+              <a:rPr lang="en-US" sz="1400" b="1" dirty="0"/>
               <a:t>Problem 3 — </a:t>
             </a:r>
             <a:r>
-              <a:rPr lang="en-US" sz="1400"/>
+              <a:rPr lang="en-US" sz="1400" dirty="0"/>
               <a:t>The plot has to be reproducible: Row height, bar height ratio, colors, marker sizes, font sizes, DPI — a script that hardcodes these cannot be versioned, shared, or rerun </a:t>
             </a:r>
           </a:p>
           <a:p>
             <a:r>
-              <a:rPr lang="en-US" sz="1400"/>
+              <a:rPr lang="en-US" sz="1400" dirty="0"/>
               <a:t>consistently. Next month's update will look different unless someone is very careful.</a:t>
             </a:r>
           </a:p>
           <a:p>
             <a:r>
-              <a:rPr lang="en-US" sz="1400" b="1"/>
+              <a:rPr lang="en-US" sz="1400" b="1" dirty="0"/>
               <a:t>Problem 4 — </a:t>
             </a:r>
             <a:r>
-              <a:rPr lang="en-US" sz="1400"/>
-              <a:t>You may want to plot times without hospitalization may in three colors, not two: Inactive time before the first hospitalization tells a different story than inactive time between hospitalizations, which tells a different story than inactive time after the last one. For a Medicaid coverage vignette, you may be more interested in gaps between events and want to color them differently.</a:t>
+              <a:rPr lang="en-US" sz="1400" dirty="0"/>
+              <a:t>You may want to plot times without hospitalization in three colors, not two: Inactive time before the first hospitalization tells a different story than inactive time between hospitalizations, which tells a different story than inactive time after the last one. For a Medicaid coverage vignette, you may be more interested in gaps between events and want to color them differently.</a:t>
             </a:r>
           </a:p>
         </p:txBody>
@@ -5402,85 +5412,10 @@
           <a:chExt cx="0" cy="0"/>
         </a:xfrm>
       </p:grpSpPr>
-      <p:sp>
-        <p:nvSpPr>
-          <p:cNvPr id="4" name="TextBox 3">
-            <a:extLst>
-              <a:ext uri="{FF2B5EF4-FFF2-40B4-BE49-F238E27FC236}">
-                <a16:creationId xmlns:a16="http://schemas.microsoft.com/office/drawing/2014/main" id="{E6F31E6C-6343-C599-499C-7C985D1DC1FA}"/>
-              </a:ext>
-            </a:extLst>
-          </p:cNvPr>
-          <p:cNvSpPr txBox="1"/>
-          <p:nvPr/>
-        </p:nvSpPr>
-        <p:spPr>
-          <a:xfrm>
-            <a:off x="2727960" y="3771346"/>
-            <a:ext cx="6187440" cy="1200329"/>
-          </a:xfrm>
-          <a:prstGeom prst="rect">
-            <a:avLst/>
-          </a:prstGeom>
-          <a:noFill/>
-        </p:spPr>
-        <p:txBody>
-          <a:bodyPr wrap="square">
-            <a:spAutoFit/>
-          </a:bodyPr>
-          <a:lstStyle/>
-          <a:p>
-            <a:r>
-              <a:rPr lang="en-US" sz="1200"/>
-              <a:t>No configuration files. No specific error messages — a wrong column name gives you a KeyError, a bad date gives you a silent NaN, a logic error gives you wrong numbers with no warning. The meaningful gap is hardcoded. </a:t>
-            </a:r>
-          </a:p>
-          <a:p>
-            <a:endParaRPr lang="en-US" sz="1200"/>
-          </a:p>
-          <a:p>
-            <a:r>
-              <a:rPr lang="en-US" sz="1200"/>
-              <a:t>The eventus version is 6 lines of code, two YAML files, and specific errors that tell you exactly what went wrong.</a:t>
-            </a:r>
-            <a:endParaRPr lang="en-US" sz="1200" i="1"/>
-          </a:p>
-        </p:txBody>
-      </p:sp>
-      <p:pic>
-        <p:nvPicPr>
-          <p:cNvPr id="8" name="Picture 7">
-            <a:extLst>
-              <a:ext uri="{FF2B5EF4-FFF2-40B4-BE49-F238E27FC236}">
-                <a16:creationId xmlns:a16="http://schemas.microsoft.com/office/drawing/2014/main" id="{6A1AEF2B-E7B4-9BA0-B09C-E25CF08B102D}"/>
-              </a:ext>
-            </a:extLst>
-          </p:cNvPr>
-          <p:cNvPicPr>
-            <a:picLocks noChangeAspect="1"/>
-          </p:cNvPicPr>
-          <p:nvPr/>
-        </p:nvPicPr>
-        <p:blipFill>
-          <a:blip r:embed="rId2"/>
-          <a:stretch>
-            <a:fillRect/>
-          </a:stretch>
-        </p:blipFill>
-        <p:spPr>
-          <a:xfrm>
-            <a:off x="603975" y="413763"/>
-            <a:ext cx="7086964" cy="3124361"/>
-          </a:xfrm>
-          <a:prstGeom prst="rect">
-            <a:avLst/>
-          </a:prstGeom>
-        </p:spPr>
-      </p:pic>
     </p:spTree>
     <p:extLst>
       <p:ext uri="{BB962C8B-B14F-4D97-AF65-F5344CB8AC3E}">
-        <p14:creationId xmlns:p14="http://schemas.microsoft.com/office/powerpoint/2010/main" val="2387680696"/>
+        <p14:creationId xmlns:p14="http://schemas.microsoft.com/office/powerpoint/2010/main" val="2801604525"/>
       </p:ext>
     </p:extLst>
   </p:cSld>
@@ -5510,6 +5445,141 @@
     </p:spTree>
     <p:extLst>
       <p:ext uri="{BB962C8B-B14F-4D97-AF65-F5344CB8AC3E}">
+        <p14:creationId xmlns:p14="http://schemas.microsoft.com/office/powerpoint/2010/main" val="1401191585"/>
+      </p:ext>
+    </p:extLst>
+  </p:cSld>
+  <p:clrMapOvr>
+    <a:masterClrMapping/>
+  </p:clrMapOvr>
+</p:sld>
+</file>
+
+<file path=ppt/slides/slide24.xml><?xml version="1.0" encoding="utf-8"?>
+<p:sld xmlns:a="http://schemas.openxmlformats.org/drawingml/2006/main" xmlns:r="http://schemas.openxmlformats.org/officeDocument/2006/relationships" xmlns:p="http://schemas.openxmlformats.org/presentationml/2006/main">
+  <p:cSld>
+    <p:spTree>
+      <p:nvGrpSpPr>
+        <p:cNvPr id="1" name=""/>
+        <p:cNvGrpSpPr/>
+        <p:nvPr/>
+      </p:nvGrpSpPr>
+      <p:grpSpPr>
+        <a:xfrm>
+          <a:off x="0" y="0"/>
+          <a:ext cx="0" cy="0"/>
+          <a:chOff x="0" y="0"/>
+          <a:chExt cx="0" cy="0"/>
+        </a:xfrm>
+      </p:grpSpPr>
+      <p:sp>
+        <p:nvSpPr>
+          <p:cNvPr id="4" name="TextBox 3">
+            <a:extLst>
+              <a:ext uri="{FF2B5EF4-FFF2-40B4-BE49-F238E27FC236}">
+                <a16:creationId xmlns:a16="http://schemas.microsoft.com/office/drawing/2014/main" id="{E6F31E6C-6343-C599-499C-7C985D1DC1FA}"/>
+              </a:ext>
+            </a:extLst>
+          </p:cNvPr>
+          <p:cNvSpPr txBox="1"/>
+          <p:nvPr/>
+        </p:nvSpPr>
+        <p:spPr>
+          <a:xfrm>
+            <a:off x="2727960" y="3771346"/>
+            <a:ext cx="6187440" cy="1200329"/>
+          </a:xfrm>
+          <a:prstGeom prst="rect">
+            <a:avLst/>
+          </a:prstGeom>
+          <a:noFill/>
+        </p:spPr>
+        <p:txBody>
+          <a:bodyPr wrap="square">
+            <a:spAutoFit/>
+          </a:bodyPr>
+          <a:lstStyle/>
+          <a:p>
+            <a:r>
+              <a:rPr lang="en-US" sz="1200"/>
+              <a:t>No configuration files. No specific error messages — a wrong column name gives you a KeyError, a bad date gives you a silent NaN, a logic error gives you wrong numbers with no warning. The meaningful gap is hardcoded. </a:t>
+            </a:r>
+          </a:p>
+          <a:p>
+            <a:endParaRPr lang="en-US" sz="1200"/>
+          </a:p>
+          <a:p>
+            <a:r>
+              <a:rPr lang="en-US" sz="1200"/>
+              <a:t>The eventus version is 6 lines of code, two YAML files, and specific errors that tell you exactly what went wrong.</a:t>
+            </a:r>
+            <a:endParaRPr lang="en-US" sz="1200" i="1"/>
+          </a:p>
+        </p:txBody>
+      </p:sp>
+      <p:pic>
+        <p:nvPicPr>
+          <p:cNvPr id="8" name="Picture 7">
+            <a:extLst>
+              <a:ext uri="{FF2B5EF4-FFF2-40B4-BE49-F238E27FC236}">
+                <a16:creationId xmlns:a16="http://schemas.microsoft.com/office/drawing/2014/main" id="{6A1AEF2B-E7B4-9BA0-B09C-E25CF08B102D}"/>
+              </a:ext>
+            </a:extLst>
+          </p:cNvPr>
+          <p:cNvPicPr>
+            <a:picLocks noChangeAspect="1"/>
+          </p:cNvPicPr>
+          <p:nvPr/>
+        </p:nvPicPr>
+        <p:blipFill>
+          <a:blip r:embed="rId2"/>
+          <a:stretch>
+            <a:fillRect/>
+          </a:stretch>
+        </p:blipFill>
+        <p:spPr>
+          <a:xfrm>
+            <a:off x="603975" y="413763"/>
+            <a:ext cx="7086964" cy="3124361"/>
+          </a:xfrm>
+          <a:prstGeom prst="rect">
+            <a:avLst/>
+          </a:prstGeom>
+        </p:spPr>
+      </p:pic>
+    </p:spTree>
+    <p:extLst>
+      <p:ext uri="{BB962C8B-B14F-4D97-AF65-F5344CB8AC3E}">
+        <p14:creationId xmlns:p14="http://schemas.microsoft.com/office/powerpoint/2010/main" val="2387680696"/>
+      </p:ext>
+    </p:extLst>
+  </p:cSld>
+  <p:clrMapOvr>
+    <a:masterClrMapping/>
+  </p:clrMapOvr>
+</p:sld>
+</file>
+
+<file path=ppt/slides/slide25.xml><?xml version="1.0" encoding="utf-8"?>
+<p:sld xmlns:a="http://schemas.openxmlformats.org/drawingml/2006/main" xmlns:r="http://schemas.openxmlformats.org/officeDocument/2006/relationships" xmlns:p="http://schemas.openxmlformats.org/presentationml/2006/main">
+  <p:cSld>
+    <p:spTree>
+      <p:nvGrpSpPr>
+        <p:cNvPr id="1" name=""/>
+        <p:cNvGrpSpPr/>
+        <p:nvPr/>
+      </p:nvGrpSpPr>
+      <p:grpSpPr>
+        <a:xfrm>
+          <a:off x="0" y="0"/>
+          <a:ext cx="0" cy="0"/>
+          <a:chOff x="0" y="0"/>
+          <a:chExt cx="0" cy="0"/>
+        </a:xfrm>
+      </p:grpSpPr>
+    </p:spTree>
+    <p:extLst>
+      <p:ext uri="{BB962C8B-B14F-4D97-AF65-F5344CB8AC3E}">
         <p14:creationId xmlns:p14="http://schemas.microsoft.com/office/powerpoint/2010/main" val="678041041"/>
       </p:ext>
     </p:extLst>
@@ -5520,7 +5590,7 @@
 </p:sld>
 </file>
 
-<file path=ppt/slides/slide24.xml><?xml version="1.0" encoding="utf-8"?>
+<file path=ppt/slides/slide26.xml><?xml version="1.0" encoding="utf-8"?>
 <p:sld xmlns:a="http://schemas.openxmlformats.org/drawingml/2006/main" xmlns:r="http://schemas.openxmlformats.org/officeDocument/2006/relationships" xmlns:p="http://schemas.openxmlformats.org/presentationml/2006/main">
   <p:cSld>
     <p:spTree>
@@ -5637,7 +5707,7 @@
 </p:sld>
 </file>
 
-<file path=ppt/slides/slide25.xml><?xml version="1.0" encoding="utf-8"?>
+<file path=ppt/slides/slide27.xml><?xml version="1.0" encoding="utf-8"?>
 <p:sld xmlns:a="http://schemas.openxmlformats.org/drawingml/2006/main" xmlns:r="http://schemas.openxmlformats.org/officeDocument/2006/relationships" xmlns:p="http://schemas.openxmlformats.org/presentationml/2006/main">
   <p:cSld>
     <p:spTree>
@@ -5697,7 +5767,7 @@
 </p:sld>
 </file>
 
-<file path=ppt/slides/slide26.xml><?xml version="1.0" encoding="utf-8"?>
+<file path=ppt/slides/slide28.xml><?xml version="1.0" encoding="utf-8"?>
 <p:sld xmlns:a="http://schemas.openxmlformats.org/drawingml/2006/main" xmlns:r="http://schemas.openxmlformats.org/officeDocument/2006/relationships" xmlns:p="http://schemas.openxmlformats.org/presentationml/2006/main">
   <p:cSld>
     <p:spTree>
@@ -6222,7 +6292,7 @@
 </p:sld>
 </file>
 
-<file path=ppt/slides/slide27.xml><?xml version="1.0" encoding="utf-8"?>
+<file path=ppt/slides/slide29.xml><?xml version="1.0" encoding="utf-8"?>
 <p:sld xmlns:a="http://schemas.openxmlformats.org/drawingml/2006/main" xmlns:r="http://schemas.openxmlformats.org/officeDocument/2006/relationships" xmlns:p="http://schemas.openxmlformats.org/presentationml/2006/main">
   <p:cSld>
     <p:spTree>
@@ -6741,1206 +6811,6 @@
     <p:extLst>
       <p:ext uri="{BB962C8B-B14F-4D97-AF65-F5344CB8AC3E}">
         <p14:creationId xmlns:p14="http://schemas.microsoft.com/office/powerpoint/2010/main" val="1762813912"/>
-      </p:ext>
-    </p:extLst>
-  </p:cSld>
-  <p:clrMapOvr>
-    <a:masterClrMapping/>
-  </p:clrMapOvr>
-</p:sld>
-</file>
-
-<file path=ppt/slides/slide28.xml><?xml version="1.0" encoding="utf-8"?>
-<p:sld xmlns:a="http://schemas.openxmlformats.org/drawingml/2006/main" xmlns:r="http://schemas.openxmlformats.org/officeDocument/2006/relationships" xmlns:p="http://schemas.openxmlformats.org/presentationml/2006/main">
-  <p:cSld>
-    <p:spTree>
-      <p:nvGrpSpPr>
-        <p:cNvPr id="1" name="">
-          <a:extLst>
-            <a:ext uri="{FF2B5EF4-FFF2-40B4-BE49-F238E27FC236}">
-              <a16:creationId xmlns:a16="http://schemas.microsoft.com/office/drawing/2014/main" id="{2D09F3A3-705C-8818-9704-E42DF21DF0A3}"/>
-            </a:ext>
-          </a:extLst>
-        </p:cNvPr>
-        <p:cNvGrpSpPr/>
-        <p:nvPr/>
-      </p:nvGrpSpPr>
-      <p:grpSpPr>
-        <a:xfrm>
-          <a:off x="0" y="0"/>
-          <a:ext cx="0" cy="0"/>
-          <a:chOff x="0" y="0"/>
-          <a:chExt cx="0" cy="0"/>
-        </a:xfrm>
-      </p:grpSpPr>
-      <p:sp>
-        <p:nvSpPr>
-          <p:cNvPr id="2" name="TextBox 1">
-            <a:extLst>
-              <a:ext uri="{FF2B5EF4-FFF2-40B4-BE49-F238E27FC236}">
-                <a16:creationId xmlns:a16="http://schemas.microsoft.com/office/drawing/2014/main" id="{C031F908-CF12-B013-507B-2119D7DB7F36}"/>
-              </a:ext>
-            </a:extLst>
-          </p:cNvPr>
-          <p:cNvSpPr txBox="1"/>
-          <p:nvPr/>
-        </p:nvSpPr>
-        <p:spPr>
-          <a:xfrm>
-            <a:off x="5695407" y="102716"/>
-            <a:ext cx="3448594" cy="369332"/>
-          </a:xfrm>
-          <a:prstGeom prst="rect">
-            <a:avLst/>
-          </a:prstGeom>
-          <a:noFill/>
-        </p:spPr>
-        <p:txBody>
-          <a:bodyPr wrap="square" rtlCol="0">
-            <a:spAutoFit/>
-          </a:bodyPr>
-          <a:lstStyle/>
-          <a:p>
-            <a:r>
-              <a:rPr lang="en-US"/>
-              <a:t>Analyzers utilize object contracts</a:t>
-            </a:r>
-          </a:p>
-        </p:txBody>
-      </p:sp>
-      <mc:AlternateContent xmlns:mc="http://schemas.openxmlformats.org/markup-compatibility/2006" xmlns:p14="http://schemas.microsoft.com/office/powerpoint/2010/main">
-        <mc:Choice Requires="p14">
-          <p:contentPart p14:bwMode="auto" r:id="rId2">
-            <p14:nvContentPartPr>
-              <p14:cNvPr id="25" name="Ink 24">
-                <a:extLst>
-                  <a:ext uri="{FF2B5EF4-FFF2-40B4-BE49-F238E27FC236}">
-                    <a16:creationId xmlns:a16="http://schemas.microsoft.com/office/drawing/2014/main" id="{226DC564-6F22-77F7-B96C-7EE10959332A}"/>
-                  </a:ext>
-                </a:extLst>
-              </p14:cNvPr>
-              <p14:cNvContentPartPr/>
-              <p14:nvPr/>
-            </p14:nvContentPartPr>
-            <p14:xfrm>
-              <a:off x="4036269" y="653091"/>
-              <a:ext cx="360" cy="360"/>
-            </p14:xfrm>
-          </p:contentPart>
-        </mc:Choice>
-        <mc:Fallback xmlns="">
-          <p:pic>
-            <p:nvPicPr>
-              <p:cNvPr id="25" name="Ink 24">
-                <a:extLst>
-                  <a:ext uri="{FF2B5EF4-FFF2-40B4-BE49-F238E27FC236}">
-                    <a16:creationId xmlns:a16="http://schemas.microsoft.com/office/drawing/2014/main" id="{68DB5CBF-D701-D322-4416-C438505D842C}"/>
-                  </a:ext>
-                </a:extLst>
-              </p:cNvPr>
-              <p:cNvPicPr/>
-              <p:nvPr/>
-            </p:nvPicPr>
-            <p:blipFill>
-              <a:blip r:embed="rId23"/>
-              <a:stretch>
-                <a:fillRect/>
-              </a:stretch>
-            </p:blipFill>
-            <p:spPr>
-              <a:xfrm>
-                <a:off x="4030149" y="646971"/>
-                <a:ext cx="12600" cy="12600"/>
-              </a:xfrm>
-              <a:prstGeom prst="rect">
-                <a:avLst/>
-              </a:prstGeom>
-            </p:spPr>
-          </p:pic>
-        </mc:Fallback>
-      </mc:AlternateContent>
-      <p:sp>
-        <p:nvSpPr>
-          <p:cNvPr id="10" name="TextBox 9">
-            <a:extLst>
-              <a:ext uri="{FF2B5EF4-FFF2-40B4-BE49-F238E27FC236}">
-                <a16:creationId xmlns:a16="http://schemas.microsoft.com/office/drawing/2014/main" id="{E3CDD131-78C9-CA9F-255D-BABD3B5ECA46}"/>
-              </a:ext>
-            </a:extLst>
-          </p:cNvPr>
-          <p:cNvSpPr txBox="1"/>
-          <p:nvPr/>
-        </p:nvSpPr>
-        <p:spPr>
-          <a:xfrm>
-            <a:off x="501830" y="846952"/>
-            <a:ext cx="2468881" cy="1015663"/>
-          </a:xfrm>
-          <a:prstGeom prst="rect">
-            <a:avLst/>
-          </a:prstGeom>
-          <a:noFill/>
-          <a:ln>
-            <a:solidFill>
-              <a:schemeClr val="accent5">
-                <a:lumMod val="20000"/>
-                <a:lumOff val="80000"/>
-              </a:schemeClr>
-            </a:solidFill>
-          </a:ln>
-          <a:effectLst>
-            <a:glow rad="101600">
-              <a:srgbClr val="FF0000">
-                <a:alpha val="40000"/>
-              </a:srgbClr>
-            </a:glow>
-          </a:effectLst>
-          <a:scene3d>
-            <a:camera prst="orthographicFront"/>
-            <a:lightRig rig="threePt" dir="t"/>
-          </a:scene3d>
-          <a:sp3d>
-            <a:bevelT w="114300" prst="artDeco"/>
-          </a:sp3d>
-        </p:spPr>
-        <p:txBody>
-          <a:bodyPr wrap="square" rtlCol="0">
-            <a:spAutoFit/>
-          </a:bodyPr>
-          <a:lstStyle/>
-          <a:p>
-            <a:pPr algn="ctr"/>
-            <a:r>
-              <a:rPr lang="en-US" sz="1200" b="1">
-                <a:latin typeface="Consolas" panose="020B0609020204030204" pitchFamily="49" charset="0"/>
-                <a:cs typeface="Times New Roman" panose="02020603050405020304" pitchFamily="18" charset="0"/>
-              </a:rPr>
-              <a:t>EventsWithinSpanAnalyzer</a:t>
-            </a:r>
-          </a:p>
-          <a:p>
-            <a:pPr algn="ctr"/>
-            <a:r>
-              <a:rPr lang="en-US" sz="1200">
-                <a:latin typeface="Centaur" panose="02030504050205020304" pitchFamily="18" charset="0"/>
-                <a:cs typeface="Times New Roman" panose="02020603050405020304" pitchFamily="18" charset="0"/>
-              </a:rPr>
-              <a:t>events: Events</a:t>
-            </a:r>
-          </a:p>
-          <a:p>
-            <a:pPr algn="ctr"/>
-            <a:r>
-              <a:rPr lang="en-US" sz="1200">
-                <a:latin typeface="Centaur" panose="02030504050205020304" pitchFamily="18" charset="0"/>
-                <a:cs typeface="Times New Roman" panose="02020603050405020304" pitchFamily="18" charset="0"/>
-              </a:rPr>
-              <a:t>spans: Spans</a:t>
-            </a:r>
-          </a:p>
-          <a:p>
-            <a:pPr algn="ctr"/>
-            <a:r>
-              <a:rPr lang="en-US" sz="1200">
-                <a:latin typeface="Centaur" panose="02030504050205020304" pitchFamily="18" charset="0"/>
-                <a:cs typeface="Times New Roman" panose="02020603050405020304" pitchFamily="18" charset="0"/>
-              </a:rPr>
-              <a:t>entity_col: str</a:t>
-            </a:r>
-          </a:p>
-          <a:p>
-            <a:pPr algn="ctr"/>
-            <a:r>
-              <a:rPr lang="en-US" sz="1200">
-                <a:latin typeface="Centaur" panose="02030504050205020304" pitchFamily="18" charset="0"/>
-                <a:cs typeface="Times New Roman" panose="02020603050405020304" pitchFamily="18" charset="0"/>
-              </a:rPr>
-              <a:t>meaningful_gap: int</a:t>
-            </a:r>
-          </a:p>
-        </p:txBody>
-      </p:sp>
-      <p:pic>
-        <p:nvPicPr>
-          <p:cNvPr id="4" name="Picture 3">
-            <a:extLst>
-              <a:ext uri="{FF2B5EF4-FFF2-40B4-BE49-F238E27FC236}">
-                <a16:creationId xmlns:a16="http://schemas.microsoft.com/office/drawing/2014/main" id="{A62CE5E8-39A3-71C1-E5A9-1A474F33078E}"/>
-              </a:ext>
-            </a:extLst>
-          </p:cNvPr>
-          <p:cNvPicPr>
-            <a:picLocks noChangeAspect="1"/>
-          </p:cNvPicPr>
-          <p:nvPr/>
-        </p:nvPicPr>
-        <p:blipFill>
-          <a:blip r:embed="rId24"/>
-          <a:stretch>
-            <a:fillRect/>
-          </a:stretch>
-        </p:blipFill>
-        <p:spPr>
-          <a:xfrm>
-            <a:off x="4209796" y="846952"/>
-            <a:ext cx="4934204" cy="990651"/>
-          </a:xfrm>
-          <a:prstGeom prst="rect">
-            <a:avLst/>
-          </a:prstGeom>
-        </p:spPr>
-      </p:pic>
-      <p:pic>
-        <p:nvPicPr>
-          <p:cNvPr id="7" name="Picture 6">
-            <a:extLst>
-              <a:ext uri="{FF2B5EF4-FFF2-40B4-BE49-F238E27FC236}">
-                <a16:creationId xmlns:a16="http://schemas.microsoft.com/office/drawing/2014/main" id="{0BCBA484-C3EC-9F64-37CD-309B4CC08A32}"/>
-              </a:ext>
-            </a:extLst>
-          </p:cNvPr>
-          <p:cNvPicPr>
-            <a:picLocks noChangeAspect="1"/>
-          </p:cNvPicPr>
-          <p:nvPr/>
-        </p:nvPicPr>
-        <p:blipFill>
-          <a:blip r:embed="rId25"/>
-          <a:stretch>
-            <a:fillRect/>
-          </a:stretch>
-        </p:blipFill>
-        <p:spPr>
-          <a:xfrm>
-            <a:off x="4241549" y="2208697"/>
-            <a:ext cx="4902452" cy="558829"/>
-          </a:xfrm>
-          <a:prstGeom prst="rect">
-            <a:avLst/>
-          </a:prstGeom>
-        </p:spPr>
-      </p:pic>
-    </p:spTree>
-    <p:extLst>
-      <p:ext uri="{BB962C8B-B14F-4D97-AF65-F5344CB8AC3E}">
-        <p14:creationId xmlns:p14="http://schemas.microsoft.com/office/powerpoint/2010/main" val="1170722481"/>
-      </p:ext>
-    </p:extLst>
-  </p:cSld>
-  <p:clrMapOvr>
-    <a:masterClrMapping/>
-  </p:clrMapOvr>
-</p:sld>
-</file>
-
-<file path=ppt/slides/slide29.xml><?xml version="1.0" encoding="utf-8"?>
-<p:sld xmlns:a="http://schemas.openxmlformats.org/drawingml/2006/main" xmlns:r="http://schemas.openxmlformats.org/officeDocument/2006/relationships" xmlns:p="http://schemas.openxmlformats.org/presentationml/2006/main">
-  <p:cSld>
-    <p:spTree>
-      <p:nvGrpSpPr>
-        <p:cNvPr id="1" name=""/>
-        <p:cNvGrpSpPr/>
-        <p:nvPr/>
-      </p:nvGrpSpPr>
-      <p:grpSpPr>
-        <a:xfrm>
-          <a:off x="0" y="0"/>
-          <a:ext cx="0" cy="0"/>
-          <a:chOff x="0" y="0"/>
-          <a:chExt cx="0" cy="0"/>
-        </a:xfrm>
-      </p:grpSpPr>
-      <p:sp>
-        <p:nvSpPr>
-          <p:cNvPr id="2" name="TextBox 1">
-            <a:extLst>
-              <a:ext uri="{FF2B5EF4-FFF2-40B4-BE49-F238E27FC236}">
-                <a16:creationId xmlns:a16="http://schemas.microsoft.com/office/drawing/2014/main" id="{57D58151-86B3-7A36-A1E3-A3FA01AC8F35}"/>
-              </a:ext>
-            </a:extLst>
-          </p:cNvPr>
-          <p:cNvSpPr txBox="1"/>
-          <p:nvPr/>
-        </p:nvSpPr>
-        <p:spPr>
-          <a:xfrm>
-            <a:off x="5695407" y="102716"/>
-            <a:ext cx="3448594" cy="369332"/>
-          </a:xfrm>
-          <a:prstGeom prst="rect">
-            <a:avLst/>
-          </a:prstGeom>
-          <a:noFill/>
-        </p:spPr>
-        <p:txBody>
-          <a:bodyPr wrap="square" rtlCol="0">
-            <a:spAutoFit/>
-          </a:bodyPr>
-          <a:lstStyle/>
-          <a:p>
-            <a:r>
-              <a:rPr lang="en-US"/>
-              <a:t>Parallelism and Composability</a:t>
-            </a:r>
-          </a:p>
-        </p:txBody>
-      </p:sp>
-      <p:sp>
-        <p:nvSpPr>
-          <p:cNvPr id="3" name="TextBox 2">
-            <a:extLst>
-              <a:ext uri="{FF2B5EF4-FFF2-40B4-BE49-F238E27FC236}">
-                <a16:creationId xmlns:a16="http://schemas.microsoft.com/office/drawing/2014/main" id="{DCD8B5AC-0557-001C-8981-09F1DA2189B7}"/>
-              </a:ext>
-            </a:extLst>
-          </p:cNvPr>
-          <p:cNvSpPr txBox="1"/>
-          <p:nvPr/>
-        </p:nvSpPr>
-        <p:spPr>
-          <a:xfrm>
-            <a:off x="5183776" y="945088"/>
-            <a:ext cx="2468881" cy="461665"/>
-          </a:xfrm>
-          <a:prstGeom prst="rect">
-            <a:avLst/>
-          </a:prstGeom>
-          <a:noFill/>
-          <a:ln>
-            <a:solidFill>
-              <a:schemeClr val="accent5">
-                <a:lumMod val="20000"/>
-                <a:lumOff val="80000"/>
-              </a:schemeClr>
-            </a:solidFill>
-          </a:ln>
-          <a:effectLst>
-            <a:glow rad="101600">
-              <a:schemeClr val="accent1">
-                <a:satMod val="175000"/>
-                <a:alpha val="40000"/>
-              </a:schemeClr>
-            </a:glow>
-          </a:effectLst>
-          <a:scene3d>
-            <a:camera prst="orthographicFront"/>
-            <a:lightRig rig="threePt" dir="t"/>
-          </a:scene3d>
-          <a:sp3d>
-            <a:bevelT w="114300" prst="artDeco"/>
-          </a:sp3d>
-        </p:spPr>
-        <p:txBody>
-          <a:bodyPr wrap="square" rtlCol="0">
-            <a:spAutoFit/>
-          </a:bodyPr>
-          <a:lstStyle/>
-          <a:p>
-            <a:pPr algn="ctr"/>
-            <a:r>
-              <a:rPr lang="en-US" sz="1200" b="1">
-                <a:latin typeface="Consolas" panose="020B0609020204030204" pitchFamily="49" charset="0"/>
-                <a:cs typeface="Times New Roman" panose="02020603050405020304" pitchFamily="18" charset="0"/>
-              </a:rPr>
-              <a:t>Occurrences</a:t>
-            </a:r>
-          </a:p>
-          <a:p>
-            <a:pPr algn="ctr"/>
-            <a:r>
-              <a:rPr lang="en-US" sz="1200" b="1">
-                <a:latin typeface="Consolas" panose="020B0609020204030204" pitchFamily="49" charset="0"/>
-                <a:cs typeface="Times New Roman" panose="02020603050405020304" pitchFamily="18" charset="0"/>
-              </a:rPr>
-              <a:t>(i.e. ED day, vaccine day)</a:t>
-            </a:r>
-          </a:p>
-        </p:txBody>
-      </p:sp>
-      <p:sp>
-        <p:nvSpPr>
-          <p:cNvPr id="4" name="TextBox 3">
-            <a:extLst>
-              <a:ext uri="{FF2B5EF4-FFF2-40B4-BE49-F238E27FC236}">
-                <a16:creationId xmlns:a16="http://schemas.microsoft.com/office/drawing/2014/main" id="{CACCE28A-7E1F-6D48-7A0B-140873068F91}"/>
-              </a:ext>
-            </a:extLst>
-          </p:cNvPr>
-          <p:cNvSpPr txBox="1"/>
-          <p:nvPr/>
-        </p:nvSpPr>
-        <p:spPr>
-          <a:xfrm>
-            <a:off x="4998719" y="1873376"/>
-            <a:ext cx="2838996" cy="461665"/>
-          </a:xfrm>
-          <a:prstGeom prst="rect">
-            <a:avLst/>
-          </a:prstGeom>
-          <a:noFill/>
-          <a:ln>
-            <a:solidFill>
-              <a:schemeClr val="accent5">
-                <a:lumMod val="20000"/>
-                <a:lumOff val="80000"/>
-              </a:schemeClr>
-            </a:solidFill>
-          </a:ln>
-          <a:effectLst>
-            <a:glow rad="101600">
-              <a:schemeClr val="accent1">
-                <a:satMod val="175000"/>
-                <a:alpha val="40000"/>
-              </a:schemeClr>
-            </a:glow>
-          </a:effectLst>
-          <a:scene3d>
-            <a:camera prst="orthographicFront"/>
-            <a:lightRig rig="threePt" dir="t"/>
-          </a:scene3d>
-          <a:sp3d>
-            <a:bevelT w="114300" prst="artDeco"/>
-          </a:sp3d>
-        </p:spPr>
-        <p:txBody>
-          <a:bodyPr wrap="square" rtlCol="0">
-            <a:spAutoFit/>
-          </a:bodyPr>
-          <a:lstStyle/>
-          <a:p>
-            <a:pPr algn="ctr"/>
-            <a:r>
-              <a:rPr lang="en-US" sz="1200" b="1">
-                <a:latin typeface="Consolas" panose="020B0609020204030204" pitchFamily="49" charset="0"/>
-                <a:cs typeface="Times New Roman" panose="02020603050405020304" pitchFamily="18" charset="0"/>
-              </a:rPr>
-              <a:t>OccurrencesWithinSpanAnalyzer</a:t>
-            </a:r>
-          </a:p>
-          <a:p>
-            <a:pPr algn="ctr"/>
-            <a:r>
-              <a:rPr lang="en-US" sz="1200" b="1">
-                <a:latin typeface="Consolas" panose="020B0609020204030204" pitchFamily="49" charset="0"/>
-                <a:cs typeface="Times New Roman" panose="02020603050405020304" pitchFamily="18" charset="0"/>
-              </a:rPr>
-              <a:t>.calc()</a:t>
-            </a:r>
-          </a:p>
-        </p:txBody>
-      </p:sp>
-      <p:sp>
-        <p:nvSpPr>
-          <p:cNvPr id="5" name="TextBox 4">
-            <a:extLst>
-              <a:ext uri="{FF2B5EF4-FFF2-40B4-BE49-F238E27FC236}">
-                <a16:creationId xmlns:a16="http://schemas.microsoft.com/office/drawing/2014/main" id="{34D228A2-6AFB-7FA5-A05D-ED480ED00FC2}"/>
-              </a:ext>
-            </a:extLst>
-          </p:cNvPr>
-          <p:cNvSpPr txBox="1"/>
-          <p:nvPr/>
-        </p:nvSpPr>
-        <p:spPr>
-          <a:xfrm>
-            <a:off x="4761411" y="2776571"/>
-            <a:ext cx="3370218" cy="461665"/>
-          </a:xfrm>
-          <a:prstGeom prst="rect">
-            <a:avLst/>
-          </a:prstGeom>
-          <a:noFill/>
-          <a:ln>
-            <a:solidFill>
-              <a:schemeClr val="accent5">
-                <a:lumMod val="20000"/>
-                <a:lumOff val="80000"/>
-              </a:schemeClr>
-            </a:solidFill>
-          </a:ln>
-          <a:effectLst>
-            <a:glow rad="101600">
-              <a:schemeClr val="accent1">
-                <a:satMod val="175000"/>
-                <a:alpha val="40000"/>
-              </a:schemeClr>
-            </a:glow>
-          </a:effectLst>
-          <a:scene3d>
-            <a:camera prst="orthographicFront"/>
-            <a:lightRig rig="threePt" dir="t"/>
-          </a:scene3d>
-          <a:sp3d>
-            <a:bevelT w="114300" prst="artDeco"/>
-          </a:sp3d>
-        </p:spPr>
-        <p:txBody>
-          <a:bodyPr wrap="square" rtlCol="0">
-            <a:spAutoFit/>
-          </a:bodyPr>
-          <a:lstStyle/>
-          <a:p>
-            <a:pPr algn="ctr"/>
-            <a:r>
-              <a:rPr lang="en-US" sz="1200" b="1">
-                <a:latin typeface="Consolas" panose="020B0609020204030204" pitchFamily="49" charset="0"/>
-                <a:cs typeface="Times New Roman" panose="02020603050405020304" pitchFamily="18" charset="0"/>
-              </a:rPr>
-              <a:t>PipeDelimitedIntermediateOccurences</a:t>
-            </a:r>
-          </a:p>
-          <a:p>
-            <a:pPr algn="ctr"/>
-            <a:r>
-              <a:rPr lang="en-US" sz="1200" b="1">
-                <a:latin typeface="Consolas" panose="020B0609020204030204" pitchFamily="49" charset="0"/>
-                <a:cs typeface="Times New Roman" panose="02020603050405020304" pitchFamily="18" charset="0"/>
-              </a:rPr>
-              <a:t>.self_analyze(), .print_summary()</a:t>
-            </a:r>
-          </a:p>
-        </p:txBody>
-      </p:sp>
-      <p:sp>
-        <p:nvSpPr>
-          <p:cNvPr id="6" name="TextBox 5">
-            <a:extLst>
-              <a:ext uri="{FF2B5EF4-FFF2-40B4-BE49-F238E27FC236}">
-                <a16:creationId xmlns:a16="http://schemas.microsoft.com/office/drawing/2014/main" id="{C79E06BB-A302-5214-11BE-E28285D805C5}"/>
-              </a:ext>
-            </a:extLst>
-          </p:cNvPr>
-          <p:cNvSpPr txBox="1"/>
-          <p:nvPr/>
-        </p:nvSpPr>
-        <p:spPr>
-          <a:xfrm>
-            <a:off x="777239" y="945296"/>
-            <a:ext cx="2468881" cy="461665"/>
-          </a:xfrm>
-          <a:prstGeom prst="rect">
-            <a:avLst/>
-          </a:prstGeom>
-          <a:noFill/>
-          <a:ln>
-            <a:solidFill>
-              <a:schemeClr val="accent5">
-                <a:lumMod val="20000"/>
-                <a:lumOff val="80000"/>
-              </a:schemeClr>
-            </a:solidFill>
-          </a:ln>
-          <a:effectLst>
-            <a:glow rad="101600">
-              <a:schemeClr val="accent2">
-                <a:satMod val="175000"/>
-                <a:alpha val="40000"/>
-              </a:schemeClr>
-            </a:glow>
-          </a:effectLst>
-          <a:scene3d>
-            <a:camera prst="orthographicFront"/>
-            <a:lightRig rig="threePt" dir="t"/>
-          </a:scene3d>
-          <a:sp3d>
-            <a:bevelT w="114300" prst="artDeco"/>
-          </a:sp3d>
-        </p:spPr>
-        <p:txBody>
-          <a:bodyPr wrap="square" rtlCol="0">
-            <a:spAutoFit/>
-          </a:bodyPr>
-          <a:lstStyle/>
-          <a:p>
-            <a:pPr algn="ctr"/>
-            <a:r>
-              <a:rPr lang="en-US" sz="1200" b="1">
-                <a:latin typeface="Consolas" panose="020B0609020204030204" pitchFamily="49" charset="0"/>
-                <a:cs typeface="Times New Roman" panose="02020603050405020304" pitchFamily="18" charset="0"/>
-              </a:rPr>
-              <a:t>Events</a:t>
-            </a:r>
-            <a:br>
-              <a:rPr lang="en-US" sz="1200" b="1">
-                <a:latin typeface="Consolas" panose="020B0609020204030204" pitchFamily="49" charset="0"/>
-                <a:cs typeface="Times New Roman" panose="02020603050405020304" pitchFamily="18" charset="0"/>
-              </a:rPr>
-            </a:br>
-            <a:r>
-              <a:rPr lang="en-US" sz="1200" b="1">
-                <a:latin typeface="Consolas" panose="020B0609020204030204" pitchFamily="49" charset="0"/>
-                <a:cs typeface="Times New Roman" panose="02020603050405020304" pitchFamily="18" charset="0"/>
-              </a:rPr>
-              <a:t>(i.e. insurance-coverage)</a:t>
-            </a:r>
-          </a:p>
-        </p:txBody>
-      </p:sp>
-      <p:sp>
-        <p:nvSpPr>
-          <p:cNvPr id="7" name="TextBox 6">
-            <a:extLst>
-              <a:ext uri="{FF2B5EF4-FFF2-40B4-BE49-F238E27FC236}">
-                <a16:creationId xmlns:a16="http://schemas.microsoft.com/office/drawing/2014/main" id="{7FB24CEA-30E5-5CBA-B6FD-8AD5009A90DA}"/>
-              </a:ext>
-            </a:extLst>
-          </p:cNvPr>
-          <p:cNvSpPr txBox="1"/>
-          <p:nvPr/>
-        </p:nvSpPr>
-        <p:spPr>
-          <a:xfrm>
-            <a:off x="592182" y="1873584"/>
-            <a:ext cx="2838996" cy="461665"/>
-          </a:xfrm>
-          <a:prstGeom prst="rect">
-            <a:avLst/>
-          </a:prstGeom>
-          <a:noFill/>
-          <a:ln>
-            <a:solidFill>
-              <a:schemeClr val="accent5">
-                <a:lumMod val="20000"/>
-                <a:lumOff val="80000"/>
-              </a:schemeClr>
-            </a:solidFill>
-          </a:ln>
-          <a:effectLst>
-            <a:glow rad="101600">
-              <a:schemeClr val="accent2">
-                <a:satMod val="175000"/>
-                <a:alpha val="40000"/>
-              </a:schemeClr>
-            </a:glow>
-          </a:effectLst>
-          <a:scene3d>
-            <a:camera prst="orthographicFront"/>
-            <a:lightRig rig="threePt" dir="t"/>
-          </a:scene3d>
-          <a:sp3d>
-            <a:bevelT w="114300" prst="artDeco"/>
-          </a:sp3d>
-        </p:spPr>
-        <p:txBody>
-          <a:bodyPr wrap="square" rtlCol="0">
-            <a:spAutoFit/>
-          </a:bodyPr>
-          <a:lstStyle/>
-          <a:p>
-            <a:pPr algn="ctr"/>
-            <a:r>
-              <a:rPr lang="en-US" sz="1200" b="1">
-                <a:latin typeface="Consolas" panose="020B0609020204030204" pitchFamily="49" charset="0"/>
-                <a:cs typeface="Times New Roman" panose="02020603050405020304" pitchFamily="18" charset="0"/>
-              </a:rPr>
-              <a:t>EventsWithinSpanAnalyzer</a:t>
-            </a:r>
-          </a:p>
-          <a:p>
-            <a:pPr algn="ctr"/>
-            <a:r>
-              <a:rPr lang="en-US" sz="1200" b="1">
-                <a:latin typeface="Consolas" panose="020B0609020204030204" pitchFamily="49" charset="0"/>
-                <a:cs typeface="Times New Roman" panose="02020603050405020304" pitchFamily="18" charset="0"/>
-              </a:rPr>
-              <a:t>.calc_active_vs_inactive()</a:t>
-            </a:r>
-          </a:p>
-        </p:txBody>
-      </p:sp>
-      <p:sp>
-        <p:nvSpPr>
-          <p:cNvPr id="8" name="TextBox 7">
-            <a:extLst>
-              <a:ext uri="{FF2B5EF4-FFF2-40B4-BE49-F238E27FC236}">
-                <a16:creationId xmlns:a16="http://schemas.microsoft.com/office/drawing/2014/main" id="{05E27686-F227-D7B9-185A-555BA080B570}"/>
-              </a:ext>
-            </a:extLst>
-          </p:cNvPr>
-          <p:cNvSpPr txBox="1"/>
-          <p:nvPr/>
-        </p:nvSpPr>
-        <p:spPr>
-          <a:xfrm>
-            <a:off x="354874" y="2776779"/>
-            <a:ext cx="3370218" cy="461665"/>
-          </a:xfrm>
-          <a:prstGeom prst="rect">
-            <a:avLst/>
-          </a:prstGeom>
-          <a:noFill/>
-          <a:ln>
-            <a:solidFill>
-              <a:schemeClr val="accent5">
-                <a:lumMod val="20000"/>
-                <a:lumOff val="80000"/>
-              </a:schemeClr>
-            </a:solidFill>
-          </a:ln>
-          <a:effectLst>
-            <a:glow rad="101600">
-              <a:schemeClr val="accent2">
-                <a:satMod val="175000"/>
-                <a:alpha val="40000"/>
-              </a:schemeClr>
-            </a:glow>
-          </a:effectLst>
-          <a:scene3d>
-            <a:camera prst="orthographicFront"/>
-            <a:lightRig rig="threePt" dir="t"/>
-          </a:scene3d>
-          <a:sp3d>
-            <a:bevelT w="114300" prst="artDeco"/>
-          </a:sp3d>
-        </p:spPr>
-        <p:txBody>
-          <a:bodyPr wrap="square" rtlCol="0">
-            <a:spAutoFit/>
-          </a:bodyPr>
-          <a:lstStyle/>
-          <a:p>
-            <a:pPr algn="ctr"/>
-            <a:r>
-              <a:rPr lang="en-US" sz="1200" b="1">
-                <a:latin typeface="Consolas" panose="020B0609020204030204" pitchFamily="49" charset="0"/>
-                <a:cs typeface="Times New Roman" panose="02020603050405020304" pitchFamily="18" charset="0"/>
-              </a:rPr>
-              <a:t>PipeDelimitedIntermediateEvents</a:t>
-            </a:r>
-          </a:p>
-          <a:p>
-            <a:pPr algn="ctr"/>
-            <a:r>
-              <a:rPr lang="en-US" sz="1200" b="1">
-                <a:latin typeface="Consolas" panose="020B0609020204030204" pitchFamily="49" charset="0"/>
-                <a:cs typeface="Times New Roman" panose="02020603050405020304" pitchFamily="18" charset="0"/>
-              </a:rPr>
-              <a:t>.self_analyze(), .tier1/2/3()</a:t>
-            </a:r>
-          </a:p>
-        </p:txBody>
-      </p:sp>
-      <p:sp>
-        <p:nvSpPr>
-          <p:cNvPr id="9" name="TextBox 8">
-            <a:extLst>
-              <a:ext uri="{FF2B5EF4-FFF2-40B4-BE49-F238E27FC236}">
-                <a16:creationId xmlns:a16="http://schemas.microsoft.com/office/drawing/2014/main" id="{E201D2B9-E328-98D6-72D3-A0C7AE802AC3}"/>
-              </a:ext>
-            </a:extLst>
-          </p:cNvPr>
-          <p:cNvSpPr txBox="1"/>
-          <p:nvPr/>
-        </p:nvSpPr>
-        <p:spPr>
-          <a:xfrm>
-            <a:off x="3608614" y="3706284"/>
-            <a:ext cx="1390105" cy="261610"/>
-          </a:xfrm>
-          <a:prstGeom prst="rect">
-            <a:avLst/>
-          </a:prstGeom>
-          <a:noFill/>
-          <a:ln>
-            <a:solidFill>
-              <a:schemeClr val="tx1"/>
-            </a:solidFill>
-            <a:prstDash val="sysDot"/>
-          </a:ln>
-        </p:spPr>
-        <p:txBody>
-          <a:bodyPr wrap="square" rtlCol="0">
-            <a:spAutoFit/>
-          </a:bodyPr>
-          <a:lstStyle/>
-          <a:p>
-            <a:pPr algn="ctr"/>
-            <a:r>
-              <a:rPr lang="en-US" sz="1100">
-                <a:latin typeface="Abadi" panose="020B0604020104020204" pitchFamily="34" charset="0"/>
-              </a:rPr>
-              <a:t>add objects</a:t>
-            </a:r>
-          </a:p>
-        </p:txBody>
-      </p:sp>
-      <mc:AlternateContent xmlns:mc="http://schemas.openxmlformats.org/markup-compatibility/2006" xmlns:p14="http://schemas.microsoft.com/office/powerpoint/2010/main">
-        <mc:Choice Requires="p14">
-          <p:contentPart p14:bwMode="auto" r:id="rId2">
-            <p14:nvContentPartPr>
-              <p14:cNvPr id="25" name="Ink 24">
-                <a:extLst>
-                  <a:ext uri="{FF2B5EF4-FFF2-40B4-BE49-F238E27FC236}">
-                    <a16:creationId xmlns:a16="http://schemas.microsoft.com/office/drawing/2014/main" id="{68DB5CBF-D701-D322-4416-C438505D842C}"/>
-                  </a:ext>
-                </a:extLst>
-              </p14:cNvPr>
-              <p14:cNvContentPartPr/>
-              <p14:nvPr/>
-            </p14:nvContentPartPr>
-            <p14:xfrm>
-              <a:off x="4036269" y="653091"/>
-              <a:ext cx="360" cy="360"/>
-            </p14:xfrm>
-          </p:contentPart>
-        </mc:Choice>
-        <mc:Fallback xmlns="">
-          <p:pic>
-            <p:nvPicPr>
-              <p:cNvPr id="25" name="Ink 24">
-                <a:extLst>
-                  <a:ext uri="{FF2B5EF4-FFF2-40B4-BE49-F238E27FC236}">
-                    <a16:creationId xmlns:a16="http://schemas.microsoft.com/office/drawing/2014/main" id="{68DB5CBF-D701-D322-4416-C438505D842C}"/>
-                  </a:ext>
-                </a:extLst>
-              </p:cNvPr>
-              <p:cNvPicPr/>
-              <p:nvPr/>
-            </p:nvPicPr>
-            <p:blipFill>
-              <a:blip r:embed="rId23"/>
-              <a:stretch>
-                <a:fillRect/>
-              </a:stretch>
-            </p:blipFill>
-            <p:spPr>
-              <a:xfrm>
-                <a:off x="4030149" y="646971"/>
-                <a:ext cx="12600" cy="12600"/>
-              </a:xfrm>
-              <a:prstGeom prst="rect">
-                <a:avLst/>
-              </a:prstGeom>
-            </p:spPr>
-          </p:pic>
-        </mc:Fallback>
-      </mc:AlternateContent>
-      <p:cxnSp>
-        <p:nvCxnSpPr>
-          <p:cNvPr id="20" name="Straight Arrow Connector 19">
-            <a:extLst>
-              <a:ext uri="{FF2B5EF4-FFF2-40B4-BE49-F238E27FC236}">
-                <a16:creationId xmlns:a16="http://schemas.microsoft.com/office/drawing/2014/main" id="{05A859ED-E06B-274D-17CB-3FEA7780F090}"/>
-              </a:ext>
-            </a:extLst>
-          </p:cNvPr>
-          <p:cNvCxnSpPr>
-            <a:stCxn id="8" idx="2"/>
-            <a:endCxn id="9" idx="0"/>
-          </p:cNvCxnSpPr>
-          <p:nvPr/>
-        </p:nvCxnSpPr>
-        <p:spPr>
-          <a:xfrm>
-            <a:off x="2039983" y="3238444"/>
-            <a:ext cx="2263684" cy="467840"/>
-          </a:xfrm>
-          <a:prstGeom prst="straightConnector1">
-            <a:avLst/>
-          </a:prstGeom>
-          <a:ln>
-            <a:tailEnd type="triangle"/>
-          </a:ln>
-        </p:spPr>
-        <p:style>
-          <a:lnRef idx="1">
-            <a:schemeClr val="accent1"/>
-          </a:lnRef>
-          <a:fillRef idx="0">
-            <a:schemeClr val="accent1"/>
-          </a:fillRef>
-          <a:effectRef idx="0">
-            <a:schemeClr val="accent1"/>
-          </a:effectRef>
-          <a:fontRef idx="minor">
-            <a:schemeClr val="tx1"/>
-          </a:fontRef>
-        </p:style>
-      </p:cxnSp>
-      <p:cxnSp>
-        <p:nvCxnSpPr>
-          <p:cNvPr id="26" name="Straight Arrow Connector 25">
-            <a:extLst>
-              <a:ext uri="{FF2B5EF4-FFF2-40B4-BE49-F238E27FC236}">
-                <a16:creationId xmlns:a16="http://schemas.microsoft.com/office/drawing/2014/main" id="{46575BD2-FB31-A170-A790-2AFEEA89FB6C}"/>
-              </a:ext>
-            </a:extLst>
-          </p:cNvPr>
-          <p:cNvCxnSpPr>
-            <a:cxnSpLocks/>
-            <a:stCxn id="5" idx="2"/>
-            <a:endCxn id="9" idx="0"/>
-          </p:cNvCxnSpPr>
-          <p:nvPr/>
-        </p:nvCxnSpPr>
-        <p:spPr>
-          <a:xfrm flipH="1">
-            <a:off x="4303667" y="3238236"/>
-            <a:ext cx="2142853" cy="468048"/>
-          </a:xfrm>
-          <a:prstGeom prst="straightConnector1">
-            <a:avLst/>
-          </a:prstGeom>
-          <a:ln>
-            <a:tailEnd type="triangle"/>
-          </a:ln>
-        </p:spPr>
-        <p:style>
-          <a:lnRef idx="1">
-            <a:schemeClr val="accent1"/>
-          </a:lnRef>
-          <a:fillRef idx="0">
-            <a:schemeClr val="accent1"/>
-          </a:fillRef>
-          <a:effectRef idx="0">
-            <a:schemeClr val="accent1"/>
-          </a:effectRef>
-          <a:fontRef idx="minor">
-            <a:schemeClr val="tx1"/>
-          </a:fontRef>
-        </p:style>
-      </p:cxnSp>
-      <p:cxnSp>
-        <p:nvCxnSpPr>
-          <p:cNvPr id="29" name="Straight Arrow Connector 28">
-            <a:extLst>
-              <a:ext uri="{FF2B5EF4-FFF2-40B4-BE49-F238E27FC236}">
-                <a16:creationId xmlns:a16="http://schemas.microsoft.com/office/drawing/2014/main" id="{77BE384C-5999-6A35-D7ED-50B38B267B85}"/>
-              </a:ext>
-            </a:extLst>
-          </p:cNvPr>
-          <p:cNvCxnSpPr>
-            <a:cxnSpLocks/>
-            <a:stCxn id="5" idx="2"/>
-          </p:cNvCxnSpPr>
-          <p:nvPr/>
-        </p:nvCxnSpPr>
-        <p:spPr>
-          <a:xfrm flipH="1">
-            <a:off x="5375093" y="3238236"/>
-            <a:ext cx="1071427" cy="1124758"/>
-          </a:xfrm>
-          <a:prstGeom prst="straightConnector1">
-            <a:avLst/>
-          </a:prstGeom>
-          <a:ln>
-            <a:tailEnd type="triangle"/>
-          </a:ln>
-        </p:spPr>
-        <p:style>
-          <a:lnRef idx="1">
-            <a:schemeClr val="accent1"/>
-          </a:lnRef>
-          <a:fillRef idx="0">
-            <a:schemeClr val="accent1"/>
-          </a:fillRef>
-          <a:effectRef idx="0">
-            <a:schemeClr val="accent1"/>
-          </a:effectRef>
-          <a:fontRef idx="minor">
-            <a:schemeClr val="tx1"/>
-          </a:fontRef>
-        </p:style>
-      </p:cxnSp>
-      <p:sp>
-        <p:nvSpPr>
-          <p:cNvPr id="11" name="TextBox 10">
-            <a:extLst>
-              <a:ext uri="{FF2B5EF4-FFF2-40B4-BE49-F238E27FC236}">
-                <a16:creationId xmlns:a16="http://schemas.microsoft.com/office/drawing/2014/main" id="{E62B8F02-B538-3AF8-2F69-2D570ECB750D}"/>
-              </a:ext>
-            </a:extLst>
-          </p:cNvPr>
-          <p:cNvSpPr txBox="1"/>
-          <p:nvPr/>
-        </p:nvSpPr>
-        <p:spPr>
-          <a:xfrm>
-            <a:off x="2618558" y="4408731"/>
-            <a:ext cx="3370218" cy="276999"/>
-          </a:xfrm>
-          <a:prstGeom prst="rect">
-            <a:avLst/>
-          </a:prstGeom>
-          <a:noFill/>
-          <a:ln>
-            <a:solidFill>
-              <a:schemeClr val="accent5">
-                <a:lumMod val="20000"/>
-                <a:lumOff val="80000"/>
-              </a:schemeClr>
-            </a:solidFill>
-          </a:ln>
-          <a:effectLst>
-            <a:glow rad="101600">
-              <a:schemeClr val="accent4">
-                <a:satMod val="175000"/>
-                <a:alpha val="40000"/>
-              </a:schemeClr>
-            </a:glow>
-          </a:effectLst>
-          <a:scene3d>
-            <a:camera prst="orthographicFront"/>
-            <a:lightRig rig="threePt" dir="t"/>
-          </a:scene3d>
-          <a:sp3d>
-            <a:bevelT w="114300" prst="artDeco"/>
-          </a:sp3d>
-        </p:spPr>
-        <p:txBody>
-          <a:bodyPr wrap="square" rtlCol="0">
-            <a:spAutoFit/>
-          </a:bodyPr>
-          <a:lstStyle/>
-          <a:p>
-            <a:pPr algn="ctr"/>
-            <a:r>
-              <a:rPr lang="en-US" sz="1200" b="1">
-                <a:latin typeface="Consolas" panose="020B0609020204030204" pitchFamily="49" charset="0"/>
-                <a:cs typeface="Times New Roman" panose="02020603050405020304" pitchFamily="18" charset="0"/>
-              </a:rPr>
-              <a:t>StackedBarsPlotter</a:t>
-            </a:r>
-          </a:p>
-        </p:txBody>
-      </p:sp>
-      <p:cxnSp>
-        <p:nvCxnSpPr>
-          <p:cNvPr id="14" name="Straight Arrow Connector 13">
-            <a:extLst>
-              <a:ext uri="{FF2B5EF4-FFF2-40B4-BE49-F238E27FC236}">
-                <a16:creationId xmlns:a16="http://schemas.microsoft.com/office/drawing/2014/main" id="{A6443675-EB6E-072E-E721-E90B1ED7F448}"/>
-              </a:ext>
-            </a:extLst>
-          </p:cNvPr>
-          <p:cNvCxnSpPr>
-            <a:cxnSpLocks/>
-            <a:stCxn id="8" idx="2"/>
-          </p:cNvCxnSpPr>
-          <p:nvPr/>
-        </p:nvCxnSpPr>
-        <p:spPr>
-          <a:xfrm>
-            <a:off x="2039983" y="3238444"/>
-            <a:ext cx="1055642" cy="1170287"/>
-          </a:xfrm>
-          <a:prstGeom prst="straightConnector1">
-            <a:avLst/>
-          </a:prstGeom>
-          <a:ln>
-            <a:tailEnd type="triangle"/>
-          </a:ln>
-        </p:spPr>
-        <p:style>
-          <a:lnRef idx="1">
-            <a:schemeClr val="accent1"/>
-          </a:lnRef>
-          <a:fillRef idx="0">
-            <a:schemeClr val="accent1"/>
-          </a:fillRef>
-          <a:effectRef idx="0">
-            <a:schemeClr val="accent1"/>
-          </a:effectRef>
-          <a:fontRef idx="minor">
-            <a:schemeClr val="tx1"/>
-          </a:fontRef>
-        </p:style>
-      </p:cxnSp>
-      <p:cxnSp>
-        <p:nvCxnSpPr>
-          <p:cNvPr id="17" name="Straight Arrow Connector 16">
-            <a:extLst>
-              <a:ext uri="{FF2B5EF4-FFF2-40B4-BE49-F238E27FC236}">
-                <a16:creationId xmlns:a16="http://schemas.microsoft.com/office/drawing/2014/main" id="{7B26C338-B9CF-64EE-5B48-270AF23AA4BE}"/>
-              </a:ext>
-            </a:extLst>
-          </p:cNvPr>
-          <p:cNvCxnSpPr>
-            <a:cxnSpLocks/>
-            <a:stCxn id="9" idx="2"/>
-            <a:endCxn id="11" idx="0"/>
-          </p:cNvCxnSpPr>
-          <p:nvPr/>
-        </p:nvCxnSpPr>
-        <p:spPr>
-          <a:xfrm>
-            <a:off x="4303667" y="3967894"/>
-            <a:ext cx="0" cy="440837"/>
-          </a:xfrm>
-          <a:prstGeom prst="straightConnector1">
-            <a:avLst/>
-          </a:prstGeom>
-          <a:ln>
-            <a:tailEnd type="triangle"/>
-          </a:ln>
-        </p:spPr>
-        <p:style>
-          <a:lnRef idx="1">
-            <a:schemeClr val="accent1"/>
-          </a:lnRef>
-          <a:fillRef idx="0">
-            <a:schemeClr val="accent1"/>
-          </a:fillRef>
-          <a:effectRef idx="0">
-            <a:schemeClr val="accent1"/>
-          </a:effectRef>
-          <a:fontRef idx="minor">
-            <a:schemeClr val="tx1"/>
-          </a:fontRef>
-        </p:style>
-      </p:cxnSp>
-      <p:sp>
-        <p:nvSpPr>
-          <p:cNvPr id="21" name="TextBox 20">
-            <a:extLst>
-              <a:ext uri="{FF2B5EF4-FFF2-40B4-BE49-F238E27FC236}">
-                <a16:creationId xmlns:a16="http://schemas.microsoft.com/office/drawing/2014/main" id="{E78E5E55-A5DE-FE84-CBF1-8BA954AEF9AB}"/>
-              </a:ext>
-            </a:extLst>
-          </p:cNvPr>
-          <p:cNvSpPr txBox="1"/>
-          <p:nvPr/>
-        </p:nvSpPr>
-        <p:spPr>
-          <a:xfrm>
-            <a:off x="6123215" y="3758505"/>
-            <a:ext cx="2592977" cy="1384995"/>
-          </a:xfrm>
-          <a:prstGeom prst="rect">
-            <a:avLst/>
-          </a:prstGeom>
-          <a:noFill/>
-        </p:spPr>
-        <p:txBody>
-          <a:bodyPr wrap="square" rtlCol="0">
-            <a:spAutoFit/>
-          </a:bodyPr>
-          <a:lstStyle/>
-          <a:p>
-            <a:r>
-              <a:rPr lang="en-US" sz="1200" i="1"/>
-              <a:t>Plotter can therefore plot either occurrences within an span; or events within a span; or both within a span.</a:t>
-            </a:r>
-            <a:br>
-              <a:rPr lang="en-US" sz="1200" i="1"/>
-            </a:br>
-            <a:r>
-              <a:rPr lang="en-US" sz="1200" i="1"/>
-              <a:t>All orchestrated by a YAML that understands the objects.</a:t>
-            </a:r>
-          </a:p>
-          <a:p>
-            <a:r>
-              <a:rPr lang="en-US" sz="1200" i="1"/>
-              <a:t>The plotter does not care which path was taken.</a:t>
-            </a:r>
-          </a:p>
-        </p:txBody>
-      </p:sp>
-    </p:spTree>
-    <p:extLst>
-      <p:ext uri="{BB962C8B-B14F-4D97-AF65-F5344CB8AC3E}">
-        <p14:creationId xmlns:p14="http://schemas.microsoft.com/office/powerpoint/2010/main" val="2317189406"/>
       </p:ext>
     </p:extLst>
   </p:cSld>
@@ -8378,6 +7248,1206 @@
   <p:cSld>
     <p:spTree>
       <p:nvGrpSpPr>
+        <p:cNvPr id="1" name="">
+          <a:extLst>
+            <a:ext uri="{FF2B5EF4-FFF2-40B4-BE49-F238E27FC236}">
+              <a16:creationId xmlns:a16="http://schemas.microsoft.com/office/drawing/2014/main" id="{2D09F3A3-705C-8818-9704-E42DF21DF0A3}"/>
+            </a:ext>
+          </a:extLst>
+        </p:cNvPr>
+        <p:cNvGrpSpPr/>
+        <p:nvPr/>
+      </p:nvGrpSpPr>
+      <p:grpSpPr>
+        <a:xfrm>
+          <a:off x="0" y="0"/>
+          <a:ext cx="0" cy="0"/>
+          <a:chOff x="0" y="0"/>
+          <a:chExt cx="0" cy="0"/>
+        </a:xfrm>
+      </p:grpSpPr>
+      <p:sp>
+        <p:nvSpPr>
+          <p:cNvPr id="2" name="TextBox 1">
+            <a:extLst>
+              <a:ext uri="{FF2B5EF4-FFF2-40B4-BE49-F238E27FC236}">
+                <a16:creationId xmlns:a16="http://schemas.microsoft.com/office/drawing/2014/main" id="{C031F908-CF12-B013-507B-2119D7DB7F36}"/>
+              </a:ext>
+            </a:extLst>
+          </p:cNvPr>
+          <p:cNvSpPr txBox="1"/>
+          <p:nvPr/>
+        </p:nvSpPr>
+        <p:spPr>
+          <a:xfrm>
+            <a:off x="5695407" y="102716"/>
+            <a:ext cx="3448594" cy="369332"/>
+          </a:xfrm>
+          <a:prstGeom prst="rect">
+            <a:avLst/>
+          </a:prstGeom>
+          <a:noFill/>
+        </p:spPr>
+        <p:txBody>
+          <a:bodyPr wrap="square" rtlCol="0">
+            <a:spAutoFit/>
+          </a:bodyPr>
+          <a:lstStyle/>
+          <a:p>
+            <a:r>
+              <a:rPr lang="en-US"/>
+              <a:t>Analyzers utilize object contracts</a:t>
+            </a:r>
+          </a:p>
+        </p:txBody>
+      </p:sp>
+      <mc:AlternateContent xmlns:mc="http://schemas.openxmlformats.org/markup-compatibility/2006" xmlns:p14="http://schemas.microsoft.com/office/powerpoint/2010/main">
+        <mc:Choice Requires="p14">
+          <p:contentPart p14:bwMode="auto" r:id="rId2">
+            <p14:nvContentPartPr>
+              <p14:cNvPr id="25" name="Ink 24">
+                <a:extLst>
+                  <a:ext uri="{FF2B5EF4-FFF2-40B4-BE49-F238E27FC236}">
+                    <a16:creationId xmlns:a16="http://schemas.microsoft.com/office/drawing/2014/main" id="{226DC564-6F22-77F7-B96C-7EE10959332A}"/>
+                  </a:ext>
+                </a:extLst>
+              </p14:cNvPr>
+              <p14:cNvContentPartPr/>
+              <p14:nvPr/>
+            </p14:nvContentPartPr>
+            <p14:xfrm>
+              <a:off x="4036269" y="653091"/>
+              <a:ext cx="360" cy="360"/>
+            </p14:xfrm>
+          </p:contentPart>
+        </mc:Choice>
+        <mc:Fallback xmlns="">
+          <p:pic>
+            <p:nvPicPr>
+              <p:cNvPr id="25" name="Ink 24">
+                <a:extLst>
+                  <a:ext uri="{FF2B5EF4-FFF2-40B4-BE49-F238E27FC236}">
+                    <a16:creationId xmlns:a16="http://schemas.microsoft.com/office/drawing/2014/main" id="{68DB5CBF-D701-D322-4416-C438505D842C}"/>
+                  </a:ext>
+                </a:extLst>
+              </p:cNvPr>
+              <p:cNvPicPr/>
+              <p:nvPr/>
+            </p:nvPicPr>
+            <p:blipFill>
+              <a:blip r:embed="rId23"/>
+              <a:stretch>
+                <a:fillRect/>
+              </a:stretch>
+            </p:blipFill>
+            <p:spPr>
+              <a:xfrm>
+                <a:off x="4030149" y="646971"/>
+                <a:ext cx="12600" cy="12600"/>
+              </a:xfrm>
+              <a:prstGeom prst="rect">
+                <a:avLst/>
+              </a:prstGeom>
+            </p:spPr>
+          </p:pic>
+        </mc:Fallback>
+      </mc:AlternateContent>
+      <p:sp>
+        <p:nvSpPr>
+          <p:cNvPr id="10" name="TextBox 9">
+            <a:extLst>
+              <a:ext uri="{FF2B5EF4-FFF2-40B4-BE49-F238E27FC236}">
+                <a16:creationId xmlns:a16="http://schemas.microsoft.com/office/drawing/2014/main" id="{E3CDD131-78C9-CA9F-255D-BABD3B5ECA46}"/>
+              </a:ext>
+            </a:extLst>
+          </p:cNvPr>
+          <p:cNvSpPr txBox="1"/>
+          <p:nvPr/>
+        </p:nvSpPr>
+        <p:spPr>
+          <a:xfrm>
+            <a:off x="501830" y="846952"/>
+            <a:ext cx="2468881" cy="1015663"/>
+          </a:xfrm>
+          <a:prstGeom prst="rect">
+            <a:avLst/>
+          </a:prstGeom>
+          <a:noFill/>
+          <a:ln>
+            <a:solidFill>
+              <a:schemeClr val="accent5">
+                <a:lumMod val="20000"/>
+                <a:lumOff val="80000"/>
+              </a:schemeClr>
+            </a:solidFill>
+          </a:ln>
+          <a:effectLst>
+            <a:glow rad="101600">
+              <a:srgbClr val="FF0000">
+                <a:alpha val="40000"/>
+              </a:srgbClr>
+            </a:glow>
+          </a:effectLst>
+          <a:scene3d>
+            <a:camera prst="orthographicFront"/>
+            <a:lightRig rig="threePt" dir="t"/>
+          </a:scene3d>
+          <a:sp3d>
+            <a:bevelT w="114300" prst="artDeco"/>
+          </a:sp3d>
+        </p:spPr>
+        <p:txBody>
+          <a:bodyPr wrap="square" rtlCol="0">
+            <a:spAutoFit/>
+          </a:bodyPr>
+          <a:lstStyle/>
+          <a:p>
+            <a:pPr algn="ctr"/>
+            <a:r>
+              <a:rPr lang="en-US" sz="1200" b="1">
+                <a:latin typeface="Consolas" panose="020B0609020204030204" pitchFamily="49" charset="0"/>
+                <a:cs typeface="Times New Roman" panose="02020603050405020304" pitchFamily="18" charset="0"/>
+              </a:rPr>
+              <a:t>EventsWithinSpanAnalyzer</a:t>
+            </a:r>
+          </a:p>
+          <a:p>
+            <a:pPr algn="ctr"/>
+            <a:r>
+              <a:rPr lang="en-US" sz="1200">
+                <a:latin typeface="Centaur" panose="02030504050205020304" pitchFamily="18" charset="0"/>
+                <a:cs typeface="Times New Roman" panose="02020603050405020304" pitchFamily="18" charset="0"/>
+              </a:rPr>
+              <a:t>events: Events</a:t>
+            </a:r>
+          </a:p>
+          <a:p>
+            <a:pPr algn="ctr"/>
+            <a:r>
+              <a:rPr lang="en-US" sz="1200">
+                <a:latin typeface="Centaur" panose="02030504050205020304" pitchFamily="18" charset="0"/>
+                <a:cs typeface="Times New Roman" panose="02020603050405020304" pitchFamily="18" charset="0"/>
+              </a:rPr>
+              <a:t>spans: Spans</a:t>
+            </a:r>
+          </a:p>
+          <a:p>
+            <a:pPr algn="ctr"/>
+            <a:r>
+              <a:rPr lang="en-US" sz="1200">
+                <a:latin typeface="Centaur" panose="02030504050205020304" pitchFamily="18" charset="0"/>
+                <a:cs typeface="Times New Roman" panose="02020603050405020304" pitchFamily="18" charset="0"/>
+              </a:rPr>
+              <a:t>entity_col: str</a:t>
+            </a:r>
+          </a:p>
+          <a:p>
+            <a:pPr algn="ctr"/>
+            <a:r>
+              <a:rPr lang="en-US" sz="1200">
+                <a:latin typeface="Centaur" panose="02030504050205020304" pitchFamily="18" charset="0"/>
+                <a:cs typeface="Times New Roman" panose="02020603050405020304" pitchFamily="18" charset="0"/>
+              </a:rPr>
+              <a:t>meaningful_gap: int</a:t>
+            </a:r>
+          </a:p>
+        </p:txBody>
+      </p:sp>
+      <p:pic>
+        <p:nvPicPr>
+          <p:cNvPr id="4" name="Picture 3">
+            <a:extLst>
+              <a:ext uri="{FF2B5EF4-FFF2-40B4-BE49-F238E27FC236}">
+                <a16:creationId xmlns:a16="http://schemas.microsoft.com/office/drawing/2014/main" id="{A62CE5E8-39A3-71C1-E5A9-1A474F33078E}"/>
+              </a:ext>
+            </a:extLst>
+          </p:cNvPr>
+          <p:cNvPicPr>
+            <a:picLocks noChangeAspect="1"/>
+          </p:cNvPicPr>
+          <p:nvPr/>
+        </p:nvPicPr>
+        <p:blipFill>
+          <a:blip r:embed="rId24"/>
+          <a:stretch>
+            <a:fillRect/>
+          </a:stretch>
+        </p:blipFill>
+        <p:spPr>
+          <a:xfrm>
+            <a:off x="4209796" y="846952"/>
+            <a:ext cx="4934204" cy="990651"/>
+          </a:xfrm>
+          <a:prstGeom prst="rect">
+            <a:avLst/>
+          </a:prstGeom>
+        </p:spPr>
+      </p:pic>
+      <p:pic>
+        <p:nvPicPr>
+          <p:cNvPr id="7" name="Picture 6">
+            <a:extLst>
+              <a:ext uri="{FF2B5EF4-FFF2-40B4-BE49-F238E27FC236}">
+                <a16:creationId xmlns:a16="http://schemas.microsoft.com/office/drawing/2014/main" id="{0BCBA484-C3EC-9F64-37CD-309B4CC08A32}"/>
+              </a:ext>
+            </a:extLst>
+          </p:cNvPr>
+          <p:cNvPicPr>
+            <a:picLocks noChangeAspect="1"/>
+          </p:cNvPicPr>
+          <p:nvPr/>
+        </p:nvPicPr>
+        <p:blipFill>
+          <a:blip r:embed="rId25"/>
+          <a:stretch>
+            <a:fillRect/>
+          </a:stretch>
+        </p:blipFill>
+        <p:spPr>
+          <a:xfrm>
+            <a:off x="4241549" y="2208697"/>
+            <a:ext cx="4902452" cy="558829"/>
+          </a:xfrm>
+          <a:prstGeom prst="rect">
+            <a:avLst/>
+          </a:prstGeom>
+        </p:spPr>
+      </p:pic>
+    </p:spTree>
+    <p:extLst>
+      <p:ext uri="{BB962C8B-B14F-4D97-AF65-F5344CB8AC3E}">
+        <p14:creationId xmlns:p14="http://schemas.microsoft.com/office/powerpoint/2010/main" val="1170722481"/>
+      </p:ext>
+    </p:extLst>
+  </p:cSld>
+  <p:clrMapOvr>
+    <a:masterClrMapping/>
+  </p:clrMapOvr>
+</p:sld>
+</file>
+
+<file path=ppt/slides/slide31.xml><?xml version="1.0" encoding="utf-8"?>
+<p:sld xmlns:a="http://schemas.openxmlformats.org/drawingml/2006/main" xmlns:r="http://schemas.openxmlformats.org/officeDocument/2006/relationships" xmlns:p="http://schemas.openxmlformats.org/presentationml/2006/main">
+  <p:cSld>
+    <p:spTree>
+      <p:nvGrpSpPr>
+        <p:cNvPr id="1" name=""/>
+        <p:cNvGrpSpPr/>
+        <p:nvPr/>
+      </p:nvGrpSpPr>
+      <p:grpSpPr>
+        <a:xfrm>
+          <a:off x="0" y="0"/>
+          <a:ext cx="0" cy="0"/>
+          <a:chOff x="0" y="0"/>
+          <a:chExt cx="0" cy="0"/>
+        </a:xfrm>
+      </p:grpSpPr>
+      <p:sp>
+        <p:nvSpPr>
+          <p:cNvPr id="2" name="TextBox 1">
+            <a:extLst>
+              <a:ext uri="{FF2B5EF4-FFF2-40B4-BE49-F238E27FC236}">
+                <a16:creationId xmlns:a16="http://schemas.microsoft.com/office/drawing/2014/main" id="{57D58151-86B3-7A36-A1E3-A3FA01AC8F35}"/>
+              </a:ext>
+            </a:extLst>
+          </p:cNvPr>
+          <p:cNvSpPr txBox="1"/>
+          <p:nvPr/>
+        </p:nvSpPr>
+        <p:spPr>
+          <a:xfrm>
+            <a:off x="5695407" y="102716"/>
+            <a:ext cx="3448594" cy="369332"/>
+          </a:xfrm>
+          <a:prstGeom prst="rect">
+            <a:avLst/>
+          </a:prstGeom>
+          <a:noFill/>
+        </p:spPr>
+        <p:txBody>
+          <a:bodyPr wrap="square" rtlCol="0">
+            <a:spAutoFit/>
+          </a:bodyPr>
+          <a:lstStyle/>
+          <a:p>
+            <a:r>
+              <a:rPr lang="en-US"/>
+              <a:t>Parallelism and Composability</a:t>
+            </a:r>
+          </a:p>
+        </p:txBody>
+      </p:sp>
+      <p:sp>
+        <p:nvSpPr>
+          <p:cNvPr id="3" name="TextBox 2">
+            <a:extLst>
+              <a:ext uri="{FF2B5EF4-FFF2-40B4-BE49-F238E27FC236}">
+                <a16:creationId xmlns:a16="http://schemas.microsoft.com/office/drawing/2014/main" id="{DCD8B5AC-0557-001C-8981-09F1DA2189B7}"/>
+              </a:ext>
+            </a:extLst>
+          </p:cNvPr>
+          <p:cNvSpPr txBox="1"/>
+          <p:nvPr/>
+        </p:nvSpPr>
+        <p:spPr>
+          <a:xfrm>
+            <a:off x="5183776" y="945088"/>
+            <a:ext cx="2468881" cy="461665"/>
+          </a:xfrm>
+          <a:prstGeom prst="rect">
+            <a:avLst/>
+          </a:prstGeom>
+          <a:noFill/>
+          <a:ln>
+            <a:solidFill>
+              <a:schemeClr val="accent5">
+                <a:lumMod val="20000"/>
+                <a:lumOff val="80000"/>
+              </a:schemeClr>
+            </a:solidFill>
+          </a:ln>
+          <a:effectLst>
+            <a:glow rad="101600">
+              <a:schemeClr val="accent1">
+                <a:satMod val="175000"/>
+                <a:alpha val="40000"/>
+              </a:schemeClr>
+            </a:glow>
+          </a:effectLst>
+          <a:scene3d>
+            <a:camera prst="orthographicFront"/>
+            <a:lightRig rig="threePt" dir="t"/>
+          </a:scene3d>
+          <a:sp3d>
+            <a:bevelT w="114300" prst="artDeco"/>
+          </a:sp3d>
+        </p:spPr>
+        <p:txBody>
+          <a:bodyPr wrap="square" rtlCol="0">
+            <a:spAutoFit/>
+          </a:bodyPr>
+          <a:lstStyle/>
+          <a:p>
+            <a:pPr algn="ctr"/>
+            <a:r>
+              <a:rPr lang="en-US" sz="1200" b="1">
+                <a:latin typeface="Consolas" panose="020B0609020204030204" pitchFamily="49" charset="0"/>
+                <a:cs typeface="Times New Roman" panose="02020603050405020304" pitchFamily="18" charset="0"/>
+              </a:rPr>
+              <a:t>Occurrences</a:t>
+            </a:r>
+          </a:p>
+          <a:p>
+            <a:pPr algn="ctr"/>
+            <a:r>
+              <a:rPr lang="en-US" sz="1200" b="1">
+                <a:latin typeface="Consolas" panose="020B0609020204030204" pitchFamily="49" charset="0"/>
+                <a:cs typeface="Times New Roman" panose="02020603050405020304" pitchFamily="18" charset="0"/>
+              </a:rPr>
+              <a:t>(i.e. ED day, vaccine day)</a:t>
+            </a:r>
+          </a:p>
+        </p:txBody>
+      </p:sp>
+      <p:sp>
+        <p:nvSpPr>
+          <p:cNvPr id="4" name="TextBox 3">
+            <a:extLst>
+              <a:ext uri="{FF2B5EF4-FFF2-40B4-BE49-F238E27FC236}">
+                <a16:creationId xmlns:a16="http://schemas.microsoft.com/office/drawing/2014/main" id="{CACCE28A-7E1F-6D48-7A0B-140873068F91}"/>
+              </a:ext>
+            </a:extLst>
+          </p:cNvPr>
+          <p:cNvSpPr txBox="1"/>
+          <p:nvPr/>
+        </p:nvSpPr>
+        <p:spPr>
+          <a:xfrm>
+            <a:off x="4998719" y="1873376"/>
+            <a:ext cx="2838996" cy="461665"/>
+          </a:xfrm>
+          <a:prstGeom prst="rect">
+            <a:avLst/>
+          </a:prstGeom>
+          <a:noFill/>
+          <a:ln>
+            <a:solidFill>
+              <a:schemeClr val="accent5">
+                <a:lumMod val="20000"/>
+                <a:lumOff val="80000"/>
+              </a:schemeClr>
+            </a:solidFill>
+          </a:ln>
+          <a:effectLst>
+            <a:glow rad="101600">
+              <a:schemeClr val="accent1">
+                <a:satMod val="175000"/>
+                <a:alpha val="40000"/>
+              </a:schemeClr>
+            </a:glow>
+          </a:effectLst>
+          <a:scene3d>
+            <a:camera prst="orthographicFront"/>
+            <a:lightRig rig="threePt" dir="t"/>
+          </a:scene3d>
+          <a:sp3d>
+            <a:bevelT w="114300" prst="artDeco"/>
+          </a:sp3d>
+        </p:spPr>
+        <p:txBody>
+          <a:bodyPr wrap="square" rtlCol="0">
+            <a:spAutoFit/>
+          </a:bodyPr>
+          <a:lstStyle/>
+          <a:p>
+            <a:pPr algn="ctr"/>
+            <a:r>
+              <a:rPr lang="en-US" sz="1200" b="1">
+                <a:latin typeface="Consolas" panose="020B0609020204030204" pitchFamily="49" charset="0"/>
+                <a:cs typeface="Times New Roman" panose="02020603050405020304" pitchFamily="18" charset="0"/>
+              </a:rPr>
+              <a:t>OccurrencesWithinSpanAnalyzer</a:t>
+            </a:r>
+          </a:p>
+          <a:p>
+            <a:pPr algn="ctr"/>
+            <a:r>
+              <a:rPr lang="en-US" sz="1200" b="1">
+                <a:latin typeface="Consolas" panose="020B0609020204030204" pitchFamily="49" charset="0"/>
+                <a:cs typeface="Times New Roman" panose="02020603050405020304" pitchFamily="18" charset="0"/>
+              </a:rPr>
+              <a:t>.calc()</a:t>
+            </a:r>
+          </a:p>
+        </p:txBody>
+      </p:sp>
+      <p:sp>
+        <p:nvSpPr>
+          <p:cNvPr id="5" name="TextBox 4">
+            <a:extLst>
+              <a:ext uri="{FF2B5EF4-FFF2-40B4-BE49-F238E27FC236}">
+                <a16:creationId xmlns:a16="http://schemas.microsoft.com/office/drawing/2014/main" id="{34D228A2-6AFB-7FA5-A05D-ED480ED00FC2}"/>
+              </a:ext>
+            </a:extLst>
+          </p:cNvPr>
+          <p:cNvSpPr txBox="1"/>
+          <p:nvPr/>
+        </p:nvSpPr>
+        <p:spPr>
+          <a:xfrm>
+            <a:off x="4761411" y="2776571"/>
+            <a:ext cx="3370218" cy="461665"/>
+          </a:xfrm>
+          <a:prstGeom prst="rect">
+            <a:avLst/>
+          </a:prstGeom>
+          <a:noFill/>
+          <a:ln>
+            <a:solidFill>
+              <a:schemeClr val="accent5">
+                <a:lumMod val="20000"/>
+                <a:lumOff val="80000"/>
+              </a:schemeClr>
+            </a:solidFill>
+          </a:ln>
+          <a:effectLst>
+            <a:glow rad="101600">
+              <a:schemeClr val="accent1">
+                <a:satMod val="175000"/>
+                <a:alpha val="40000"/>
+              </a:schemeClr>
+            </a:glow>
+          </a:effectLst>
+          <a:scene3d>
+            <a:camera prst="orthographicFront"/>
+            <a:lightRig rig="threePt" dir="t"/>
+          </a:scene3d>
+          <a:sp3d>
+            <a:bevelT w="114300" prst="artDeco"/>
+          </a:sp3d>
+        </p:spPr>
+        <p:txBody>
+          <a:bodyPr wrap="square" rtlCol="0">
+            <a:spAutoFit/>
+          </a:bodyPr>
+          <a:lstStyle/>
+          <a:p>
+            <a:pPr algn="ctr"/>
+            <a:r>
+              <a:rPr lang="en-US" sz="1200" b="1">
+                <a:latin typeface="Consolas" panose="020B0609020204030204" pitchFamily="49" charset="0"/>
+                <a:cs typeface="Times New Roman" panose="02020603050405020304" pitchFamily="18" charset="0"/>
+              </a:rPr>
+              <a:t>PipeDelimitedIntermediateOccurences</a:t>
+            </a:r>
+          </a:p>
+          <a:p>
+            <a:pPr algn="ctr"/>
+            <a:r>
+              <a:rPr lang="en-US" sz="1200" b="1">
+                <a:latin typeface="Consolas" panose="020B0609020204030204" pitchFamily="49" charset="0"/>
+                <a:cs typeface="Times New Roman" panose="02020603050405020304" pitchFamily="18" charset="0"/>
+              </a:rPr>
+              <a:t>.self_analyze(), .print_summary()</a:t>
+            </a:r>
+          </a:p>
+        </p:txBody>
+      </p:sp>
+      <p:sp>
+        <p:nvSpPr>
+          <p:cNvPr id="6" name="TextBox 5">
+            <a:extLst>
+              <a:ext uri="{FF2B5EF4-FFF2-40B4-BE49-F238E27FC236}">
+                <a16:creationId xmlns:a16="http://schemas.microsoft.com/office/drawing/2014/main" id="{C79E06BB-A302-5214-11BE-E28285D805C5}"/>
+              </a:ext>
+            </a:extLst>
+          </p:cNvPr>
+          <p:cNvSpPr txBox="1"/>
+          <p:nvPr/>
+        </p:nvSpPr>
+        <p:spPr>
+          <a:xfrm>
+            <a:off x="777239" y="945296"/>
+            <a:ext cx="2468881" cy="461665"/>
+          </a:xfrm>
+          <a:prstGeom prst="rect">
+            <a:avLst/>
+          </a:prstGeom>
+          <a:noFill/>
+          <a:ln>
+            <a:solidFill>
+              <a:schemeClr val="accent5">
+                <a:lumMod val="20000"/>
+                <a:lumOff val="80000"/>
+              </a:schemeClr>
+            </a:solidFill>
+          </a:ln>
+          <a:effectLst>
+            <a:glow rad="101600">
+              <a:schemeClr val="accent2">
+                <a:satMod val="175000"/>
+                <a:alpha val="40000"/>
+              </a:schemeClr>
+            </a:glow>
+          </a:effectLst>
+          <a:scene3d>
+            <a:camera prst="orthographicFront"/>
+            <a:lightRig rig="threePt" dir="t"/>
+          </a:scene3d>
+          <a:sp3d>
+            <a:bevelT w="114300" prst="artDeco"/>
+          </a:sp3d>
+        </p:spPr>
+        <p:txBody>
+          <a:bodyPr wrap="square" rtlCol="0">
+            <a:spAutoFit/>
+          </a:bodyPr>
+          <a:lstStyle/>
+          <a:p>
+            <a:pPr algn="ctr"/>
+            <a:r>
+              <a:rPr lang="en-US" sz="1200" b="1">
+                <a:latin typeface="Consolas" panose="020B0609020204030204" pitchFamily="49" charset="0"/>
+                <a:cs typeface="Times New Roman" panose="02020603050405020304" pitchFamily="18" charset="0"/>
+              </a:rPr>
+              <a:t>Events</a:t>
+            </a:r>
+            <a:br>
+              <a:rPr lang="en-US" sz="1200" b="1">
+                <a:latin typeface="Consolas" panose="020B0609020204030204" pitchFamily="49" charset="0"/>
+                <a:cs typeface="Times New Roman" panose="02020603050405020304" pitchFamily="18" charset="0"/>
+              </a:rPr>
+            </a:br>
+            <a:r>
+              <a:rPr lang="en-US" sz="1200" b="1">
+                <a:latin typeface="Consolas" panose="020B0609020204030204" pitchFamily="49" charset="0"/>
+                <a:cs typeface="Times New Roman" panose="02020603050405020304" pitchFamily="18" charset="0"/>
+              </a:rPr>
+              <a:t>(i.e. insurance-coverage)</a:t>
+            </a:r>
+          </a:p>
+        </p:txBody>
+      </p:sp>
+      <p:sp>
+        <p:nvSpPr>
+          <p:cNvPr id="7" name="TextBox 6">
+            <a:extLst>
+              <a:ext uri="{FF2B5EF4-FFF2-40B4-BE49-F238E27FC236}">
+                <a16:creationId xmlns:a16="http://schemas.microsoft.com/office/drawing/2014/main" id="{7FB24CEA-30E5-5CBA-B6FD-8AD5009A90DA}"/>
+              </a:ext>
+            </a:extLst>
+          </p:cNvPr>
+          <p:cNvSpPr txBox="1"/>
+          <p:nvPr/>
+        </p:nvSpPr>
+        <p:spPr>
+          <a:xfrm>
+            <a:off x="592182" y="1873584"/>
+            <a:ext cx="2838996" cy="461665"/>
+          </a:xfrm>
+          <a:prstGeom prst="rect">
+            <a:avLst/>
+          </a:prstGeom>
+          <a:noFill/>
+          <a:ln>
+            <a:solidFill>
+              <a:schemeClr val="accent5">
+                <a:lumMod val="20000"/>
+                <a:lumOff val="80000"/>
+              </a:schemeClr>
+            </a:solidFill>
+          </a:ln>
+          <a:effectLst>
+            <a:glow rad="101600">
+              <a:schemeClr val="accent2">
+                <a:satMod val="175000"/>
+                <a:alpha val="40000"/>
+              </a:schemeClr>
+            </a:glow>
+          </a:effectLst>
+          <a:scene3d>
+            <a:camera prst="orthographicFront"/>
+            <a:lightRig rig="threePt" dir="t"/>
+          </a:scene3d>
+          <a:sp3d>
+            <a:bevelT w="114300" prst="artDeco"/>
+          </a:sp3d>
+        </p:spPr>
+        <p:txBody>
+          <a:bodyPr wrap="square" rtlCol="0">
+            <a:spAutoFit/>
+          </a:bodyPr>
+          <a:lstStyle/>
+          <a:p>
+            <a:pPr algn="ctr"/>
+            <a:r>
+              <a:rPr lang="en-US" sz="1200" b="1">
+                <a:latin typeface="Consolas" panose="020B0609020204030204" pitchFamily="49" charset="0"/>
+                <a:cs typeface="Times New Roman" panose="02020603050405020304" pitchFamily="18" charset="0"/>
+              </a:rPr>
+              <a:t>EventsWithinSpanAnalyzer</a:t>
+            </a:r>
+          </a:p>
+          <a:p>
+            <a:pPr algn="ctr"/>
+            <a:r>
+              <a:rPr lang="en-US" sz="1200" b="1">
+                <a:latin typeface="Consolas" panose="020B0609020204030204" pitchFamily="49" charset="0"/>
+                <a:cs typeface="Times New Roman" panose="02020603050405020304" pitchFamily="18" charset="0"/>
+              </a:rPr>
+              <a:t>.calc_active_vs_inactive()</a:t>
+            </a:r>
+          </a:p>
+        </p:txBody>
+      </p:sp>
+      <p:sp>
+        <p:nvSpPr>
+          <p:cNvPr id="8" name="TextBox 7">
+            <a:extLst>
+              <a:ext uri="{FF2B5EF4-FFF2-40B4-BE49-F238E27FC236}">
+                <a16:creationId xmlns:a16="http://schemas.microsoft.com/office/drawing/2014/main" id="{05E27686-F227-D7B9-185A-555BA080B570}"/>
+              </a:ext>
+            </a:extLst>
+          </p:cNvPr>
+          <p:cNvSpPr txBox="1"/>
+          <p:nvPr/>
+        </p:nvSpPr>
+        <p:spPr>
+          <a:xfrm>
+            <a:off x="354874" y="2776779"/>
+            <a:ext cx="3370218" cy="461665"/>
+          </a:xfrm>
+          <a:prstGeom prst="rect">
+            <a:avLst/>
+          </a:prstGeom>
+          <a:noFill/>
+          <a:ln>
+            <a:solidFill>
+              <a:schemeClr val="accent5">
+                <a:lumMod val="20000"/>
+                <a:lumOff val="80000"/>
+              </a:schemeClr>
+            </a:solidFill>
+          </a:ln>
+          <a:effectLst>
+            <a:glow rad="101600">
+              <a:schemeClr val="accent2">
+                <a:satMod val="175000"/>
+                <a:alpha val="40000"/>
+              </a:schemeClr>
+            </a:glow>
+          </a:effectLst>
+          <a:scene3d>
+            <a:camera prst="orthographicFront"/>
+            <a:lightRig rig="threePt" dir="t"/>
+          </a:scene3d>
+          <a:sp3d>
+            <a:bevelT w="114300" prst="artDeco"/>
+          </a:sp3d>
+        </p:spPr>
+        <p:txBody>
+          <a:bodyPr wrap="square" rtlCol="0">
+            <a:spAutoFit/>
+          </a:bodyPr>
+          <a:lstStyle/>
+          <a:p>
+            <a:pPr algn="ctr"/>
+            <a:r>
+              <a:rPr lang="en-US" sz="1200" b="1">
+                <a:latin typeface="Consolas" panose="020B0609020204030204" pitchFamily="49" charset="0"/>
+                <a:cs typeface="Times New Roman" panose="02020603050405020304" pitchFamily="18" charset="0"/>
+              </a:rPr>
+              <a:t>PipeDelimitedIntermediateEvents</a:t>
+            </a:r>
+          </a:p>
+          <a:p>
+            <a:pPr algn="ctr"/>
+            <a:r>
+              <a:rPr lang="en-US" sz="1200" b="1">
+                <a:latin typeface="Consolas" panose="020B0609020204030204" pitchFamily="49" charset="0"/>
+                <a:cs typeface="Times New Roman" panose="02020603050405020304" pitchFamily="18" charset="0"/>
+              </a:rPr>
+              <a:t>.self_analyze(), .tier1/2/3()</a:t>
+            </a:r>
+          </a:p>
+        </p:txBody>
+      </p:sp>
+      <p:sp>
+        <p:nvSpPr>
+          <p:cNvPr id="9" name="TextBox 8">
+            <a:extLst>
+              <a:ext uri="{FF2B5EF4-FFF2-40B4-BE49-F238E27FC236}">
+                <a16:creationId xmlns:a16="http://schemas.microsoft.com/office/drawing/2014/main" id="{E201D2B9-E328-98D6-72D3-A0C7AE802AC3}"/>
+              </a:ext>
+            </a:extLst>
+          </p:cNvPr>
+          <p:cNvSpPr txBox="1"/>
+          <p:nvPr/>
+        </p:nvSpPr>
+        <p:spPr>
+          <a:xfrm>
+            <a:off x="3608614" y="3706284"/>
+            <a:ext cx="1390105" cy="261610"/>
+          </a:xfrm>
+          <a:prstGeom prst="rect">
+            <a:avLst/>
+          </a:prstGeom>
+          <a:noFill/>
+          <a:ln>
+            <a:solidFill>
+              <a:schemeClr val="tx1"/>
+            </a:solidFill>
+            <a:prstDash val="sysDot"/>
+          </a:ln>
+        </p:spPr>
+        <p:txBody>
+          <a:bodyPr wrap="square" rtlCol="0">
+            <a:spAutoFit/>
+          </a:bodyPr>
+          <a:lstStyle/>
+          <a:p>
+            <a:pPr algn="ctr"/>
+            <a:r>
+              <a:rPr lang="en-US" sz="1100">
+                <a:latin typeface="Abadi" panose="020B0604020104020204" pitchFamily="34" charset="0"/>
+              </a:rPr>
+              <a:t>add objects</a:t>
+            </a:r>
+          </a:p>
+        </p:txBody>
+      </p:sp>
+      <mc:AlternateContent xmlns:mc="http://schemas.openxmlformats.org/markup-compatibility/2006" xmlns:p14="http://schemas.microsoft.com/office/powerpoint/2010/main">
+        <mc:Choice Requires="p14">
+          <p:contentPart p14:bwMode="auto" r:id="rId2">
+            <p14:nvContentPartPr>
+              <p14:cNvPr id="25" name="Ink 24">
+                <a:extLst>
+                  <a:ext uri="{FF2B5EF4-FFF2-40B4-BE49-F238E27FC236}">
+                    <a16:creationId xmlns:a16="http://schemas.microsoft.com/office/drawing/2014/main" id="{68DB5CBF-D701-D322-4416-C438505D842C}"/>
+                  </a:ext>
+                </a:extLst>
+              </p14:cNvPr>
+              <p14:cNvContentPartPr/>
+              <p14:nvPr/>
+            </p14:nvContentPartPr>
+            <p14:xfrm>
+              <a:off x="4036269" y="653091"/>
+              <a:ext cx="360" cy="360"/>
+            </p14:xfrm>
+          </p:contentPart>
+        </mc:Choice>
+        <mc:Fallback xmlns="">
+          <p:pic>
+            <p:nvPicPr>
+              <p:cNvPr id="25" name="Ink 24">
+                <a:extLst>
+                  <a:ext uri="{FF2B5EF4-FFF2-40B4-BE49-F238E27FC236}">
+                    <a16:creationId xmlns:a16="http://schemas.microsoft.com/office/drawing/2014/main" id="{68DB5CBF-D701-D322-4416-C438505D842C}"/>
+                  </a:ext>
+                </a:extLst>
+              </p:cNvPr>
+              <p:cNvPicPr/>
+              <p:nvPr/>
+            </p:nvPicPr>
+            <p:blipFill>
+              <a:blip r:embed="rId23"/>
+              <a:stretch>
+                <a:fillRect/>
+              </a:stretch>
+            </p:blipFill>
+            <p:spPr>
+              <a:xfrm>
+                <a:off x="4030149" y="646971"/>
+                <a:ext cx="12600" cy="12600"/>
+              </a:xfrm>
+              <a:prstGeom prst="rect">
+                <a:avLst/>
+              </a:prstGeom>
+            </p:spPr>
+          </p:pic>
+        </mc:Fallback>
+      </mc:AlternateContent>
+      <p:cxnSp>
+        <p:nvCxnSpPr>
+          <p:cNvPr id="20" name="Straight Arrow Connector 19">
+            <a:extLst>
+              <a:ext uri="{FF2B5EF4-FFF2-40B4-BE49-F238E27FC236}">
+                <a16:creationId xmlns:a16="http://schemas.microsoft.com/office/drawing/2014/main" id="{05A859ED-E06B-274D-17CB-3FEA7780F090}"/>
+              </a:ext>
+            </a:extLst>
+          </p:cNvPr>
+          <p:cNvCxnSpPr>
+            <a:stCxn id="8" idx="2"/>
+            <a:endCxn id="9" idx="0"/>
+          </p:cNvCxnSpPr>
+          <p:nvPr/>
+        </p:nvCxnSpPr>
+        <p:spPr>
+          <a:xfrm>
+            <a:off x="2039983" y="3238444"/>
+            <a:ext cx="2263684" cy="467840"/>
+          </a:xfrm>
+          <a:prstGeom prst="straightConnector1">
+            <a:avLst/>
+          </a:prstGeom>
+          <a:ln>
+            <a:tailEnd type="triangle"/>
+          </a:ln>
+        </p:spPr>
+        <p:style>
+          <a:lnRef idx="1">
+            <a:schemeClr val="accent1"/>
+          </a:lnRef>
+          <a:fillRef idx="0">
+            <a:schemeClr val="accent1"/>
+          </a:fillRef>
+          <a:effectRef idx="0">
+            <a:schemeClr val="accent1"/>
+          </a:effectRef>
+          <a:fontRef idx="minor">
+            <a:schemeClr val="tx1"/>
+          </a:fontRef>
+        </p:style>
+      </p:cxnSp>
+      <p:cxnSp>
+        <p:nvCxnSpPr>
+          <p:cNvPr id="26" name="Straight Arrow Connector 25">
+            <a:extLst>
+              <a:ext uri="{FF2B5EF4-FFF2-40B4-BE49-F238E27FC236}">
+                <a16:creationId xmlns:a16="http://schemas.microsoft.com/office/drawing/2014/main" id="{46575BD2-FB31-A170-A790-2AFEEA89FB6C}"/>
+              </a:ext>
+            </a:extLst>
+          </p:cNvPr>
+          <p:cNvCxnSpPr>
+            <a:cxnSpLocks/>
+            <a:stCxn id="5" idx="2"/>
+            <a:endCxn id="9" idx="0"/>
+          </p:cNvCxnSpPr>
+          <p:nvPr/>
+        </p:nvCxnSpPr>
+        <p:spPr>
+          <a:xfrm flipH="1">
+            <a:off x="4303667" y="3238236"/>
+            <a:ext cx="2142853" cy="468048"/>
+          </a:xfrm>
+          <a:prstGeom prst="straightConnector1">
+            <a:avLst/>
+          </a:prstGeom>
+          <a:ln>
+            <a:tailEnd type="triangle"/>
+          </a:ln>
+        </p:spPr>
+        <p:style>
+          <a:lnRef idx="1">
+            <a:schemeClr val="accent1"/>
+          </a:lnRef>
+          <a:fillRef idx="0">
+            <a:schemeClr val="accent1"/>
+          </a:fillRef>
+          <a:effectRef idx="0">
+            <a:schemeClr val="accent1"/>
+          </a:effectRef>
+          <a:fontRef idx="minor">
+            <a:schemeClr val="tx1"/>
+          </a:fontRef>
+        </p:style>
+      </p:cxnSp>
+      <p:cxnSp>
+        <p:nvCxnSpPr>
+          <p:cNvPr id="29" name="Straight Arrow Connector 28">
+            <a:extLst>
+              <a:ext uri="{FF2B5EF4-FFF2-40B4-BE49-F238E27FC236}">
+                <a16:creationId xmlns:a16="http://schemas.microsoft.com/office/drawing/2014/main" id="{77BE384C-5999-6A35-D7ED-50B38B267B85}"/>
+              </a:ext>
+            </a:extLst>
+          </p:cNvPr>
+          <p:cNvCxnSpPr>
+            <a:cxnSpLocks/>
+            <a:stCxn id="5" idx="2"/>
+          </p:cNvCxnSpPr>
+          <p:nvPr/>
+        </p:nvCxnSpPr>
+        <p:spPr>
+          <a:xfrm flipH="1">
+            <a:off x="5375093" y="3238236"/>
+            <a:ext cx="1071427" cy="1124758"/>
+          </a:xfrm>
+          <a:prstGeom prst="straightConnector1">
+            <a:avLst/>
+          </a:prstGeom>
+          <a:ln>
+            <a:tailEnd type="triangle"/>
+          </a:ln>
+        </p:spPr>
+        <p:style>
+          <a:lnRef idx="1">
+            <a:schemeClr val="accent1"/>
+          </a:lnRef>
+          <a:fillRef idx="0">
+            <a:schemeClr val="accent1"/>
+          </a:fillRef>
+          <a:effectRef idx="0">
+            <a:schemeClr val="accent1"/>
+          </a:effectRef>
+          <a:fontRef idx="minor">
+            <a:schemeClr val="tx1"/>
+          </a:fontRef>
+        </p:style>
+      </p:cxnSp>
+      <p:sp>
+        <p:nvSpPr>
+          <p:cNvPr id="11" name="TextBox 10">
+            <a:extLst>
+              <a:ext uri="{FF2B5EF4-FFF2-40B4-BE49-F238E27FC236}">
+                <a16:creationId xmlns:a16="http://schemas.microsoft.com/office/drawing/2014/main" id="{E62B8F02-B538-3AF8-2F69-2D570ECB750D}"/>
+              </a:ext>
+            </a:extLst>
+          </p:cNvPr>
+          <p:cNvSpPr txBox="1"/>
+          <p:nvPr/>
+        </p:nvSpPr>
+        <p:spPr>
+          <a:xfrm>
+            <a:off x="2618558" y="4408731"/>
+            <a:ext cx="3370218" cy="276999"/>
+          </a:xfrm>
+          <a:prstGeom prst="rect">
+            <a:avLst/>
+          </a:prstGeom>
+          <a:noFill/>
+          <a:ln>
+            <a:solidFill>
+              <a:schemeClr val="accent5">
+                <a:lumMod val="20000"/>
+                <a:lumOff val="80000"/>
+              </a:schemeClr>
+            </a:solidFill>
+          </a:ln>
+          <a:effectLst>
+            <a:glow rad="101600">
+              <a:schemeClr val="accent4">
+                <a:satMod val="175000"/>
+                <a:alpha val="40000"/>
+              </a:schemeClr>
+            </a:glow>
+          </a:effectLst>
+          <a:scene3d>
+            <a:camera prst="orthographicFront"/>
+            <a:lightRig rig="threePt" dir="t"/>
+          </a:scene3d>
+          <a:sp3d>
+            <a:bevelT w="114300" prst="artDeco"/>
+          </a:sp3d>
+        </p:spPr>
+        <p:txBody>
+          <a:bodyPr wrap="square" rtlCol="0">
+            <a:spAutoFit/>
+          </a:bodyPr>
+          <a:lstStyle/>
+          <a:p>
+            <a:pPr algn="ctr"/>
+            <a:r>
+              <a:rPr lang="en-US" sz="1200" b="1">
+                <a:latin typeface="Consolas" panose="020B0609020204030204" pitchFamily="49" charset="0"/>
+                <a:cs typeface="Times New Roman" panose="02020603050405020304" pitchFamily="18" charset="0"/>
+              </a:rPr>
+              <a:t>StackedBarsPlotter</a:t>
+            </a:r>
+          </a:p>
+        </p:txBody>
+      </p:sp>
+      <p:cxnSp>
+        <p:nvCxnSpPr>
+          <p:cNvPr id="14" name="Straight Arrow Connector 13">
+            <a:extLst>
+              <a:ext uri="{FF2B5EF4-FFF2-40B4-BE49-F238E27FC236}">
+                <a16:creationId xmlns:a16="http://schemas.microsoft.com/office/drawing/2014/main" id="{A6443675-EB6E-072E-E721-E90B1ED7F448}"/>
+              </a:ext>
+            </a:extLst>
+          </p:cNvPr>
+          <p:cNvCxnSpPr>
+            <a:cxnSpLocks/>
+            <a:stCxn id="8" idx="2"/>
+          </p:cNvCxnSpPr>
+          <p:nvPr/>
+        </p:nvCxnSpPr>
+        <p:spPr>
+          <a:xfrm>
+            <a:off x="2039983" y="3238444"/>
+            <a:ext cx="1055642" cy="1170287"/>
+          </a:xfrm>
+          <a:prstGeom prst="straightConnector1">
+            <a:avLst/>
+          </a:prstGeom>
+          <a:ln>
+            <a:tailEnd type="triangle"/>
+          </a:ln>
+        </p:spPr>
+        <p:style>
+          <a:lnRef idx="1">
+            <a:schemeClr val="accent1"/>
+          </a:lnRef>
+          <a:fillRef idx="0">
+            <a:schemeClr val="accent1"/>
+          </a:fillRef>
+          <a:effectRef idx="0">
+            <a:schemeClr val="accent1"/>
+          </a:effectRef>
+          <a:fontRef idx="minor">
+            <a:schemeClr val="tx1"/>
+          </a:fontRef>
+        </p:style>
+      </p:cxnSp>
+      <p:cxnSp>
+        <p:nvCxnSpPr>
+          <p:cNvPr id="17" name="Straight Arrow Connector 16">
+            <a:extLst>
+              <a:ext uri="{FF2B5EF4-FFF2-40B4-BE49-F238E27FC236}">
+                <a16:creationId xmlns:a16="http://schemas.microsoft.com/office/drawing/2014/main" id="{7B26C338-B9CF-64EE-5B48-270AF23AA4BE}"/>
+              </a:ext>
+            </a:extLst>
+          </p:cNvPr>
+          <p:cNvCxnSpPr>
+            <a:cxnSpLocks/>
+            <a:stCxn id="9" idx="2"/>
+            <a:endCxn id="11" idx="0"/>
+          </p:cNvCxnSpPr>
+          <p:nvPr/>
+        </p:nvCxnSpPr>
+        <p:spPr>
+          <a:xfrm>
+            <a:off x="4303667" y="3967894"/>
+            <a:ext cx="0" cy="440837"/>
+          </a:xfrm>
+          <a:prstGeom prst="straightConnector1">
+            <a:avLst/>
+          </a:prstGeom>
+          <a:ln>
+            <a:tailEnd type="triangle"/>
+          </a:ln>
+        </p:spPr>
+        <p:style>
+          <a:lnRef idx="1">
+            <a:schemeClr val="accent1"/>
+          </a:lnRef>
+          <a:fillRef idx="0">
+            <a:schemeClr val="accent1"/>
+          </a:fillRef>
+          <a:effectRef idx="0">
+            <a:schemeClr val="accent1"/>
+          </a:effectRef>
+          <a:fontRef idx="minor">
+            <a:schemeClr val="tx1"/>
+          </a:fontRef>
+        </p:style>
+      </p:cxnSp>
+      <p:sp>
+        <p:nvSpPr>
+          <p:cNvPr id="21" name="TextBox 20">
+            <a:extLst>
+              <a:ext uri="{FF2B5EF4-FFF2-40B4-BE49-F238E27FC236}">
+                <a16:creationId xmlns:a16="http://schemas.microsoft.com/office/drawing/2014/main" id="{E78E5E55-A5DE-FE84-CBF1-8BA954AEF9AB}"/>
+              </a:ext>
+            </a:extLst>
+          </p:cNvPr>
+          <p:cNvSpPr txBox="1"/>
+          <p:nvPr/>
+        </p:nvSpPr>
+        <p:spPr>
+          <a:xfrm>
+            <a:off x="6123215" y="3758505"/>
+            <a:ext cx="2592977" cy="1384995"/>
+          </a:xfrm>
+          <a:prstGeom prst="rect">
+            <a:avLst/>
+          </a:prstGeom>
+          <a:noFill/>
+        </p:spPr>
+        <p:txBody>
+          <a:bodyPr wrap="square" rtlCol="0">
+            <a:spAutoFit/>
+          </a:bodyPr>
+          <a:lstStyle/>
+          <a:p>
+            <a:r>
+              <a:rPr lang="en-US" sz="1200" i="1"/>
+              <a:t>Plotter can therefore plot either occurrences within an span; or events within a span; or both within a span.</a:t>
+            </a:r>
+            <a:br>
+              <a:rPr lang="en-US" sz="1200" i="1"/>
+            </a:br>
+            <a:r>
+              <a:rPr lang="en-US" sz="1200" i="1"/>
+              <a:t>All orchestrated by a YAML that understands the objects.</a:t>
+            </a:r>
+          </a:p>
+          <a:p>
+            <a:r>
+              <a:rPr lang="en-US" sz="1200" i="1"/>
+              <a:t>The plotter does not care which path was taken.</a:t>
+            </a:r>
+          </a:p>
+        </p:txBody>
+      </p:sp>
+    </p:spTree>
+    <p:extLst>
+      <p:ext uri="{BB962C8B-B14F-4D97-AF65-F5344CB8AC3E}">
+        <p14:creationId xmlns:p14="http://schemas.microsoft.com/office/powerpoint/2010/main" val="2317189406"/>
+      </p:ext>
+    </p:extLst>
+  </p:cSld>
+  <p:clrMapOvr>
+    <a:masterClrMapping/>
+  </p:clrMapOvr>
+</p:sld>
+</file>
+
+<file path=ppt/slides/slide32.xml><?xml version="1.0" encoding="utf-8"?>
+<p:sld xmlns:a="http://schemas.openxmlformats.org/drawingml/2006/main" xmlns:r="http://schemas.openxmlformats.org/officeDocument/2006/relationships" xmlns:p="http://schemas.openxmlformats.org/presentationml/2006/main">
+  <p:cSld>
+    <p:spTree>
+      <p:nvGrpSpPr>
         <p:cNvPr id="1" name=""/>
         <p:cNvGrpSpPr/>
         <p:nvPr/>
@@ -9081,7 +9151,7 @@
 </p:sld>
 </file>
 
-<file path=ppt/slides/slide31.xml><?xml version="1.0" encoding="utf-8"?>
+<file path=ppt/slides/slide33.xml><?xml version="1.0" encoding="utf-8"?>
 <p:sld xmlns:a="http://schemas.openxmlformats.org/drawingml/2006/main" xmlns:r="http://schemas.openxmlformats.org/officeDocument/2006/relationships" xmlns:p="http://schemas.openxmlformats.org/presentationml/2006/main">
   <p:cSld>
     <p:spTree>
@@ -9624,7 +9694,7 @@
 </p:sld>
 </file>
 
-<file path=ppt/slides/slide32.xml><?xml version="1.0" encoding="utf-8"?>
+<file path=ppt/slides/slide34.xml><?xml version="1.0" encoding="utf-8"?>
 <p:sld xmlns:a="http://schemas.openxmlformats.org/drawingml/2006/main" xmlns:r="http://schemas.openxmlformats.org/officeDocument/2006/relationships" xmlns:p="http://schemas.openxmlformats.org/presentationml/2006/main">
   <p:cSld>
     <p:spTree>
@@ -10165,7 +10235,7 @@
 </p:sld>
 </file>
 
-<file path=ppt/slides/slide33.xml><?xml version="1.0" encoding="utf-8"?>
+<file path=ppt/slides/slide35.xml><?xml version="1.0" encoding="utf-8"?>
 <p:sld xmlns:a="http://schemas.openxmlformats.org/drawingml/2006/main" xmlns:r="http://schemas.openxmlformats.org/officeDocument/2006/relationships" xmlns:p="http://schemas.openxmlformats.org/presentationml/2006/main">
   <p:cSld>
     <p:spTree>
@@ -10195,7 +10265,7 @@
 </p:sld>
 </file>
 
-<file path=ppt/slides/slide34.xml><?xml version="1.0" encoding="utf-8"?>
+<file path=ppt/slides/slide36.xml><?xml version="1.0" encoding="utf-8"?>
 <p:sld xmlns:a="http://schemas.openxmlformats.org/drawingml/2006/main" xmlns:r="http://schemas.openxmlformats.org/officeDocument/2006/relationships" xmlns:p="http://schemas.openxmlformats.org/presentationml/2006/main">
   <p:cSld>
     <p:spTree>
@@ -10225,7 +10295,7 @@
 </p:sld>
 </file>
 
-<file path=ppt/slides/slide35.xml><?xml version="1.0" encoding="utf-8"?>
+<file path=ppt/slides/slide37.xml><?xml version="1.0" encoding="utf-8"?>
 <p:sld xmlns:a="http://schemas.openxmlformats.org/drawingml/2006/main" xmlns:r="http://schemas.openxmlformats.org/officeDocument/2006/relationships" xmlns:p="http://schemas.openxmlformats.org/presentationml/2006/main">
   <p:cSld>
     <p:spTree>
@@ -10255,7 +10325,7 @@
 </p:sld>
 </file>
 
-<file path=ppt/slides/slide36.xml><?xml version="1.0" encoding="utf-8"?>
+<file path=ppt/slides/slide38.xml><?xml version="1.0" encoding="utf-8"?>
 <p:sld xmlns:a="http://schemas.openxmlformats.org/drawingml/2006/main" xmlns:r="http://schemas.openxmlformats.org/officeDocument/2006/relationships" xmlns:p="http://schemas.openxmlformats.org/presentationml/2006/main">
   <p:cSld name="Slide 1">
     <p:bg>
@@ -10507,7 +10577,7 @@
 </p:sld>
 </file>
 
-<file path=ppt/slides/slide37.xml><?xml version="1.0" encoding="utf-8"?>
+<file path=ppt/slides/slide39.xml><?xml version="1.0" encoding="utf-8"?>
 <p:sld xmlns:a="http://schemas.openxmlformats.org/drawingml/2006/main" xmlns:r="http://schemas.openxmlformats.org/officeDocument/2006/relationships" xmlns:p="http://schemas.openxmlformats.org/presentationml/2006/main">
   <p:cSld name="Slide 2">
     <p:bg>
@@ -12045,2741 +12115,6 @@
               <a:t>until eventi.</a:t>
             </a:r>
             <a:endParaRPr lang="en-US" sz="1400" dirty="0"/>
-          </a:p>
-        </p:txBody>
-      </p:sp>
-    </p:spTree>
-  </p:cSld>
-  <p:clrMapOvr>
-    <a:masterClrMapping/>
-  </p:clrMapOvr>
-</p:sld>
-</file>
-
-<file path=ppt/slides/slide38.xml><?xml version="1.0" encoding="utf-8"?>
-<p:sld xmlns:a="http://schemas.openxmlformats.org/drawingml/2006/main" xmlns:r="http://schemas.openxmlformats.org/officeDocument/2006/relationships" xmlns:p="http://schemas.openxmlformats.org/presentationml/2006/main">
-  <p:cSld name="Slide 3">
-    <p:bg>
-      <p:bgPr>
-        <a:solidFill>
-          <a:srgbClr val="F4F8FB"/>
-        </a:solidFill>
-        <a:effectLst/>
-      </p:bgPr>
-    </p:bg>
-    <p:spTree>
-      <p:nvGrpSpPr>
-        <p:cNvPr id="1" name=""/>
-        <p:cNvGrpSpPr/>
-        <p:nvPr/>
-      </p:nvGrpSpPr>
-      <p:grpSpPr>
-        <a:xfrm>
-          <a:off x="0" y="0"/>
-          <a:ext cx="0" cy="0"/>
-          <a:chOff x="0" y="0"/>
-          <a:chExt cx="0" cy="0"/>
-        </a:xfrm>
-      </p:grpSpPr>
-      <p:sp>
-        <p:nvSpPr>
-          <p:cNvPr id="2" name="Text 0"/>
-          <p:cNvSpPr/>
-          <p:nvPr/>
-        </p:nvSpPr>
-        <p:spPr>
-          <a:xfrm>
-            <a:off x="457200" y="228600"/>
-            <a:ext cx="8229600" cy="640080"/>
-          </a:xfrm>
-          <a:prstGeom prst="rect">
-            <a:avLst/>
-          </a:prstGeom>
-          <a:noFill/>
-          <a:ln/>
-        </p:spPr>
-        <p:txBody>
-          <a:bodyPr wrap="square" lIns="0" tIns="0" rIns="0" bIns="0" rtlCol="0" anchor="ctr"/>
-          <a:lstStyle/>
-          <a:p>
-            <a:pPr marL="0" indent="0" algn="l">
-              <a:buNone/>
-            </a:pPr>
-            <a:r>
-              <a:rPr lang="en-US" sz="3200" b="1" dirty="0">
-                <a:solidFill>
-                  <a:srgbClr val="0D2B45"/>
-                </a:solidFill>
-                <a:latin typeface="Calibri" pitchFamily="34" charset="0"/>
-                <a:ea typeface="Calibri" pitchFamily="34" charset="-122"/>
-                <a:cs typeface="Calibri" pitchFamily="34" charset="-120"/>
-              </a:rPr>
-              <a:t>The Four-Layer Architecture</a:t>
-            </a:r>
-            <a:endParaRPr lang="en-US" sz="3200" dirty="0"/>
-          </a:p>
-        </p:txBody>
-      </p:sp>
-      <p:sp>
-        <p:nvSpPr>
-          <p:cNvPr id="3" name="Shape 1"/>
-          <p:cNvSpPr/>
-          <p:nvPr/>
-        </p:nvSpPr>
-        <p:spPr>
-          <a:xfrm>
-            <a:off x="457200" y="886968"/>
-            <a:ext cx="8229600" cy="36576"/>
-          </a:xfrm>
-          <a:prstGeom prst="rect">
-            <a:avLst/>
-          </a:prstGeom>
-          <a:solidFill>
-            <a:srgbClr val="028090"/>
-          </a:solidFill>
-          <a:ln/>
-        </p:spPr>
-        <p:txBody>
-          <a:bodyPr/>
-          <a:lstStyle/>
-          <a:p>
-            <a:endParaRPr lang="en-US"/>
-          </a:p>
-        </p:txBody>
-      </p:sp>
-      <p:sp>
-        <p:nvSpPr>
-          <p:cNvPr id="4" name="Shape 2"/>
-          <p:cNvSpPr/>
-          <p:nvPr/>
-        </p:nvSpPr>
-        <p:spPr>
-          <a:xfrm>
-            <a:off x="365760" y="1005840"/>
-            <a:ext cx="4389120" cy="594360"/>
-          </a:xfrm>
-          <a:prstGeom prst="rect">
-            <a:avLst/>
-          </a:prstGeom>
-          <a:solidFill>
-            <a:srgbClr val="0D2B45"/>
-          </a:solidFill>
-          <a:ln/>
-        </p:spPr>
-        <p:txBody>
-          <a:bodyPr/>
-          <a:lstStyle/>
-          <a:p>
-            <a:endParaRPr lang="en-US"/>
-          </a:p>
-        </p:txBody>
-      </p:sp>
-      <p:sp>
-        <p:nvSpPr>
-          <p:cNvPr id="5" name="Text 3"/>
-          <p:cNvSpPr/>
-          <p:nvPr/>
-        </p:nvSpPr>
-        <p:spPr>
-          <a:xfrm>
-            <a:off x="457200" y="1042416"/>
-            <a:ext cx="4206240" cy="256032"/>
-          </a:xfrm>
-          <a:prstGeom prst="rect">
-            <a:avLst/>
-          </a:prstGeom>
-          <a:noFill/>
-          <a:ln/>
-        </p:spPr>
-        <p:txBody>
-          <a:bodyPr wrap="square" lIns="0" tIns="0" rIns="0" bIns="0" rtlCol="0" anchor="ctr"/>
-          <a:lstStyle/>
-          <a:p>
-            <a:pPr marL="0" indent="0" algn="l">
-              <a:buNone/>
-            </a:pPr>
-            <a:r>
-              <a:rPr lang="en-US" sz="1400" b="1" dirty="0">
-                <a:solidFill>
-                  <a:srgbClr val="FFFFFF"/>
-                </a:solidFill>
-                <a:latin typeface="Calibri" pitchFamily="34" charset="0"/>
-                <a:ea typeface="Calibri" pitchFamily="34" charset="-122"/>
-                <a:cs typeface="Calibri" pitchFamily="34" charset="-120"/>
-              </a:rPr>
-              <a:t>Semantics</a:t>
-            </a:r>
-            <a:endParaRPr lang="en-US" sz="1400" dirty="0"/>
-          </a:p>
-        </p:txBody>
-      </p:sp>
-      <p:sp>
-        <p:nvSpPr>
-          <p:cNvPr id="6" name="Text 4"/>
-          <p:cNvSpPr/>
-          <p:nvPr/>
-        </p:nvSpPr>
-        <p:spPr>
-          <a:xfrm>
-            <a:off x="457200" y="1307592"/>
-            <a:ext cx="4206240" cy="228600"/>
-          </a:xfrm>
-          <a:prstGeom prst="rect">
-            <a:avLst/>
-          </a:prstGeom>
-          <a:noFill/>
-          <a:ln/>
-        </p:spPr>
-        <p:txBody>
-          <a:bodyPr wrap="square" lIns="0" tIns="0" rIns="0" bIns="0" rtlCol="0" anchor="ctr"/>
-          <a:lstStyle/>
-          <a:p>
-            <a:pPr marL="0" indent="0" algn="l">
-              <a:buNone/>
-            </a:pPr>
-            <a:r>
-              <a:rPr lang="en-US" sz="1000" dirty="0">
-                <a:solidFill>
-                  <a:srgbClr val="FFFFFF"/>
-                </a:solidFill>
-                <a:latin typeface="Calibri" pitchFamily="34" charset="0"/>
-                <a:ea typeface="Calibri" pitchFamily="34" charset="-122"/>
-                <a:cs typeface="Calibri" pitchFamily="34" charset="-120"/>
-              </a:rPr>
-              <a:t>EventSemantics, OccurrenceSemantics</a:t>
-            </a:r>
-            <a:endParaRPr lang="en-US" sz="1000" dirty="0"/>
-          </a:p>
-        </p:txBody>
-      </p:sp>
-      <p:sp>
-        <p:nvSpPr>
-          <p:cNvPr id="7" name="Shape 5"/>
-          <p:cNvSpPr/>
-          <p:nvPr/>
-        </p:nvSpPr>
-        <p:spPr>
-          <a:xfrm>
-            <a:off x="2377440" y="1600200"/>
-            <a:ext cx="54864" cy="155448"/>
-          </a:xfrm>
-          <a:prstGeom prst="rect">
-            <a:avLst/>
-          </a:prstGeom>
-          <a:solidFill>
-            <a:srgbClr val="8A9BB0"/>
-          </a:solidFill>
-          <a:ln/>
-        </p:spPr>
-        <p:txBody>
-          <a:bodyPr/>
-          <a:lstStyle/>
-          <a:p>
-            <a:endParaRPr lang="en-US"/>
-          </a:p>
-        </p:txBody>
-      </p:sp>
-      <p:sp>
-        <p:nvSpPr>
-          <p:cNvPr id="8" name="Shape 6"/>
-          <p:cNvSpPr/>
-          <p:nvPr/>
-        </p:nvSpPr>
-        <p:spPr>
-          <a:xfrm>
-            <a:off x="365760" y="1755648"/>
-            <a:ext cx="4389120" cy="594360"/>
-          </a:xfrm>
-          <a:prstGeom prst="rect">
-            <a:avLst/>
-          </a:prstGeom>
-          <a:solidFill>
-            <a:srgbClr val="028090"/>
-          </a:solidFill>
-          <a:ln/>
-        </p:spPr>
-        <p:txBody>
-          <a:bodyPr/>
-          <a:lstStyle/>
-          <a:p>
-            <a:endParaRPr lang="en-US"/>
-          </a:p>
-        </p:txBody>
-      </p:sp>
-      <p:sp>
-        <p:nvSpPr>
-          <p:cNvPr id="9" name="Text 7"/>
-          <p:cNvSpPr/>
-          <p:nvPr/>
-        </p:nvSpPr>
-        <p:spPr>
-          <a:xfrm>
-            <a:off x="457200" y="1792224"/>
-            <a:ext cx="4206240" cy="256032"/>
-          </a:xfrm>
-          <a:prstGeom prst="rect">
-            <a:avLst/>
-          </a:prstGeom>
-          <a:noFill/>
-          <a:ln/>
-        </p:spPr>
-        <p:txBody>
-          <a:bodyPr wrap="square" lIns="0" tIns="0" rIns="0" bIns="0" rtlCol="0" anchor="ctr"/>
-          <a:lstStyle/>
-          <a:p>
-            <a:pPr marL="0" indent="0" algn="l">
-              <a:buNone/>
-            </a:pPr>
-            <a:r>
-              <a:rPr lang="en-US" sz="1400" b="1" dirty="0">
-                <a:solidFill>
-                  <a:srgbClr val="FFFFFF"/>
-                </a:solidFill>
-                <a:latin typeface="Calibri" pitchFamily="34" charset="0"/>
-                <a:ea typeface="Calibri" pitchFamily="34" charset="-122"/>
-                <a:cs typeface="Calibri" pitchFamily="34" charset="-120"/>
-              </a:rPr>
-              <a:t>Validated Objects</a:t>
-            </a:r>
-            <a:endParaRPr lang="en-US" sz="1400" dirty="0"/>
-          </a:p>
-        </p:txBody>
-      </p:sp>
-      <p:sp>
-        <p:nvSpPr>
-          <p:cNvPr id="10" name="Text 8"/>
-          <p:cNvSpPr/>
-          <p:nvPr/>
-        </p:nvSpPr>
-        <p:spPr>
-          <a:xfrm>
-            <a:off x="457200" y="2057400"/>
-            <a:ext cx="4206240" cy="228600"/>
-          </a:xfrm>
-          <a:prstGeom prst="rect">
-            <a:avLst/>
-          </a:prstGeom>
-          <a:noFill/>
-          <a:ln/>
-        </p:spPr>
-        <p:txBody>
-          <a:bodyPr wrap="square" lIns="0" tIns="0" rIns="0" bIns="0" rtlCol="0" anchor="ctr"/>
-          <a:lstStyle/>
-          <a:p>
-            <a:pPr marL="0" indent="0" algn="l">
-              <a:buNone/>
-            </a:pPr>
-            <a:r>
-              <a:rPr lang="en-US" sz="1000" dirty="0">
-                <a:solidFill>
-                  <a:srgbClr val="FFFFFF"/>
-                </a:solidFill>
-                <a:latin typeface="Calibri" pitchFamily="34" charset="0"/>
-                <a:ea typeface="Calibri" pitchFamily="34" charset="-122"/>
-                <a:cs typeface="Calibri" pitchFamily="34" charset="-120"/>
-              </a:rPr>
-              <a:t>Events, EventsPerEntity, Occurrences</a:t>
-            </a:r>
-            <a:endParaRPr lang="en-US" sz="1000" dirty="0"/>
-          </a:p>
-        </p:txBody>
-      </p:sp>
-      <p:sp>
-        <p:nvSpPr>
-          <p:cNvPr id="11" name="Shape 9"/>
-          <p:cNvSpPr/>
-          <p:nvPr/>
-        </p:nvSpPr>
-        <p:spPr>
-          <a:xfrm>
-            <a:off x="2377440" y="2350008"/>
-            <a:ext cx="54864" cy="155448"/>
-          </a:xfrm>
-          <a:prstGeom prst="rect">
-            <a:avLst/>
-          </a:prstGeom>
-          <a:solidFill>
-            <a:srgbClr val="8A9BB0"/>
-          </a:solidFill>
-          <a:ln/>
-        </p:spPr>
-        <p:txBody>
-          <a:bodyPr/>
-          <a:lstStyle/>
-          <a:p>
-            <a:endParaRPr lang="en-US"/>
-          </a:p>
-        </p:txBody>
-      </p:sp>
-      <p:sp>
-        <p:nvSpPr>
-          <p:cNvPr id="12" name="Shape 10"/>
-          <p:cNvSpPr/>
-          <p:nvPr/>
-        </p:nvSpPr>
-        <p:spPr>
-          <a:xfrm>
-            <a:off x="365760" y="2505456"/>
-            <a:ext cx="4389120" cy="594360"/>
-          </a:xfrm>
-          <a:prstGeom prst="rect">
-            <a:avLst/>
-          </a:prstGeom>
-          <a:solidFill>
-            <a:srgbClr val="1C7293"/>
-          </a:solidFill>
-          <a:ln/>
-        </p:spPr>
-        <p:txBody>
-          <a:bodyPr/>
-          <a:lstStyle/>
-          <a:p>
-            <a:endParaRPr lang="en-US"/>
-          </a:p>
-        </p:txBody>
-      </p:sp>
-      <p:sp>
-        <p:nvSpPr>
-          <p:cNvPr id="13" name="Text 11"/>
-          <p:cNvSpPr/>
-          <p:nvPr/>
-        </p:nvSpPr>
-        <p:spPr>
-          <a:xfrm>
-            <a:off x="457200" y="2542032"/>
-            <a:ext cx="4206240" cy="256032"/>
-          </a:xfrm>
-          <a:prstGeom prst="rect">
-            <a:avLst/>
-          </a:prstGeom>
-          <a:noFill/>
-          <a:ln/>
-        </p:spPr>
-        <p:txBody>
-          <a:bodyPr wrap="square" lIns="0" tIns="0" rIns="0" bIns="0" rtlCol="0" anchor="ctr"/>
-          <a:lstStyle/>
-          <a:p>
-            <a:pPr marL="0" indent="0" algn="l">
-              <a:buNone/>
-            </a:pPr>
-            <a:r>
-              <a:rPr lang="en-US" sz="1400" b="1" dirty="0">
-                <a:solidFill>
-                  <a:srgbClr val="FFFFFF"/>
-                </a:solidFill>
-                <a:latin typeface="Calibri" pitchFamily="34" charset="0"/>
-                <a:ea typeface="Calibri" pitchFamily="34" charset="-122"/>
-                <a:cs typeface="Calibri" pitchFamily="34" charset="-120"/>
-              </a:rPr>
-              <a:t>Analyzers</a:t>
-            </a:r>
-            <a:endParaRPr lang="en-US" sz="1400" dirty="0"/>
-          </a:p>
-        </p:txBody>
-      </p:sp>
-      <p:sp>
-        <p:nvSpPr>
-          <p:cNvPr id="14" name="Text 12"/>
-          <p:cNvSpPr/>
-          <p:nvPr/>
-        </p:nvSpPr>
-        <p:spPr>
-          <a:xfrm>
-            <a:off x="457200" y="2807208"/>
-            <a:ext cx="4206240" cy="228600"/>
-          </a:xfrm>
-          <a:prstGeom prst="rect">
-            <a:avLst/>
-          </a:prstGeom>
-          <a:noFill/>
-          <a:ln/>
-        </p:spPr>
-        <p:txBody>
-          <a:bodyPr wrap="square" lIns="0" tIns="0" rIns="0" bIns="0" rtlCol="0" anchor="ctr"/>
-          <a:lstStyle/>
-          <a:p>
-            <a:pPr marL="0" indent="0" algn="l">
-              <a:buNone/>
-            </a:pPr>
-            <a:r>
-              <a:rPr lang="en-US" sz="1000" dirty="0">
-                <a:solidFill>
-                  <a:srgbClr val="FFFFFF"/>
-                </a:solidFill>
-                <a:latin typeface="Calibri" pitchFamily="34" charset="0"/>
-                <a:ea typeface="Calibri" pitchFamily="34" charset="-122"/>
-                <a:cs typeface="Calibri" pitchFamily="34" charset="-120"/>
-              </a:rPr>
-              <a:t>EventsWithinSpansAnalyzer, OccurrencesWithinSpansAnalyzer</a:t>
-            </a:r>
-            <a:endParaRPr lang="en-US" sz="1000" dirty="0"/>
-          </a:p>
-        </p:txBody>
-      </p:sp>
-      <p:sp>
-        <p:nvSpPr>
-          <p:cNvPr id="15" name="Shape 13"/>
-          <p:cNvSpPr/>
-          <p:nvPr/>
-        </p:nvSpPr>
-        <p:spPr>
-          <a:xfrm>
-            <a:off x="2377440" y="3099816"/>
-            <a:ext cx="54864" cy="155448"/>
-          </a:xfrm>
-          <a:prstGeom prst="rect">
-            <a:avLst/>
-          </a:prstGeom>
-          <a:solidFill>
-            <a:srgbClr val="8A9BB0"/>
-          </a:solidFill>
-          <a:ln/>
-        </p:spPr>
-        <p:txBody>
-          <a:bodyPr/>
-          <a:lstStyle/>
-          <a:p>
-            <a:endParaRPr lang="en-US"/>
-          </a:p>
-        </p:txBody>
-      </p:sp>
-      <p:sp>
-        <p:nvSpPr>
-          <p:cNvPr id="16" name="Shape 14"/>
-          <p:cNvSpPr/>
-          <p:nvPr/>
-        </p:nvSpPr>
-        <p:spPr>
-          <a:xfrm>
-            <a:off x="365760" y="3255264"/>
-            <a:ext cx="4389120" cy="594360"/>
-          </a:xfrm>
-          <a:prstGeom prst="rect">
-            <a:avLst/>
-          </a:prstGeom>
-          <a:solidFill>
-            <a:srgbClr val="028090"/>
-          </a:solidFill>
-          <a:ln/>
-        </p:spPr>
-        <p:txBody>
-          <a:bodyPr/>
-          <a:lstStyle/>
-          <a:p>
-            <a:endParaRPr lang="en-US"/>
-          </a:p>
-        </p:txBody>
-      </p:sp>
-      <p:sp>
-        <p:nvSpPr>
-          <p:cNvPr id="17" name="Text 15"/>
-          <p:cNvSpPr/>
-          <p:nvPr/>
-        </p:nvSpPr>
-        <p:spPr>
-          <a:xfrm>
-            <a:off x="457200" y="3291840"/>
-            <a:ext cx="4206240" cy="256032"/>
-          </a:xfrm>
-          <a:prstGeom prst="rect">
-            <a:avLst/>
-          </a:prstGeom>
-          <a:noFill/>
-          <a:ln/>
-        </p:spPr>
-        <p:txBody>
-          <a:bodyPr wrap="square" lIns="0" tIns="0" rIns="0" bIns="0" rtlCol="0" anchor="ctr"/>
-          <a:lstStyle/>
-          <a:p>
-            <a:pPr marL="0" indent="0" algn="l">
-              <a:buNone/>
-            </a:pPr>
-            <a:r>
-              <a:rPr lang="en-US" sz="1400" b="1" dirty="0">
-                <a:solidFill>
-                  <a:srgbClr val="FFFFFF"/>
-                </a:solidFill>
-                <a:latin typeface="Calibri" pitchFamily="34" charset="0"/>
-                <a:ea typeface="Calibri" pitchFamily="34" charset="-122"/>
-                <a:cs typeface="Calibri" pitchFamily="34" charset="-120"/>
-              </a:rPr>
-              <a:t>Intermediates</a:t>
-            </a:r>
-            <a:endParaRPr lang="en-US" sz="1400" dirty="0"/>
-          </a:p>
-        </p:txBody>
-      </p:sp>
-      <p:sp>
-        <p:nvSpPr>
-          <p:cNvPr id="18" name="Text 16"/>
-          <p:cNvSpPr/>
-          <p:nvPr/>
-        </p:nvSpPr>
-        <p:spPr>
-          <a:xfrm>
-            <a:off x="457200" y="3557016"/>
-            <a:ext cx="4206240" cy="228600"/>
-          </a:xfrm>
-          <a:prstGeom prst="rect">
-            <a:avLst/>
-          </a:prstGeom>
-          <a:noFill/>
-          <a:ln/>
-        </p:spPr>
-        <p:txBody>
-          <a:bodyPr wrap="square" lIns="0" tIns="0" rIns="0" bIns="0" rtlCol="0" anchor="ctr"/>
-          <a:lstStyle/>
-          <a:p>
-            <a:pPr marL="0" indent="0" algn="l">
-              <a:buNone/>
-            </a:pPr>
-            <a:r>
-              <a:rPr lang="en-US" sz="1000" dirty="0">
-                <a:solidFill>
-                  <a:srgbClr val="FFFFFF"/>
-                </a:solidFill>
-                <a:latin typeface="Calibri" pitchFamily="34" charset="0"/>
-                <a:ea typeface="Calibri" pitchFamily="34" charset="-122"/>
-                <a:cs typeface="Calibri" pitchFamily="34" charset="-120"/>
-              </a:rPr>
-              <a:t>PipeDelimitedIntermediateEvents + Occurrences</a:t>
-            </a:r>
-            <a:endParaRPr lang="en-US" sz="1000" dirty="0"/>
-          </a:p>
-        </p:txBody>
-      </p:sp>
-      <p:sp>
-        <p:nvSpPr>
-          <p:cNvPr id="19" name="Shape 17"/>
-          <p:cNvSpPr/>
-          <p:nvPr/>
-        </p:nvSpPr>
-        <p:spPr>
-          <a:xfrm>
-            <a:off x="2377440" y="3849624"/>
-            <a:ext cx="54864" cy="155448"/>
-          </a:xfrm>
-          <a:prstGeom prst="rect">
-            <a:avLst/>
-          </a:prstGeom>
-          <a:solidFill>
-            <a:srgbClr val="8A9BB0"/>
-          </a:solidFill>
-          <a:ln/>
-        </p:spPr>
-        <p:txBody>
-          <a:bodyPr/>
-          <a:lstStyle/>
-          <a:p>
-            <a:endParaRPr lang="en-US"/>
-          </a:p>
-        </p:txBody>
-      </p:sp>
-      <p:sp>
-        <p:nvSpPr>
-          <p:cNvPr id="20" name="Shape 18"/>
-          <p:cNvSpPr/>
-          <p:nvPr/>
-        </p:nvSpPr>
-        <p:spPr>
-          <a:xfrm>
-            <a:off x="365760" y="4005072"/>
-            <a:ext cx="4389120" cy="594360"/>
-          </a:xfrm>
-          <a:prstGeom prst="rect">
-            <a:avLst/>
-          </a:prstGeom>
-          <a:solidFill>
-            <a:srgbClr val="02C39A"/>
-          </a:solidFill>
-          <a:ln/>
-        </p:spPr>
-        <p:txBody>
-          <a:bodyPr/>
-          <a:lstStyle/>
-          <a:p>
-            <a:endParaRPr lang="en-US"/>
-          </a:p>
-        </p:txBody>
-      </p:sp>
-      <p:sp>
-        <p:nvSpPr>
-          <p:cNvPr id="21" name="Text 19"/>
-          <p:cNvSpPr/>
-          <p:nvPr/>
-        </p:nvSpPr>
-        <p:spPr>
-          <a:xfrm>
-            <a:off x="457200" y="4041648"/>
-            <a:ext cx="4206240" cy="256032"/>
-          </a:xfrm>
-          <a:prstGeom prst="rect">
-            <a:avLst/>
-          </a:prstGeom>
-          <a:noFill/>
-          <a:ln/>
-        </p:spPr>
-        <p:txBody>
-          <a:bodyPr wrap="square" lIns="0" tIns="0" rIns="0" bIns="0" rtlCol="0" anchor="ctr"/>
-          <a:lstStyle/>
-          <a:p>
-            <a:pPr marL="0" indent="0" algn="l">
-              <a:buNone/>
-            </a:pPr>
-            <a:r>
-              <a:rPr lang="en-US" sz="1400" b="1" dirty="0">
-                <a:solidFill>
-                  <a:srgbClr val="FFFFFF"/>
-                </a:solidFill>
-                <a:latin typeface="Calibri" pitchFamily="34" charset="0"/>
-                <a:ea typeface="Calibri" pitchFamily="34" charset="-122"/>
-                <a:cs typeface="Calibri" pitchFamily="34" charset="-120"/>
-              </a:rPr>
-              <a:t>Visualizers</a:t>
-            </a:r>
-            <a:endParaRPr lang="en-US" sz="1400" dirty="0"/>
-          </a:p>
-        </p:txBody>
-      </p:sp>
-      <p:sp>
-        <p:nvSpPr>
-          <p:cNvPr id="22" name="Text 20"/>
-          <p:cNvSpPr/>
-          <p:nvPr/>
-        </p:nvSpPr>
-        <p:spPr>
-          <a:xfrm>
-            <a:off x="457200" y="4306824"/>
-            <a:ext cx="4206240" cy="228600"/>
-          </a:xfrm>
-          <a:prstGeom prst="rect">
-            <a:avLst/>
-          </a:prstGeom>
-          <a:noFill/>
-          <a:ln/>
-        </p:spPr>
-        <p:txBody>
-          <a:bodyPr wrap="square" lIns="0" tIns="0" rIns="0" bIns="0" rtlCol="0" anchor="ctr"/>
-          <a:lstStyle/>
-          <a:p>
-            <a:pPr marL="0" indent="0" algn="l">
-              <a:buNone/>
-            </a:pPr>
-            <a:r>
-              <a:rPr lang="en-US" sz="1000" dirty="0">
-                <a:solidFill>
-                  <a:srgbClr val="FFFFFF"/>
-                </a:solidFill>
-                <a:latin typeface="Calibri" pitchFamily="34" charset="0"/>
-                <a:ea typeface="Calibri" pitchFamily="34" charset="-122"/>
-                <a:cs typeface="Calibri" pitchFamily="34" charset="-120"/>
-              </a:rPr>
-              <a:t>StackedEventsPlotter, ActivityOverTimePlotter</a:t>
-            </a:r>
-            <a:endParaRPr lang="en-US" sz="1000" dirty="0"/>
-          </a:p>
-        </p:txBody>
-      </p:sp>
-      <p:sp>
-        <p:nvSpPr>
-          <p:cNvPr id="23" name="Shape 21"/>
-          <p:cNvSpPr/>
-          <p:nvPr/>
-        </p:nvSpPr>
-        <p:spPr>
-          <a:xfrm>
-            <a:off x="5120640" y="1005840"/>
-            <a:ext cx="3657600" cy="594360"/>
-          </a:xfrm>
-          <a:prstGeom prst="rect">
-            <a:avLst/>
-          </a:prstGeom>
-          <a:solidFill>
-            <a:srgbClr val="FFFFFF"/>
-          </a:solidFill>
-          <a:ln w="19050">
-            <a:solidFill>
-              <a:srgbClr val="E8EFF5"/>
-            </a:solidFill>
-            <a:prstDash val="solid"/>
-          </a:ln>
-        </p:spPr>
-        <p:txBody>
-          <a:bodyPr/>
-          <a:lstStyle/>
-          <a:p>
-            <a:endParaRPr lang="en-US"/>
-          </a:p>
-        </p:txBody>
-      </p:sp>
-      <p:sp>
-        <p:nvSpPr>
-          <p:cNvPr id="24" name="Text 22"/>
-          <p:cNvSpPr/>
-          <p:nvPr/>
-        </p:nvSpPr>
-        <p:spPr>
-          <a:xfrm>
-            <a:off x="5212080" y="1051560"/>
-            <a:ext cx="3474720" cy="256032"/>
-          </a:xfrm>
-          <a:prstGeom prst="rect">
-            <a:avLst/>
-          </a:prstGeom>
-          <a:noFill/>
-          <a:ln/>
-        </p:spPr>
-        <p:txBody>
-          <a:bodyPr wrap="square" lIns="0" tIns="0" rIns="0" bIns="0" rtlCol="0" anchor="ctr"/>
-          <a:lstStyle/>
-          <a:p>
-            <a:pPr marL="0" indent="0" algn="l">
-              <a:buNone/>
-            </a:pPr>
-            <a:r>
-              <a:rPr lang="en-US" sz="1200" b="1" i="1" dirty="0">
-                <a:solidFill>
-                  <a:srgbClr val="028090"/>
-                </a:solidFill>
-                <a:latin typeface="Calibri" pitchFamily="34" charset="0"/>
-                <a:ea typeface="Calibri" pitchFamily="34" charset="-122"/>
-                <a:cs typeface="Calibri" pitchFamily="34" charset="-120"/>
-              </a:rPr>
-              <a:t>"I know what columns mean"</a:t>
-            </a:r>
-            <a:endParaRPr lang="en-US" sz="1200" dirty="0"/>
-          </a:p>
-        </p:txBody>
-      </p:sp>
-      <p:sp>
-        <p:nvSpPr>
-          <p:cNvPr id="25" name="Text 23"/>
-          <p:cNvSpPr/>
-          <p:nvPr/>
-        </p:nvSpPr>
-        <p:spPr>
-          <a:xfrm>
-            <a:off x="5212080" y="1307592"/>
-            <a:ext cx="3474720" cy="228600"/>
-          </a:xfrm>
-          <a:prstGeom prst="rect">
-            <a:avLst/>
-          </a:prstGeom>
-          <a:noFill/>
-          <a:ln/>
-        </p:spPr>
-        <p:txBody>
-          <a:bodyPr wrap="square" lIns="0" tIns="0" rIns="0" bIns="0" rtlCol="0" anchor="ctr"/>
-          <a:lstStyle/>
-          <a:p>
-            <a:pPr marL="0" indent="0" algn="l">
-              <a:buNone/>
-            </a:pPr>
-            <a:r>
-              <a:rPr lang="en-US" sz="1100" dirty="0">
-                <a:solidFill>
-                  <a:srgbClr val="1A2E3B"/>
-                </a:solidFill>
-                <a:latin typeface="Calibri" pitchFamily="34" charset="0"/>
-                <a:ea typeface="Calibri" pitchFamily="34" charset="-122"/>
-                <a:cs typeface="Calibri" pitchFamily="34" charset="-120"/>
-              </a:rPr>
-              <a:t>Decouples logic from schema</a:t>
-            </a:r>
-            <a:endParaRPr lang="en-US" sz="1100" dirty="0"/>
-          </a:p>
-        </p:txBody>
-      </p:sp>
-      <p:sp>
-        <p:nvSpPr>
-          <p:cNvPr id="26" name="Shape 24"/>
-          <p:cNvSpPr/>
-          <p:nvPr/>
-        </p:nvSpPr>
-        <p:spPr>
-          <a:xfrm>
-            <a:off x="5120640" y="1755648"/>
-            <a:ext cx="3657600" cy="594360"/>
-          </a:xfrm>
-          <a:prstGeom prst="rect">
-            <a:avLst/>
-          </a:prstGeom>
-          <a:solidFill>
-            <a:srgbClr val="FFFFFF"/>
-          </a:solidFill>
-          <a:ln w="19050">
-            <a:solidFill>
-              <a:srgbClr val="E8EFF5"/>
-            </a:solidFill>
-            <a:prstDash val="solid"/>
-          </a:ln>
-        </p:spPr>
-        <p:txBody>
-          <a:bodyPr/>
-          <a:lstStyle/>
-          <a:p>
-            <a:endParaRPr lang="en-US"/>
-          </a:p>
-        </p:txBody>
-      </p:sp>
-      <p:sp>
-        <p:nvSpPr>
-          <p:cNvPr id="27" name="Text 25"/>
-          <p:cNvSpPr/>
-          <p:nvPr/>
-        </p:nvSpPr>
-        <p:spPr>
-          <a:xfrm>
-            <a:off x="5212080" y="1801368"/>
-            <a:ext cx="3474720" cy="256032"/>
-          </a:xfrm>
-          <a:prstGeom prst="rect">
-            <a:avLst/>
-          </a:prstGeom>
-          <a:noFill/>
-          <a:ln/>
-        </p:spPr>
-        <p:txBody>
-          <a:bodyPr wrap="square" lIns="0" tIns="0" rIns="0" bIns="0" rtlCol="0" anchor="ctr"/>
-          <a:lstStyle/>
-          <a:p>
-            <a:pPr marL="0" indent="0" algn="l">
-              <a:buNone/>
-            </a:pPr>
-            <a:r>
-              <a:rPr lang="en-US" sz="1200" b="1" i="1" dirty="0">
-                <a:solidFill>
-                  <a:srgbClr val="028090"/>
-                </a:solidFill>
-                <a:latin typeface="Calibri" pitchFamily="34" charset="0"/>
-                <a:ea typeface="Calibri" pitchFamily="34" charset="-122"/>
-                <a:cs typeface="Calibri" pitchFamily="34" charset="-120"/>
-              </a:rPr>
-              <a:t>"My data is validated"</a:t>
-            </a:r>
-            <a:endParaRPr lang="en-US" sz="1200" dirty="0"/>
-          </a:p>
-        </p:txBody>
-      </p:sp>
-      <p:sp>
-        <p:nvSpPr>
-          <p:cNvPr id="28" name="Text 26"/>
-          <p:cNvSpPr/>
-          <p:nvPr/>
-        </p:nvSpPr>
-        <p:spPr>
-          <a:xfrm>
-            <a:off x="5212080" y="2057400"/>
-            <a:ext cx="3474720" cy="228600"/>
-          </a:xfrm>
-          <a:prstGeom prst="rect">
-            <a:avLst/>
-          </a:prstGeom>
-          <a:noFill/>
-          <a:ln/>
-        </p:spPr>
-        <p:txBody>
-          <a:bodyPr wrap="square" lIns="0" tIns="0" rIns="0" bIns="0" rtlCol="0" anchor="ctr"/>
-          <a:lstStyle/>
-          <a:p>
-            <a:pPr marL="0" indent="0" algn="l">
-              <a:buNone/>
-            </a:pPr>
-            <a:r>
-              <a:rPr lang="en-US" sz="1100" dirty="0">
-                <a:solidFill>
-                  <a:srgbClr val="1A2E3B"/>
-                </a:solidFill>
-                <a:latin typeface="Calibri" pitchFamily="34" charset="0"/>
-                <a:ea typeface="Calibri" pitchFamily="34" charset="-122"/>
-                <a:cs typeface="Calibri" pitchFamily="34" charset="-120"/>
-              </a:rPr>
-              <a:t>Triage, rejected rows, audit trail</a:t>
-            </a:r>
-            <a:endParaRPr lang="en-US" sz="1100" dirty="0"/>
-          </a:p>
-        </p:txBody>
-      </p:sp>
-      <p:sp>
-        <p:nvSpPr>
-          <p:cNvPr id="29" name="Shape 27"/>
-          <p:cNvSpPr/>
-          <p:nvPr/>
-        </p:nvSpPr>
-        <p:spPr>
-          <a:xfrm>
-            <a:off x="5120640" y="2505456"/>
-            <a:ext cx="3657600" cy="594360"/>
-          </a:xfrm>
-          <a:prstGeom prst="rect">
-            <a:avLst/>
-          </a:prstGeom>
-          <a:solidFill>
-            <a:srgbClr val="FFFFFF"/>
-          </a:solidFill>
-          <a:ln w="19050">
-            <a:solidFill>
-              <a:srgbClr val="E8EFF5"/>
-            </a:solidFill>
-            <a:prstDash val="solid"/>
-          </a:ln>
-        </p:spPr>
-        <p:txBody>
-          <a:bodyPr/>
-          <a:lstStyle/>
-          <a:p>
-            <a:endParaRPr lang="en-US"/>
-          </a:p>
-        </p:txBody>
-      </p:sp>
-      <p:sp>
-        <p:nvSpPr>
-          <p:cNvPr id="30" name="Text 28"/>
-          <p:cNvSpPr/>
-          <p:nvPr/>
-        </p:nvSpPr>
-        <p:spPr>
-          <a:xfrm>
-            <a:off x="5212080" y="2551176"/>
-            <a:ext cx="3474720" cy="256032"/>
-          </a:xfrm>
-          <a:prstGeom prst="rect">
-            <a:avLst/>
-          </a:prstGeom>
-          <a:noFill/>
-          <a:ln/>
-        </p:spPr>
-        <p:txBody>
-          <a:bodyPr wrap="square" lIns="0" tIns="0" rIns="0" bIns="0" rtlCol="0" anchor="ctr"/>
-          <a:lstStyle/>
-          <a:p>
-            <a:pPr marL="0" indent="0" algn="l">
-              <a:buNone/>
-            </a:pPr>
-            <a:r>
-              <a:rPr lang="en-US" sz="1200" b="1" i="1" dirty="0">
-                <a:solidFill>
-                  <a:srgbClr val="028090"/>
-                </a:solidFill>
-                <a:latin typeface="Calibri" pitchFamily="34" charset="0"/>
-                <a:ea typeface="Calibri" pitchFamily="34" charset="-122"/>
-                <a:cs typeface="Calibri" pitchFamily="34" charset="-120"/>
-              </a:rPr>
-              <a:t>"I compute the analysis"</a:t>
-            </a:r>
-            <a:endParaRPr lang="en-US" sz="1200" dirty="0"/>
-          </a:p>
-        </p:txBody>
-      </p:sp>
-      <p:sp>
-        <p:nvSpPr>
-          <p:cNvPr id="31" name="Text 29"/>
-          <p:cNvSpPr/>
-          <p:nvPr/>
-        </p:nvSpPr>
-        <p:spPr>
-          <a:xfrm>
-            <a:off x="5212080" y="2807208"/>
-            <a:ext cx="3474720" cy="228600"/>
-          </a:xfrm>
-          <a:prstGeom prst="rect">
-            <a:avLst/>
-          </a:prstGeom>
-          <a:noFill/>
-          <a:ln/>
-        </p:spPr>
-        <p:txBody>
-          <a:bodyPr wrap="square" lIns="0" tIns="0" rIns="0" bIns="0" rtlCol="0" anchor="ctr"/>
-          <a:lstStyle/>
-          <a:p>
-            <a:pPr marL="0" indent="0" algn="l">
-              <a:buNone/>
-            </a:pPr>
-            <a:r>
-              <a:rPr lang="en-US" sz="1100" dirty="0">
-                <a:solidFill>
-                  <a:srgbClr val="1A2E3B"/>
-                </a:solidFill>
-                <a:latin typeface="Calibri" pitchFamily="34" charset="0"/>
-                <a:ea typeface="Calibri" pitchFamily="34" charset="-122"/>
-                <a:cs typeface="Calibri" pitchFamily="34" charset="-120"/>
-              </a:rPr>
-              <a:t>Single responsibility per analyzer</a:t>
-            </a:r>
-            <a:endParaRPr lang="en-US" sz="1100" dirty="0"/>
-          </a:p>
-        </p:txBody>
-      </p:sp>
-      <p:sp>
-        <p:nvSpPr>
-          <p:cNvPr id="32" name="Shape 30"/>
-          <p:cNvSpPr/>
-          <p:nvPr/>
-        </p:nvSpPr>
-        <p:spPr>
-          <a:xfrm>
-            <a:off x="5120640" y="3255264"/>
-            <a:ext cx="3657600" cy="594360"/>
-          </a:xfrm>
-          <a:prstGeom prst="rect">
-            <a:avLst/>
-          </a:prstGeom>
-          <a:solidFill>
-            <a:srgbClr val="FFFFFF"/>
-          </a:solidFill>
-          <a:ln w="19050">
-            <a:solidFill>
-              <a:srgbClr val="E8EFF5"/>
-            </a:solidFill>
-            <a:prstDash val="solid"/>
-          </a:ln>
-        </p:spPr>
-        <p:txBody>
-          <a:bodyPr/>
-          <a:lstStyle/>
-          <a:p>
-            <a:endParaRPr lang="en-US"/>
-          </a:p>
-        </p:txBody>
-      </p:sp>
-      <p:sp>
-        <p:nvSpPr>
-          <p:cNvPr id="33" name="Text 31"/>
-          <p:cNvSpPr/>
-          <p:nvPr/>
-        </p:nvSpPr>
-        <p:spPr>
-          <a:xfrm>
-            <a:off x="5212080" y="3300984"/>
-            <a:ext cx="3474720" cy="256032"/>
-          </a:xfrm>
-          <a:prstGeom prst="rect">
-            <a:avLst/>
-          </a:prstGeom>
-          <a:noFill/>
-          <a:ln/>
-        </p:spPr>
-        <p:txBody>
-          <a:bodyPr wrap="square" lIns="0" tIns="0" rIns="0" bIns="0" rtlCol="0" anchor="ctr"/>
-          <a:lstStyle/>
-          <a:p>
-            <a:pPr marL="0" indent="0" algn="l">
-              <a:buNone/>
-            </a:pPr>
-            <a:r>
-              <a:rPr lang="en-US" sz="1200" b="1" i="1" dirty="0">
-                <a:solidFill>
-                  <a:srgbClr val="028090"/>
-                </a:solidFill>
-                <a:latin typeface="Calibri" pitchFamily="34" charset="0"/>
-                <a:ea typeface="Calibri" pitchFamily="34" charset="-122"/>
-                <a:cs typeface="Calibri" pitchFamily="34" charset="-120"/>
-              </a:rPr>
-              <a:t>"I am the handshake"</a:t>
-            </a:r>
-            <a:endParaRPr lang="en-US" sz="1200" dirty="0"/>
-          </a:p>
-        </p:txBody>
-      </p:sp>
-      <p:sp>
-        <p:nvSpPr>
-          <p:cNvPr id="34" name="Text 32"/>
-          <p:cNvSpPr/>
-          <p:nvPr/>
-        </p:nvSpPr>
-        <p:spPr>
-          <a:xfrm>
-            <a:off x="5212080" y="3557016"/>
-            <a:ext cx="3474720" cy="228600"/>
-          </a:xfrm>
-          <a:prstGeom prst="rect">
-            <a:avLst/>
-          </a:prstGeom>
-          <a:noFill/>
-          <a:ln/>
-        </p:spPr>
-        <p:txBody>
-          <a:bodyPr wrap="square" lIns="0" tIns="0" rIns="0" bIns="0" rtlCol="0" anchor="ctr"/>
-          <a:lstStyle/>
-          <a:p>
-            <a:pPr marL="0" indent="0" algn="l">
-              <a:buNone/>
-            </a:pPr>
-            <a:r>
-              <a:rPr lang="en-US" sz="1100" dirty="0">
-                <a:solidFill>
-                  <a:srgbClr val="1A2E3B"/>
-                </a:solidFill>
-                <a:latin typeface="Calibri" pitchFamily="34" charset="0"/>
-                <a:ea typeface="Calibri" pitchFamily="34" charset="-122"/>
-                <a:cs typeface="Calibri" pitchFamily="34" charset="-120"/>
-              </a:rPr>
-              <a:t>Pipe-delimited columnar contract</a:t>
-            </a:r>
-            <a:endParaRPr lang="en-US" sz="1100" dirty="0"/>
-          </a:p>
-        </p:txBody>
-      </p:sp>
-      <p:sp>
-        <p:nvSpPr>
-          <p:cNvPr id="35" name="Shape 33"/>
-          <p:cNvSpPr/>
-          <p:nvPr/>
-        </p:nvSpPr>
-        <p:spPr>
-          <a:xfrm>
-            <a:off x="5120640" y="4005072"/>
-            <a:ext cx="3657600" cy="594360"/>
-          </a:xfrm>
-          <a:prstGeom prst="rect">
-            <a:avLst/>
-          </a:prstGeom>
-          <a:solidFill>
-            <a:srgbClr val="FFFFFF"/>
-          </a:solidFill>
-          <a:ln w="19050">
-            <a:solidFill>
-              <a:srgbClr val="E8EFF5"/>
-            </a:solidFill>
-            <a:prstDash val="solid"/>
-          </a:ln>
-        </p:spPr>
-        <p:txBody>
-          <a:bodyPr/>
-          <a:lstStyle/>
-          <a:p>
-            <a:endParaRPr lang="en-US"/>
-          </a:p>
-        </p:txBody>
-      </p:sp>
-      <p:sp>
-        <p:nvSpPr>
-          <p:cNvPr id="36" name="Text 34"/>
-          <p:cNvSpPr/>
-          <p:nvPr/>
-        </p:nvSpPr>
-        <p:spPr>
-          <a:xfrm>
-            <a:off x="5212080" y="4050792"/>
-            <a:ext cx="3474720" cy="256032"/>
-          </a:xfrm>
-          <a:prstGeom prst="rect">
-            <a:avLst/>
-          </a:prstGeom>
-          <a:noFill/>
-          <a:ln/>
-        </p:spPr>
-        <p:txBody>
-          <a:bodyPr wrap="square" lIns="0" tIns="0" rIns="0" bIns="0" rtlCol="0" anchor="ctr"/>
-          <a:lstStyle/>
-          <a:p>
-            <a:pPr marL="0" indent="0" algn="l">
-              <a:buNone/>
-            </a:pPr>
-            <a:r>
-              <a:rPr lang="en-US" sz="1200" b="1" i="1" dirty="0">
-                <a:solidFill>
-                  <a:srgbClr val="028090"/>
-                </a:solidFill>
-                <a:latin typeface="Calibri" pitchFamily="34" charset="0"/>
-                <a:ea typeface="Calibri" pitchFamily="34" charset="-122"/>
-                <a:cs typeface="Calibri" pitchFamily="34" charset="-120"/>
-              </a:rPr>
-              <a:t>"I know how to draw"</a:t>
-            </a:r>
-            <a:endParaRPr lang="en-US" sz="1200" dirty="0"/>
-          </a:p>
-        </p:txBody>
-      </p:sp>
-      <p:sp>
-        <p:nvSpPr>
-          <p:cNvPr id="37" name="Text 35"/>
-          <p:cNvSpPr/>
-          <p:nvPr/>
-        </p:nvSpPr>
-        <p:spPr>
-          <a:xfrm>
-            <a:off x="5212080" y="4306824"/>
-            <a:ext cx="3474720" cy="228600"/>
-          </a:xfrm>
-          <a:prstGeom prst="rect">
-            <a:avLst/>
-          </a:prstGeom>
-          <a:noFill/>
-          <a:ln/>
-        </p:spPr>
-        <p:txBody>
-          <a:bodyPr wrap="square" lIns="0" tIns="0" rIns="0" bIns="0" rtlCol="0" anchor="ctr"/>
-          <a:lstStyle/>
-          <a:p>
-            <a:pPr marL="0" indent="0" algn="l">
-              <a:buNone/>
-            </a:pPr>
-            <a:r>
-              <a:rPr lang="en-US" sz="1100" dirty="0">
-                <a:solidFill>
-                  <a:srgbClr val="1A2E3B"/>
-                </a:solidFill>
-                <a:latin typeface="Calibri" pitchFamily="34" charset="0"/>
-                <a:ea typeface="Calibri" pitchFamily="34" charset="-122"/>
-                <a:cs typeface="Calibri" pitchFamily="34" charset="-120"/>
-              </a:rPr>
-              <a:t>Pure renderers, no data transforms</a:t>
-            </a:r>
-            <a:endParaRPr lang="en-US" sz="1100" dirty="0"/>
-          </a:p>
-        </p:txBody>
-      </p:sp>
-      <p:sp>
-        <p:nvSpPr>
-          <p:cNvPr id="38" name="Shape 36"/>
-          <p:cNvSpPr/>
-          <p:nvPr/>
-        </p:nvSpPr>
-        <p:spPr>
-          <a:xfrm>
-            <a:off x="4754880" y="1005840"/>
-            <a:ext cx="365760" cy="0"/>
-          </a:xfrm>
-          <a:prstGeom prst="line">
-            <a:avLst/>
-          </a:prstGeom>
-          <a:noFill/>
-          <a:ln w="12700">
-            <a:solidFill>
-              <a:srgbClr val="E8EFF5"/>
-            </a:solidFill>
-            <a:prstDash val="dash"/>
-          </a:ln>
-        </p:spPr>
-        <p:txBody>
-          <a:bodyPr/>
-          <a:lstStyle/>
-          <a:p>
-            <a:endParaRPr lang="en-US"/>
-          </a:p>
-        </p:txBody>
-      </p:sp>
-    </p:spTree>
-  </p:cSld>
-  <p:clrMapOvr>
-    <a:masterClrMapping/>
-  </p:clrMapOvr>
-</p:sld>
-</file>
-
-<file path=ppt/slides/slide39.xml><?xml version="1.0" encoding="utf-8"?>
-<p:sld xmlns:a="http://schemas.openxmlformats.org/drawingml/2006/main" xmlns:r="http://schemas.openxmlformats.org/officeDocument/2006/relationships" xmlns:p="http://schemas.openxmlformats.org/presentationml/2006/main">
-  <p:cSld name="Slide 4">
-    <p:bg>
-      <p:bgPr>
-        <a:solidFill>
-          <a:srgbClr val="F4F8FB"/>
-        </a:solidFill>
-        <a:effectLst/>
-      </p:bgPr>
-    </p:bg>
-    <p:spTree>
-      <p:nvGrpSpPr>
-        <p:cNvPr id="1" name=""/>
-        <p:cNvGrpSpPr/>
-        <p:nvPr/>
-      </p:nvGrpSpPr>
-      <p:grpSpPr>
-        <a:xfrm>
-          <a:off x="0" y="0"/>
-          <a:ext cx="0" cy="0"/>
-          <a:chOff x="0" y="0"/>
-          <a:chExt cx="0" cy="0"/>
-        </a:xfrm>
-      </p:grpSpPr>
-      <p:sp>
-        <p:nvSpPr>
-          <p:cNvPr id="2" name="Text 0"/>
-          <p:cNvSpPr/>
-          <p:nvPr/>
-        </p:nvSpPr>
-        <p:spPr>
-          <a:xfrm>
-            <a:off x="457200" y="228600"/>
-            <a:ext cx="8229600" cy="640080"/>
-          </a:xfrm>
-          <a:prstGeom prst="rect">
-            <a:avLst/>
-          </a:prstGeom>
-          <a:noFill/>
-          <a:ln/>
-        </p:spPr>
-        <p:txBody>
-          <a:bodyPr wrap="square" lIns="0" tIns="0" rIns="0" bIns="0" rtlCol="0" anchor="ctr"/>
-          <a:lstStyle/>
-          <a:p>
-            <a:pPr marL="0" indent="0" algn="l">
-              <a:buNone/>
-            </a:pPr>
-            <a:r>
-              <a:rPr lang="en-US" sz="3200" b="1" dirty="0">
-                <a:solidFill>
-                  <a:srgbClr val="0D2B45"/>
-                </a:solidFill>
-                <a:latin typeface="Calibri" pitchFamily="34" charset="0"/>
-                <a:ea typeface="Calibri" pitchFamily="34" charset="-122"/>
-                <a:cs typeface="Calibri" pitchFamily="34" charset="-120"/>
-              </a:rPr>
-              <a:t>Object Hierarchy</a:t>
-            </a:r>
-            <a:endParaRPr lang="en-US" sz="3200" dirty="0"/>
-          </a:p>
-        </p:txBody>
-      </p:sp>
-      <p:sp>
-        <p:nvSpPr>
-          <p:cNvPr id="3" name="Shape 1"/>
-          <p:cNvSpPr/>
-          <p:nvPr/>
-        </p:nvSpPr>
-        <p:spPr>
-          <a:xfrm>
-            <a:off x="457200" y="886968"/>
-            <a:ext cx="8229600" cy="36576"/>
-          </a:xfrm>
-          <a:prstGeom prst="rect">
-            <a:avLst/>
-          </a:prstGeom>
-          <a:solidFill>
-            <a:srgbClr val="028090"/>
-          </a:solidFill>
-          <a:ln/>
-        </p:spPr>
-        <p:txBody>
-          <a:bodyPr/>
-          <a:lstStyle/>
-          <a:p>
-            <a:endParaRPr lang="en-US"/>
-          </a:p>
-        </p:txBody>
-      </p:sp>
-      <p:sp>
-        <p:nvSpPr>
-          <p:cNvPr id="4" name="Shape 2"/>
-          <p:cNvSpPr/>
-          <p:nvPr/>
-        </p:nvSpPr>
-        <p:spPr>
-          <a:xfrm>
-            <a:off x="365760" y="1143000"/>
-            <a:ext cx="2011680" cy="384048"/>
-          </a:xfrm>
-          <a:prstGeom prst="roundRect">
-            <a:avLst>
-              <a:gd name="adj" fmla="val 19048"/>
-            </a:avLst>
-          </a:prstGeom>
-          <a:solidFill>
-            <a:srgbClr val="0D2B45"/>
-          </a:solidFill>
-          <a:ln/>
-        </p:spPr>
-        <p:txBody>
-          <a:bodyPr/>
-          <a:lstStyle/>
-          <a:p>
-            <a:endParaRPr lang="en-US"/>
-          </a:p>
-        </p:txBody>
-      </p:sp>
-      <p:sp>
-        <p:nvSpPr>
-          <p:cNvPr id="5" name="Text 3"/>
-          <p:cNvSpPr/>
-          <p:nvPr/>
-        </p:nvSpPr>
-        <p:spPr>
-          <a:xfrm>
-            <a:off x="365760" y="1143000"/>
-            <a:ext cx="2011680" cy="384048"/>
-          </a:xfrm>
-          <a:prstGeom prst="rect">
-            <a:avLst/>
-          </a:prstGeom>
-          <a:noFill/>
-          <a:ln/>
-        </p:spPr>
-        <p:txBody>
-          <a:bodyPr wrap="square" lIns="0" tIns="0" rIns="0" bIns="0" rtlCol="0" anchor="ctr"/>
-          <a:lstStyle/>
-          <a:p>
-            <a:pPr marL="0" indent="0" algn="ctr">
-              <a:buNone/>
-            </a:pPr>
-            <a:r>
-              <a:rPr lang="en-US" sz="1100" b="1" dirty="0">
-                <a:solidFill>
-                  <a:srgbClr val="FFFFFF"/>
-                </a:solidFill>
-                <a:latin typeface="Calibri" pitchFamily="34" charset="0"/>
-                <a:ea typeface="Calibri" pitchFamily="34" charset="-122"/>
-                <a:cs typeface="Calibri" pitchFamily="34" charset="-120"/>
-              </a:rPr>
-              <a:t>EventSemantics</a:t>
-            </a:r>
-            <a:endParaRPr lang="en-US" sz="1100" dirty="0"/>
-          </a:p>
-        </p:txBody>
-      </p:sp>
-      <p:sp>
-        <p:nvSpPr>
-          <p:cNvPr id="6" name="Shape 4"/>
-          <p:cNvSpPr/>
-          <p:nvPr/>
-        </p:nvSpPr>
-        <p:spPr>
-          <a:xfrm>
-            <a:off x="2514600" y="1143000"/>
-            <a:ext cx="2286000" cy="384048"/>
-          </a:xfrm>
-          <a:prstGeom prst="roundRect">
-            <a:avLst>
-              <a:gd name="adj" fmla="val 19048"/>
-            </a:avLst>
-          </a:prstGeom>
-          <a:solidFill>
-            <a:srgbClr val="0D2B45"/>
-          </a:solidFill>
-          <a:ln/>
-        </p:spPr>
-        <p:txBody>
-          <a:bodyPr/>
-          <a:lstStyle/>
-          <a:p>
-            <a:endParaRPr lang="en-US"/>
-          </a:p>
-        </p:txBody>
-      </p:sp>
-      <p:sp>
-        <p:nvSpPr>
-          <p:cNvPr id="7" name="Text 5"/>
-          <p:cNvSpPr/>
-          <p:nvPr/>
-        </p:nvSpPr>
-        <p:spPr>
-          <a:xfrm>
-            <a:off x="2514600" y="1143000"/>
-            <a:ext cx="2286000" cy="384048"/>
-          </a:xfrm>
-          <a:prstGeom prst="rect">
-            <a:avLst/>
-          </a:prstGeom>
-          <a:noFill/>
-          <a:ln/>
-        </p:spPr>
-        <p:txBody>
-          <a:bodyPr wrap="square" lIns="0" tIns="0" rIns="0" bIns="0" rtlCol="0" anchor="ctr"/>
-          <a:lstStyle/>
-          <a:p>
-            <a:pPr marL="0" indent="0" algn="ctr">
-              <a:buNone/>
-            </a:pPr>
-            <a:r>
-              <a:rPr lang="en-US" sz="1100" b="1" dirty="0">
-                <a:solidFill>
-                  <a:srgbClr val="FFFFFF"/>
-                </a:solidFill>
-                <a:latin typeface="Calibri" pitchFamily="34" charset="0"/>
-                <a:ea typeface="Calibri" pitchFamily="34" charset="-122"/>
-                <a:cs typeface="Calibri" pitchFamily="34" charset="-120"/>
-              </a:rPr>
-              <a:t>OccurrenceSemantics</a:t>
-            </a:r>
-            <a:endParaRPr lang="en-US" sz="1100" dirty="0"/>
-          </a:p>
-        </p:txBody>
-      </p:sp>
-      <p:sp>
-        <p:nvSpPr>
-          <p:cNvPr id="8" name="Shape 6"/>
-          <p:cNvSpPr/>
-          <p:nvPr/>
-        </p:nvSpPr>
-        <p:spPr>
-          <a:xfrm>
-            <a:off x="1417320" y="1527048"/>
-            <a:ext cx="0" cy="228600"/>
-          </a:xfrm>
-          <a:prstGeom prst="line">
-            <a:avLst/>
-          </a:prstGeom>
-          <a:noFill/>
-          <a:ln w="19050">
-            <a:solidFill>
-              <a:srgbClr val="8A9BB0"/>
-            </a:solidFill>
-            <a:prstDash val="solid"/>
-          </a:ln>
-        </p:spPr>
-        <p:txBody>
-          <a:bodyPr/>
-          <a:lstStyle/>
-          <a:p>
-            <a:endParaRPr lang="en-US"/>
-          </a:p>
-        </p:txBody>
-      </p:sp>
-      <p:sp>
-        <p:nvSpPr>
-          <p:cNvPr id="9" name="Shape 7"/>
-          <p:cNvSpPr/>
-          <p:nvPr/>
-        </p:nvSpPr>
-        <p:spPr>
-          <a:xfrm>
-            <a:off x="3657600" y="1527048"/>
-            <a:ext cx="0" cy="228600"/>
-          </a:xfrm>
-          <a:prstGeom prst="line">
-            <a:avLst/>
-          </a:prstGeom>
-          <a:noFill/>
-          <a:ln w="19050">
-            <a:solidFill>
-              <a:srgbClr val="8A9BB0"/>
-            </a:solidFill>
-            <a:prstDash val="solid"/>
-          </a:ln>
-        </p:spPr>
-        <p:txBody>
-          <a:bodyPr/>
-          <a:lstStyle/>
-          <a:p>
-            <a:endParaRPr lang="en-US"/>
-          </a:p>
-        </p:txBody>
-      </p:sp>
-      <p:sp>
-        <p:nvSpPr>
-          <p:cNvPr id="10" name="Shape 8"/>
-          <p:cNvSpPr/>
-          <p:nvPr/>
-        </p:nvSpPr>
-        <p:spPr>
-          <a:xfrm>
-            <a:off x="365760" y="1783080"/>
-            <a:ext cx="1280160" cy="384048"/>
-          </a:xfrm>
-          <a:prstGeom prst="roundRect">
-            <a:avLst>
-              <a:gd name="adj" fmla="val 19048"/>
-            </a:avLst>
-          </a:prstGeom>
-          <a:solidFill>
-            <a:srgbClr val="028090"/>
-          </a:solidFill>
-          <a:ln/>
-        </p:spPr>
-        <p:txBody>
-          <a:bodyPr/>
-          <a:lstStyle/>
-          <a:p>
-            <a:endParaRPr lang="en-US"/>
-          </a:p>
-        </p:txBody>
-      </p:sp>
-      <p:sp>
-        <p:nvSpPr>
-          <p:cNvPr id="11" name="Text 9"/>
-          <p:cNvSpPr/>
-          <p:nvPr/>
-        </p:nvSpPr>
-        <p:spPr>
-          <a:xfrm>
-            <a:off x="365760" y="1783080"/>
-            <a:ext cx="1280160" cy="384048"/>
-          </a:xfrm>
-          <a:prstGeom prst="rect">
-            <a:avLst/>
-          </a:prstGeom>
-          <a:noFill/>
-          <a:ln/>
-        </p:spPr>
-        <p:txBody>
-          <a:bodyPr wrap="square" lIns="0" tIns="0" rIns="0" bIns="0" rtlCol="0" anchor="ctr"/>
-          <a:lstStyle/>
-          <a:p>
-            <a:pPr marL="0" indent="0" algn="ctr">
-              <a:buNone/>
-            </a:pPr>
-            <a:r>
-              <a:rPr lang="en-US" sz="1100" b="1" dirty="0">
-                <a:solidFill>
-                  <a:srgbClr val="FFFFFF"/>
-                </a:solidFill>
-                <a:latin typeface="Calibri" pitchFamily="34" charset="0"/>
-                <a:ea typeface="Calibri" pitchFamily="34" charset="-122"/>
-                <a:cs typeface="Calibri" pitchFamily="34" charset="-120"/>
-              </a:rPr>
-              <a:t>Events</a:t>
-            </a:r>
-            <a:endParaRPr lang="en-US" sz="1100" dirty="0"/>
-          </a:p>
-        </p:txBody>
-      </p:sp>
-      <p:sp>
-        <p:nvSpPr>
-          <p:cNvPr id="12" name="Shape 10"/>
-          <p:cNvSpPr/>
-          <p:nvPr/>
-        </p:nvSpPr>
-        <p:spPr>
-          <a:xfrm>
-            <a:off x="1783080" y="1783080"/>
-            <a:ext cx="1737360" cy="384048"/>
-          </a:xfrm>
-          <a:prstGeom prst="roundRect">
-            <a:avLst>
-              <a:gd name="adj" fmla="val 19048"/>
-            </a:avLst>
-          </a:prstGeom>
-          <a:solidFill>
-            <a:srgbClr val="00A896"/>
-          </a:solidFill>
-          <a:ln/>
-        </p:spPr>
-        <p:txBody>
-          <a:bodyPr/>
-          <a:lstStyle/>
-          <a:p>
-            <a:endParaRPr lang="en-US"/>
-          </a:p>
-        </p:txBody>
-      </p:sp>
-      <p:sp>
-        <p:nvSpPr>
-          <p:cNvPr id="13" name="Text 11"/>
-          <p:cNvSpPr/>
-          <p:nvPr/>
-        </p:nvSpPr>
-        <p:spPr>
-          <a:xfrm>
-            <a:off x="1783080" y="1783080"/>
-            <a:ext cx="1737360" cy="384048"/>
-          </a:xfrm>
-          <a:prstGeom prst="rect">
-            <a:avLst/>
-          </a:prstGeom>
-          <a:noFill/>
-          <a:ln/>
-        </p:spPr>
-        <p:txBody>
-          <a:bodyPr wrap="square" lIns="0" tIns="0" rIns="0" bIns="0" rtlCol="0" anchor="ctr"/>
-          <a:lstStyle/>
-          <a:p>
-            <a:pPr marL="0" indent="0" algn="ctr">
-              <a:buNone/>
-            </a:pPr>
-            <a:r>
-              <a:rPr lang="en-US" sz="1100" b="1" dirty="0">
-                <a:solidFill>
-                  <a:srgbClr val="FFFFFF"/>
-                </a:solidFill>
-                <a:latin typeface="Calibri" pitchFamily="34" charset="0"/>
-                <a:ea typeface="Calibri" pitchFamily="34" charset="-122"/>
-                <a:cs typeface="Calibri" pitchFamily="34" charset="-120"/>
-              </a:rPr>
-              <a:t>EventsPerEntity</a:t>
-            </a:r>
-            <a:endParaRPr lang="en-US" sz="1100" dirty="0"/>
-          </a:p>
-        </p:txBody>
-      </p:sp>
-      <p:sp>
-        <p:nvSpPr>
-          <p:cNvPr id="14" name="Shape 12"/>
-          <p:cNvSpPr/>
-          <p:nvPr/>
-        </p:nvSpPr>
-        <p:spPr>
-          <a:xfrm>
-            <a:off x="3611880" y="1783080"/>
-            <a:ext cx="1463040" cy="384048"/>
-          </a:xfrm>
-          <a:prstGeom prst="roundRect">
-            <a:avLst>
-              <a:gd name="adj" fmla="val 19048"/>
-            </a:avLst>
-          </a:prstGeom>
-          <a:solidFill>
-            <a:srgbClr val="028090"/>
-          </a:solidFill>
-          <a:ln/>
-        </p:spPr>
-        <p:txBody>
-          <a:bodyPr/>
-          <a:lstStyle/>
-          <a:p>
-            <a:endParaRPr lang="en-US"/>
-          </a:p>
-        </p:txBody>
-      </p:sp>
-      <p:sp>
-        <p:nvSpPr>
-          <p:cNvPr id="15" name="Text 13"/>
-          <p:cNvSpPr/>
-          <p:nvPr/>
-        </p:nvSpPr>
-        <p:spPr>
-          <a:xfrm>
-            <a:off x="3611880" y="1783080"/>
-            <a:ext cx="1463040" cy="384048"/>
-          </a:xfrm>
-          <a:prstGeom prst="rect">
-            <a:avLst/>
-          </a:prstGeom>
-          <a:noFill/>
-          <a:ln/>
-        </p:spPr>
-        <p:txBody>
-          <a:bodyPr wrap="square" lIns="0" tIns="0" rIns="0" bIns="0" rtlCol="0" anchor="ctr"/>
-          <a:lstStyle/>
-          <a:p>
-            <a:pPr marL="0" indent="0" algn="ctr">
-              <a:buNone/>
-            </a:pPr>
-            <a:r>
-              <a:rPr lang="en-US" sz="1100" b="1" dirty="0">
-                <a:solidFill>
-                  <a:srgbClr val="FFFFFF"/>
-                </a:solidFill>
-                <a:latin typeface="Calibri" pitchFamily="34" charset="0"/>
-                <a:ea typeface="Calibri" pitchFamily="34" charset="-122"/>
-                <a:cs typeface="Calibri" pitchFamily="34" charset="-120"/>
-              </a:rPr>
-              <a:t>Occurrences</a:t>
-            </a:r>
-            <a:endParaRPr lang="en-US" sz="1100" dirty="0"/>
-          </a:p>
-        </p:txBody>
-      </p:sp>
-      <p:sp>
-        <p:nvSpPr>
-          <p:cNvPr id="16" name="Shape 14"/>
-          <p:cNvSpPr/>
-          <p:nvPr/>
-        </p:nvSpPr>
-        <p:spPr>
-          <a:xfrm>
-            <a:off x="5166360" y="1783080"/>
-            <a:ext cx="2011680" cy="384048"/>
-          </a:xfrm>
-          <a:prstGeom prst="roundRect">
-            <a:avLst>
-              <a:gd name="adj" fmla="val 19048"/>
-            </a:avLst>
-          </a:prstGeom>
-          <a:solidFill>
-            <a:srgbClr val="00A896"/>
-          </a:solidFill>
-          <a:ln/>
-        </p:spPr>
-        <p:txBody>
-          <a:bodyPr/>
-          <a:lstStyle/>
-          <a:p>
-            <a:endParaRPr lang="en-US"/>
-          </a:p>
-        </p:txBody>
-      </p:sp>
-      <p:sp>
-        <p:nvSpPr>
-          <p:cNvPr id="17" name="Text 15"/>
-          <p:cNvSpPr/>
-          <p:nvPr/>
-        </p:nvSpPr>
-        <p:spPr>
-          <a:xfrm>
-            <a:off x="5166360" y="1783080"/>
-            <a:ext cx="2011680" cy="384048"/>
-          </a:xfrm>
-          <a:prstGeom prst="rect">
-            <a:avLst/>
-          </a:prstGeom>
-          <a:noFill/>
-          <a:ln/>
-        </p:spPr>
-        <p:txBody>
-          <a:bodyPr wrap="square" lIns="0" tIns="0" rIns="0" bIns="0" rtlCol="0" anchor="ctr"/>
-          <a:lstStyle/>
-          <a:p>
-            <a:pPr marL="0" indent="0" algn="ctr">
-              <a:buNone/>
-            </a:pPr>
-            <a:r>
-              <a:rPr lang="en-US" sz="1100" b="1" dirty="0">
-                <a:solidFill>
-                  <a:srgbClr val="FFFFFF"/>
-                </a:solidFill>
-                <a:latin typeface="Calibri" pitchFamily="34" charset="0"/>
-                <a:ea typeface="Calibri" pitchFamily="34" charset="-122"/>
-                <a:cs typeface="Calibri" pitchFamily="34" charset="-120"/>
-              </a:rPr>
-              <a:t>OccurrencesPerEntity</a:t>
-            </a:r>
-            <a:endParaRPr lang="en-US" sz="1100" dirty="0"/>
-          </a:p>
-        </p:txBody>
-      </p:sp>
-      <p:sp>
-        <p:nvSpPr>
-          <p:cNvPr id="18" name="Shape 16"/>
-          <p:cNvSpPr/>
-          <p:nvPr/>
-        </p:nvSpPr>
-        <p:spPr>
-          <a:xfrm>
-            <a:off x="6172200" y="2167128"/>
-            <a:ext cx="0" cy="228600"/>
-          </a:xfrm>
-          <a:prstGeom prst="line">
-            <a:avLst/>
-          </a:prstGeom>
-          <a:noFill/>
-          <a:ln w="19050">
-            <a:solidFill>
-              <a:srgbClr val="02C39A"/>
-            </a:solidFill>
-            <a:prstDash val="dash"/>
-          </a:ln>
-        </p:spPr>
-        <p:txBody>
-          <a:bodyPr/>
-          <a:lstStyle/>
-          <a:p>
-            <a:endParaRPr lang="en-US"/>
-          </a:p>
-        </p:txBody>
-      </p:sp>
-      <p:sp>
-        <p:nvSpPr>
-          <p:cNvPr id="19" name="Text 17"/>
-          <p:cNvSpPr/>
-          <p:nvPr/>
-        </p:nvSpPr>
-        <p:spPr>
-          <a:xfrm>
-            <a:off x="6309360" y="2167128"/>
-            <a:ext cx="1371600" cy="228600"/>
-          </a:xfrm>
-          <a:prstGeom prst="rect">
-            <a:avLst/>
-          </a:prstGeom>
-          <a:noFill/>
-          <a:ln/>
-        </p:spPr>
-        <p:txBody>
-          <a:bodyPr wrap="square" rtlCol="0" anchor="ctr"/>
-          <a:lstStyle/>
-          <a:p>
-            <a:pPr marL="0" indent="0">
-              <a:buNone/>
-            </a:pPr>
-            <a:r>
-              <a:rPr lang="en-US" sz="900" i="1" dirty="0">
-                <a:solidFill>
-                  <a:srgbClr val="02C39A"/>
-                </a:solidFill>
-                <a:latin typeface="Calibri" pitchFamily="34" charset="0"/>
-                <a:ea typeface="Calibri" pitchFamily="34" charset="-122"/>
-                <a:cs typeface="Calibri" pitchFamily="34" charset="-120"/>
-              </a:rPr>
-              <a:t>build_span()</a:t>
-            </a:r>
-            <a:endParaRPr lang="en-US" sz="900" dirty="0"/>
-          </a:p>
-        </p:txBody>
-      </p:sp>
-      <p:sp>
-        <p:nvSpPr>
-          <p:cNvPr id="20" name="Shape 18"/>
-          <p:cNvSpPr/>
-          <p:nvPr/>
-        </p:nvSpPr>
-        <p:spPr>
-          <a:xfrm>
-            <a:off x="1417320" y="2167128"/>
-            <a:ext cx="0" cy="256032"/>
-          </a:xfrm>
-          <a:prstGeom prst="line">
-            <a:avLst/>
-          </a:prstGeom>
-          <a:noFill/>
-          <a:ln w="19050">
-            <a:solidFill>
-              <a:srgbClr val="8A9BB0"/>
-            </a:solidFill>
-            <a:prstDash val="solid"/>
-          </a:ln>
-        </p:spPr>
-        <p:txBody>
-          <a:bodyPr/>
-          <a:lstStyle/>
-          <a:p>
-            <a:endParaRPr lang="en-US"/>
-          </a:p>
-        </p:txBody>
-      </p:sp>
-      <p:sp>
-        <p:nvSpPr>
-          <p:cNvPr id="21" name="Shape 19"/>
-          <p:cNvSpPr/>
-          <p:nvPr/>
-        </p:nvSpPr>
-        <p:spPr>
-          <a:xfrm>
-            <a:off x="4343400" y="2167128"/>
-            <a:ext cx="0" cy="256032"/>
-          </a:xfrm>
-          <a:prstGeom prst="line">
-            <a:avLst/>
-          </a:prstGeom>
-          <a:noFill/>
-          <a:ln w="19050">
-            <a:solidFill>
-              <a:srgbClr val="8A9BB0"/>
-            </a:solidFill>
-            <a:prstDash val="solid"/>
-          </a:ln>
-        </p:spPr>
-        <p:txBody>
-          <a:bodyPr/>
-          <a:lstStyle/>
-          <a:p>
-            <a:endParaRPr lang="en-US"/>
-          </a:p>
-        </p:txBody>
-      </p:sp>
-      <p:sp>
-        <p:nvSpPr>
-          <p:cNvPr id="22" name="Shape 20"/>
-          <p:cNvSpPr/>
-          <p:nvPr/>
-        </p:nvSpPr>
-        <p:spPr>
-          <a:xfrm>
-            <a:off x="365760" y="2450592"/>
-            <a:ext cx="2834640" cy="384048"/>
-          </a:xfrm>
-          <a:prstGeom prst="roundRect">
-            <a:avLst>
-              <a:gd name="adj" fmla="val 19048"/>
-            </a:avLst>
-          </a:prstGeom>
-          <a:solidFill>
-            <a:srgbClr val="1C7293"/>
-          </a:solidFill>
-          <a:ln/>
-        </p:spPr>
-        <p:txBody>
-          <a:bodyPr/>
-          <a:lstStyle/>
-          <a:p>
-            <a:endParaRPr lang="en-US"/>
-          </a:p>
-        </p:txBody>
-      </p:sp>
-      <p:sp>
-        <p:nvSpPr>
-          <p:cNvPr id="23" name="Text 21"/>
-          <p:cNvSpPr/>
-          <p:nvPr/>
-        </p:nvSpPr>
-        <p:spPr>
-          <a:xfrm>
-            <a:off x="365760" y="2450592"/>
-            <a:ext cx="2834640" cy="384048"/>
-          </a:xfrm>
-          <a:prstGeom prst="rect">
-            <a:avLst/>
-          </a:prstGeom>
-          <a:noFill/>
-          <a:ln/>
-        </p:spPr>
-        <p:txBody>
-          <a:bodyPr wrap="square" lIns="0" tIns="0" rIns="0" bIns="0" rtlCol="0" anchor="ctr"/>
-          <a:lstStyle/>
-          <a:p>
-            <a:pPr marL="0" indent="0" algn="ctr">
-              <a:buNone/>
-            </a:pPr>
-            <a:r>
-              <a:rPr lang="en-US" sz="1100" b="1" dirty="0">
-                <a:solidFill>
-                  <a:srgbClr val="FFFFFF"/>
-                </a:solidFill>
-                <a:latin typeface="Calibri" pitchFamily="34" charset="0"/>
-                <a:ea typeface="Calibri" pitchFamily="34" charset="-122"/>
-                <a:cs typeface="Calibri" pitchFamily="34" charset="-120"/>
-              </a:rPr>
-              <a:t>EventsWithinSpansAnalyzer</a:t>
-            </a:r>
-            <a:endParaRPr lang="en-US" sz="1100" dirty="0"/>
-          </a:p>
-        </p:txBody>
-      </p:sp>
-      <p:sp>
-        <p:nvSpPr>
-          <p:cNvPr id="24" name="Shape 22"/>
-          <p:cNvSpPr/>
-          <p:nvPr/>
-        </p:nvSpPr>
-        <p:spPr>
-          <a:xfrm>
-            <a:off x="3337560" y="2450592"/>
-            <a:ext cx="2834640" cy="384048"/>
-          </a:xfrm>
-          <a:prstGeom prst="roundRect">
-            <a:avLst>
-              <a:gd name="adj" fmla="val 19048"/>
-            </a:avLst>
-          </a:prstGeom>
-          <a:solidFill>
-            <a:srgbClr val="1C7293"/>
-          </a:solidFill>
-          <a:ln/>
-        </p:spPr>
-        <p:txBody>
-          <a:bodyPr/>
-          <a:lstStyle/>
-          <a:p>
-            <a:endParaRPr lang="en-US"/>
-          </a:p>
-        </p:txBody>
-      </p:sp>
-      <p:sp>
-        <p:nvSpPr>
-          <p:cNvPr id="25" name="Text 23"/>
-          <p:cNvSpPr/>
-          <p:nvPr/>
-        </p:nvSpPr>
-        <p:spPr>
-          <a:xfrm>
-            <a:off x="3337560" y="2450592"/>
-            <a:ext cx="2834640" cy="384048"/>
-          </a:xfrm>
-          <a:prstGeom prst="rect">
-            <a:avLst/>
-          </a:prstGeom>
-          <a:noFill/>
-          <a:ln/>
-        </p:spPr>
-        <p:txBody>
-          <a:bodyPr wrap="square" lIns="0" tIns="0" rIns="0" bIns="0" rtlCol="0" anchor="ctr"/>
-          <a:lstStyle/>
-          <a:p>
-            <a:pPr marL="0" indent="0" algn="ctr">
-              <a:buNone/>
-            </a:pPr>
-            <a:r>
-              <a:rPr lang="en-US" sz="1100" b="1" dirty="0">
-                <a:solidFill>
-                  <a:srgbClr val="FFFFFF"/>
-                </a:solidFill>
-                <a:latin typeface="Calibri" pitchFamily="34" charset="0"/>
-                <a:ea typeface="Calibri" pitchFamily="34" charset="-122"/>
-                <a:cs typeface="Calibri" pitchFamily="34" charset="-120"/>
-              </a:rPr>
-              <a:t>OccurrencesWithinSpansAnalyzer</a:t>
-            </a:r>
-            <a:endParaRPr lang="en-US" sz="1100" dirty="0"/>
-          </a:p>
-        </p:txBody>
-      </p:sp>
-      <p:sp>
-        <p:nvSpPr>
-          <p:cNvPr id="26" name="Shape 24"/>
-          <p:cNvSpPr/>
-          <p:nvPr/>
-        </p:nvSpPr>
-        <p:spPr>
-          <a:xfrm>
-            <a:off x="1783080" y="2834640"/>
-            <a:ext cx="0" cy="256032"/>
-          </a:xfrm>
-          <a:prstGeom prst="line">
-            <a:avLst/>
-          </a:prstGeom>
-          <a:noFill/>
-          <a:ln w="19050">
-            <a:solidFill>
-              <a:srgbClr val="8A9BB0"/>
-            </a:solidFill>
-            <a:prstDash val="solid"/>
-          </a:ln>
-        </p:spPr>
-        <p:txBody>
-          <a:bodyPr/>
-          <a:lstStyle/>
-          <a:p>
-            <a:endParaRPr lang="en-US"/>
-          </a:p>
-        </p:txBody>
-      </p:sp>
-      <p:sp>
-        <p:nvSpPr>
-          <p:cNvPr id="27" name="Shape 25"/>
-          <p:cNvSpPr/>
-          <p:nvPr/>
-        </p:nvSpPr>
-        <p:spPr>
-          <a:xfrm>
-            <a:off x="4754880" y="2834640"/>
-            <a:ext cx="0" cy="256032"/>
-          </a:xfrm>
-          <a:prstGeom prst="line">
-            <a:avLst/>
-          </a:prstGeom>
-          <a:noFill/>
-          <a:ln w="19050">
-            <a:solidFill>
-              <a:srgbClr val="8A9BB0"/>
-            </a:solidFill>
-            <a:prstDash val="solid"/>
-          </a:ln>
-        </p:spPr>
-        <p:txBody>
-          <a:bodyPr/>
-          <a:lstStyle/>
-          <a:p>
-            <a:endParaRPr lang="en-US"/>
-          </a:p>
-        </p:txBody>
-      </p:sp>
-      <p:sp>
-        <p:nvSpPr>
-          <p:cNvPr id="28" name="Shape 26"/>
-          <p:cNvSpPr/>
-          <p:nvPr/>
-        </p:nvSpPr>
-        <p:spPr>
-          <a:xfrm>
-            <a:off x="365760" y="3090672"/>
-            <a:ext cx="8412480" cy="384048"/>
-          </a:xfrm>
-          <a:prstGeom prst="rect">
-            <a:avLst/>
-          </a:prstGeom>
-          <a:solidFill>
-            <a:srgbClr val="E8EFF5"/>
-          </a:solidFill>
-          <a:ln w="19050">
-            <a:solidFill>
-              <a:srgbClr val="8A9BB0"/>
-            </a:solidFill>
-            <a:prstDash val="solid"/>
-          </a:ln>
-        </p:spPr>
-        <p:txBody>
-          <a:bodyPr/>
-          <a:lstStyle/>
-          <a:p>
-            <a:endParaRPr lang="en-US"/>
-          </a:p>
-        </p:txBody>
-      </p:sp>
-      <p:sp>
-        <p:nvSpPr>
-          <p:cNvPr id="29" name="Text 27"/>
-          <p:cNvSpPr/>
-          <p:nvPr/>
-        </p:nvSpPr>
-        <p:spPr>
-          <a:xfrm>
-            <a:off x="365760" y="3090672"/>
-            <a:ext cx="8412480" cy="384048"/>
-          </a:xfrm>
-          <a:prstGeom prst="rect">
-            <a:avLst/>
-          </a:prstGeom>
-          <a:noFill/>
-          <a:ln/>
-        </p:spPr>
-        <p:txBody>
-          <a:bodyPr wrap="square" lIns="0" tIns="0" rIns="0" bIns="0" rtlCol="0" anchor="ctr"/>
-          <a:lstStyle/>
-          <a:p>
-            <a:pPr marL="0" indent="0" algn="ctr">
-              <a:buNone/>
-            </a:pPr>
-            <a:r>
-              <a:rPr lang="en-US" sz="1200" b="1" dirty="0">
-                <a:solidFill>
-                  <a:srgbClr val="0D2B45"/>
-                </a:solidFill>
-                <a:latin typeface="Calibri" pitchFamily="34" charset="0"/>
-                <a:ea typeface="Calibri" pitchFamily="34" charset="-122"/>
-                <a:cs typeface="Calibri" pitchFamily="34" charset="-120"/>
-              </a:rPr>
-              <a:t>PipeDelimitedIntermediate  (base — columnar contract + combine())</a:t>
-            </a:r>
-            <a:endParaRPr lang="en-US" sz="1200" dirty="0"/>
-          </a:p>
-        </p:txBody>
-      </p:sp>
-      <p:sp>
-        <p:nvSpPr>
-          <p:cNvPr id="30" name="Shape 28"/>
-          <p:cNvSpPr/>
-          <p:nvPr/>
-        </p:nvSpPr>
-        <p:spPr>
-          <a:xfrm>
-            <a:off x="1828800" y="3474720"/>
-            <a:ext cx="0" cy="256032"/>
-          </a:xfrm>
-          <a:prstGeom prst="line">
-            <a:avLst/>
-          </a:prstGeom>
-          <a:noFill/>
-          <a:ln w="19050">
-            <a:solidFill>
-              <a:srgbClr val="8A9BB0"/>
-            </a:solidFill>
-            <a:prstDash val="solid"/>
-          </a:ln>
-        </p:spPr>
-        <p:txBody>
-          <a:bodyPr/>
-          <a:lstStyle/>
-          <a:p>
-            <a:endParaRPr lang="en-US"/>
-          </a:p>
-        </p:txBody>
-      </p:sp>
-      <p:sp>
-        <p:nvSpPr>
-          <p:cNvPr id="31" name="Shape 29"/>
-          <p:cNvSpPr/>
-          <p:nvPr/>
-        </p:nvSpPr>
-        <p:spPr>
-          <a:xfrm>
-            <a:off x="6400800" y="3474720"/>
-            <a:ext cx="0" cy="256032"/>
-          </a:xfrm>
-          <a:prstGeom prst="line">
-            <a:avLst/>
-          </a:prstGeom>
-          <a:noFill/>
-          <a:ln w="19050">
-            <a:solidFill>
-              <a:srgbClr val="8A9BB0"/>
-            </a:solidFill>
-            <a:prstDash val="solid"/>
-          </a:ln>
-        </p:spPr>
-        <p:txBody>
-          <a:bodyPr/>
-          <a:lstStyle/>
-          <a:p>
-            <a:endParaRPr lang="en-US"/>
-          </a:p>
-        </p:txBody>
-      </p:sp>
-      <p:sp>
-        <p:nvSpPr>
-          <p:cNvPr id="32" name="Shape 30"/>
-          <p:cNvSpPr/>
-          <p:nvPr/>
-        </p:nvSpPr>
-        <p:spPr>
-          <a:xfrm>
-            <a:off x="365760" y="3730752"/>
-            <a:ext cx="3657600" cy="384048"/>
-          </a:xfrm>
-          <a:prstGeom prst="roundRect">
-            <a:avLst>
-              <a:gd name="adj" fmla="val 19048"/>
-            </a:avLst>
-          </a:prstGeom>
-          <a:solidFill>
-            <a:srgbClr val="028090"/>
-          </a:solidFill>
-          <a:ln/>
-        </p:spPr>
-        <p:txBody>
-          <a:bodyPr/>
-          <a:lstStyle/>
-          <a:p>
-            <a:endParaRPr lang="en-US"/>
-          </a:p>
-        </p:txBody>
-      </p:sp>
-      <p:sp>
-        <p:nvSpPr>
-          <p:cNvPr id="33" name="Text 31"/>
-          <p:cNvSpPr/>
-          <p:nvPr/>
-        </p:nvSpPr>
-        <p:spPr>
-          <a:xfrm>
-            <a:off x="365760" y="3730752"/>
-            <a:ext cx="3657600" cy="384048"/>
-          </a:xfrm>
-          <a:prstGeom prst="rect">
-            <a:avLst/>
-          </a:prstGeom>
-          <a:noFill/>
-          <a:ln/>
-        </p:spPr>
-        <p:txBody>
-          <a:bodyPr wrap="square" lIns="0" tIns="0" rIns="0" bIns="0" rtlCol="0" anchor="ctr"/>
-          <a:lstStyle/>
-          <a:p>
-            <a:pPr marL="0" indent="0" algn="ctr">
-              <a:buNone/>
-            </a:pPr>
-            <a:r>
-              <a:rPr lang="en-US" sz="1100" b="1" dirty="0">
-                <a:solidFill>
-                  <a:srgbClr val="FFFFFF"/>
-                </a:solidFill>
-                <a:latin typeface="Calibri" pitchFamily="34" charset="0"/>
-                <a:ea typeface="Calibri" pitchFamily="34" charset="-122"/>
-                <a:cs typeface="Calibri" pitchFamily="34" charset="-120"/>
-              </a:rPr>
-              <a:t>PipeDelimitedIntermediateEvents</a:t>
-            </a:r>
-            <a:endParaRPr lang="en-US" sz="1100" dirty="0"/>
-          </a:p>
-        </p:txBody>
-      </p:sp>
-      <p:sp>
-        <p:nvSpPr>
-          <p:cNvPr id="34" name="Shape 32"/>
-          <p:cNvSpPr/>
-          <p:nvPr/>
-        </p:nvSpPr>
-        <p:spPr>
-          <a:xfrm>
-            <a:off x="4572000" y="3730752"/>
-            <a:ext cx="3840480" cy="384048"/>
-          </a:xfrm>
-          <a:prstGeom prst="roundRect">
-            <a:avLst>
-              <a:gd name="adj" fmla="val 19048"/>
-            </a:avLst>
-          </a:prstGeom>
-          <a:solidFill>
-            <a:srgbClr val="028090"/>
-          </a:solidFill>
-          <a:ln/>
-        </p:spPr>
-        <p:txBody>
-          <a:bodyPr/>
-          <a:lstStyle/>
-          <a:p>
-            <a:endParaRPr lang="en-US"/>
-          </a:p>
-        </p:txBody>
-      </p:sp>
-      <p:sp>
-        <p:nvSpPr>
-          <p:cNvPr id="35" name="Text 33"/>
-          <p:cNvSpPr/>
-          <p:nvPr/>
-        </p:nvSpPr>
-        <p:spPr>
-          <a:xfrm>
-            <a:off x="4572000" y="3730752"/>
-            <a:ext cx="3840480" cy="384048"/>
-          </a:xfrm>
-          <a:prstGeom prst="rect">
-            <a:avLst/>
-          </a:prstGeom>
-          <a:noFill/>
-          <a:ln/>
-        </p:spPr>
-        <p:txBody>
-          <a:bodyPr wrap="square" lIns="0" tIns="0" rIns="0" bIns="0" rtlCol="0" anchor="ctr"/>
-          <a:lstStyle/>
-          <a:p>
-            <a:pPr marL="0" indent="0" algn="ctr">
-              <a:buNone/>
-            </a:pPr>
-            <a:r>
-              <a:rPr lang="en-US" sz="1100" b="1" dirty="0">
-                <a:solidFill>
-                  <a:srgbClr val="FFFFFF"/>
-                </a:solidFill>
-                <a:latin typeface="Calibri" pitchFamily="34" charset="0"/>
-                <a:ea typeface="Calibri" pitchFamily="34" charset="-122"/>
-                <a:cs typeface="Calibri" pitchFamily="34" charset="-120"/>
-              </a:rPr>
-              <a:t>PipeDelimitedIntermediateOccurrences</a:t>
-            </a:r>
-            <a:endParaRPr lang="en-US" sz="1100" dirty="0"/>
-          </a:p>
-        </p:txBody>
-      </p:sp>
-      <p:sp>
-        <p:nvSpPr>
-          <p:cNvPr id="36" name="Shape 34"/>
-          <p:cNvSpPr/>
-          <p:nvPr/>
-        </p:nvSpPr>
-        <p:spPr>
-          <a:xfrm>
-            <a:off x="2194560" y="4114800"/>
-            <a:ext cx="0" cy="256032"/>
-          </a:xfrm>
-          <a:prstGeom prst="line">
-            <a:avLst/>
-          </a:prstGeom>
-          <a:noFill/>
-          <a:ln w="19050">
-            <a:solidFill>
-              <a:srgbClr val="02C39A"/>
-            </a:solidFill>
-            <a:prstDash val="solid"/>
-          </a:ln>
-        </p:spPr>
-        <p:txBody>
-          <a:bodyPr/>
-          <a:lstStyle/>
-          <a:p>
-            <a:endParaRPr lang="en-US"/>
-          </a:p>
-        </p:txBody>
-      </p:sp>
-      <p:sp>
-        <p:nvSpPr>
-          <p:cNvPr id="37" name="Shape 35"/>
-          <p:cNvSpPr/>
-          <p:nvPr/>
-        </p:nvSpPr>
-        <p:spPr>
-          <a:xfrm>
-            <a:off x="6400800" y="4114800"/>
-            <a:ext cx="0" cy="256032"/>
-          </a:xfrm>
-          <a:prstGeom prst="line">
-            <a:avLst/>
-          </a:prstGeom>
-          <a:noFill/>
-          <a:ln w="19050">
-            <a:solidFill>
-              <a:srgbClr val="02C39A"/>
-            </a:solidFill>
-            <a:prstDash val="solid"/>
-          </a:ln>
-        </p:spPr>
-        <p:txBody>
-          <a:bodyPr/>
-          <a:lstStyle/>
-          <a:p>
-            <a:endParaRPr lang="en-US"/>
-          </a:p>
-        </p:txBody>
-      </p:sp>
-      <p:sp>
-        <p:nvSpPr>
-          <p:cNvPr id="38" name="Shape 36"/>
-          <p:cNvSpPr/>
-          <p:nvPr/>
-        </p:nvSpPr>
-        <p:spPr>
-          <a:xfrm>
-            <a:off x="365760" y="4370832"/>
-            <a:ext cx="2560320" cy="384048"/>
-          </a:xfrm>
-          <a:prstGeom prst="roundRect">
-            <a:avLst>
-              <a:gd name="adj" fmla="val 19048"/>
-            </a:avLst>
-          </a:prstGeom>
-          <a:solidFill>
-            <a:srgbClr val="02C39A"/>
-          </a:solidFill>
-          <a:ln/>
-        </p:spPr>
-        <p:txBody>
-          <a:bodyPr/>
-          <a:lstStyle/>
-          <a:p>
-            <a:endParaRPr lang="en-US"/>
-          </a:p>
-        </p:txBody>
-      </p:sp>
-      <p:sp>
-        <p:nvSpPr>
-          <p:cNvPr id="39" name="Text 37"/>
-          <p:cNvSpPr/>
-          <p:nvPr/>
-        </p:nvSpPr>
-        <p:spPr>
-          <a:xfrm>
-            <a:off x="365760" y="4370832"/>
-            <a:ext cx="2560320" cy="384048"/>
-          </a:xfrm>
-          <a:prstGeom prst="rect">
-            <a:avLst/>
-          </a:prstGeom>
-          <a:noFill/>
-          <a:ln/>
-        </p:spPr>
-        <p:txBody>
-          <a:bodyPr wrap="square" lIns="0" tIns="0" rIns="0" bIns="0" rtlCol="0" anchor="ctr"/>
-          <a:lstStyle/>
-          <a:p>
-            <a:pPr marL="0" indent="0" algn="ctr">
-              <a:buNone/>
-            </a:pPr>
-            <a:r>
-              <a:rPr lang="en-US" sz="1100" b="1" dirty="0">
-                <a:solidFill>
-                  <a:srgbClr val="0D2B45"/>
-                </a:solidFill>
-                <a:latin typeface="Calibri" pitchFamily="34" charset="0"/>
-                <a:ea typeface="Calibri" pitchFamily="34" charset="-122"/>
-                <a:cs typeface="Calibri" pitchFamily="34" charset="-120"/>
-              </a:rPr>
-              <a:t>StackedEventsPlotter</a:t>
-            </a:r>
-            <a:endParaRPr lang="en-US" sz="1100" dirty="0"/>
-          </a:p>
-        </p:txBody>
-      </p:sp>
-      <p:sp>
-        <p:nvSpPr>
-          <p:cNvPr id="40" name="Shape 38"/>
-          <p:cNvSpPr/>
-          <p:nvPr/>
-        </p:nvSpPr>
-        <p:spPr>
-          <a:xfrm>
-            <a:off x="3017520" y="4370832"/>
-            <a:ext cx="2468880" cy="384048"/>
-          </a:xfrm>
-          <a:prstGeom prst="roundRect">
-            <a:avLst>
-              <a:gd name="adj" fmla="val 19048"/>
-            </a:avLst>
-          </a:prstGeom>
-          <a:solidFill>
-            <a:srgbClr val="02C39A"/>
-          </a:solidFill>
-          <a:ln/>
-        </p:spPr>
-        <p:txBody>
-          <a:bodyPr/>
-          <a:lstStyle/>
-          <a:p>
-            <a:endParaRPr lang="en-US"/>
-          </a:p>
-        </p:txBody>
-      </p:sp>
-      <p:sp>
-        <p:nvSpPr>
-          <p:cNvPr id="41" name="Text 39"/>
-          <p:cNvSpPr/>
-          <p:nvPr/>
-        </p:nvSpPr>
-        <p:spPr>
-          <a:xfrm>
-            <a:off x="3017520" y="4370832"/>
-            <a:ext cx="2468880" cy="384048"/>
-          </a:xfrm>
-          <a:prstGeom prst="rect">
-            <a:avLst/>
-          </a:prstGeom>
-          <a:noFill/>
-          <a:ln/>
-        </p:spPr>
-        <p:txBody>
-          <a:bodyPr wrap="square" lIns="0" tIns="0" rIns="0" bIns="0" rtlCol="0" anchor="ctr"/>
-          <a:lstStyle/>
-          <a:p>
-            <a:pPr marL="0" indent="0" algn="ctr">
-              <a:buNone/>
-            </a:pPr>
-            <a:r>
-              <a:rPr lang="en-US" sz="1100" b="1" dirty="0">
-                <a:solidFill>
-                  <a:srgbClr val="0D2B45"/>
-                </a:solidFill>
-                <a:latin typeface="Calibri" pitchFamily="34" charset="0"/>
-                <a:ea typeface="Calibri" pitchFamily="34" charset="-122"/>
-                <a:cs typeface="Calibri" pitchFamily="34" charset="-120"/>
-              </a:rPr>
-              <a:t>ActivityOverTimePlotter</a:t>
-            </a:r>
-            <a:endParaRPr lang="en-US" sz="1100" dirty="0"/>
-          </a:p>
-        </p:txBody>
-      </p:sp>
-      <p:sp>
-        <p:nvSpPr>
-          <p:cNvPr id="42" name="Shape 40"/>
-          <p:cNvSpPr/>
-          <p:nvPr/>
-        </p:nvSpPr>
-        <p:spPr>
-          <a:xfrm>
-            <a:off x="5577840" y="4370832"/>
-            <a:ext cx="2926080" cy="384048"/>
-          </a:xfrm>
-          <a:prstGeom prst="roundRect">
-            <a:avLst>
-              <a:gd name="adj" fmla="val 19048"/>
-            </a:avLst>
-          </a:prstGeom>
-          <a:solidFill>
-            <a:srgbClr val="02C39A"/>
-          </a:solidFill>
-          <a:ln/>
-        </p:spPr>
-        <p:txBody>
-          <a:bodyPr/>
-          <a:lstStyle/>
-          <a:p>
-            <a:endParaRPr lang="en-US"/>
-          </a:p>
-        </p:txBody>
-      </p:sp>
-      <p:sp>
-        <p:nvSpPr>
-          <p:cNvPr id="43" name="Text 41"/>
-          <p:cNvSpPr/>
-          <p:nvPr/>
-        </p:nvSpPr>
-        <p:spPr>
-          <a:xfrm>
-            <a:off x="5577840" y="4370832"/>
-            <a:ext cx="2926080" cy="384048"/>
-          </a:xfrm>
-          <a:prstGeom prst="rect">
-            <a:avLst/>
-          </a:prstGeom>
-          <a:noFill/>
-          <a:ln/>
-        </p:spPr>
-        <p:txBody>
-          <a:bodyPr wrap="square" lIns="0" tIns="0" rIns="0" bIns="0" rtlCol="0" anchor="ctr"/>
-          <a:lstStyle/>
-          <a:p>
-            <a:pPr marL="0" indent="0" algn="ctr">
-              <a:buNone/>
-            </a:pPr>
-            <a:r>
-              <a:rPr lang="en-US" sz="1100" b="1" dirty="0">
-                <a:solidFill>
-                  <a:srgbClr val="0D2B45"/>
-                </a:solidFill>
-                <a:latin typeface="Calibri" pitchFamily="34" charset="0"/>
-                <a:ea typeface="Calibri" pitchFamily="34" charset="-122"/>
-                <a:cs typeface="Calibri" pitchFamily="34" charset="-120"/>
-              </a:rPr>
-              <a:t>EventAnalysisHistogramPlotter</a:t>
-            </a:r>
-            <a:endParaRPr lang="en-US" sz="1100" dirty="0"/>
           </a:p>
         </p:txBody>
       </p:sp>
@@ -14838,6 +12173,41 @@
           </a:prstGeom>
         </p:spPr>
       </p:pic>
+      <p:sp>
+        <p:nvSpPr>
+          <p:cNvPr id="4" name="TextBox 3">
+            <a:extLst>
+              <a:ext uri="{FF2B5EF4-FFF2-40B4-BE49-F238E27FC236}">
+                <a16:creationId xmlns:a16="http://schemas.microsoft.com/office/drawing/2014/main" id="{B6A5124D-21AE-6F7C-8776-7B586F035922}"/>
+              </a:ext>
+            </a:extLst>
+          </p:cNvPr>
+          <p:cNvSpPr txBox="1"/>
+          <p:nvPr/>
+        </p:nvSpPr>
+        <p:spPr>
+          <a:xfrm>
+            <a:off x="5378824" y="4280007"/>
+            <a:ext cx="1882588" cy="923330"/>
+          </a:xfrm>
+          <a:prstGeom prst="rect">
+            <a:avLst/>
+          </a:prstGeom>
+          <a:noFill/>
+        </p:spPr>
+        <p:txBody>
+          <a:bodyPr wrap="square" rtlCol="0">
+            <a:spAutoFit/>
+          </a:bodyPr>
+          <a:lstStyle/>
+          <a:p>
+            <a:r>
+              <a:rPr lang="en-US" dirty="0"/>
+              <a:t>*** Make it all check marks (with an appendix)</a:t>
+            </a:r>
+          </a:p>
+        </p:txBody>
+      </p:sp>
     </p:spTree>
     <p:extLst>
       <p:ext uri="{BB962C8B-B14F-4D97-AF65-F5344CB8AC3E}">
@@ -14852,6 +12222,2741 @@
 </file>
 
 <file path=ppt/slides/slide40.xml><?xml version="1.0" encoding="utf-8"?>
+<p:sld xmlns:a="http://schemas.openxmlformats.org/drawingml/2006/main" xmlns:r="http://schemas.openxmlformats.org/officeDocument/2006/relationships" xmlns:p="http://schemas.openxmlformats.org/presentationml/2006/main">
+  <p:cSld name="Slide 3">
+    <p:bg>
+      <p:bgPr>
+        <a:solidFill>
+          <a:srgbClr val="F4F8FB"/>
+        </a:solidFill>
+        <a:effectLst/>
+      </p:bgPr>
+    </p:bg>
+    <p:spTree>
+      <p:nvGrpSpPr>
+        <p:cNvPr id="1" name=""/>
+        <p:cNvGrpSpPr/>
+        <p:nvPr/>
+      </p:nvGrpSpPr>
+      <p:grpSpPr>
+        <a:xfrm>
+          <a:off x="0" y="0"/>
+          <a:ext cx="0" cy="0"/>
+          <a:chOff x="0" y="0"/>
+          <a:chExt cx="0" cy="0"/>
+        </a:xfrm>
+      </p:grpSpPr>
+      <p:sp>
+        <p:nvSpPr>
+          <p:cNvPr id="2" name="Text 0"/>
+          <p:cNvSpPr/>
+          <p:nvPr/>
+        </p:nvSpPr>
+        <p:spPr>
+          <a:xfrm>
+            <a:off x="457200" y="228600"/>
+            <a:ext cx="8229600" cy="640080"/>
+          </a:xfrm>
+          <a:prstGeom prst="rect">
+            <a:avLst/>
+          </a:prstGeom>
+          <a:noFill/>
+          <a:ln/>
+        </p:spPr>
+        <p:txBody>
+          <a:bodyPr wrap="square" lIns="0" tIns="0" rIns="0" bIns="0" rtlCol="0" anchor="ctr"/>
+          <a:lstStyle/>
+          <a:p>
+            <a:pPr marL="0" indent="0" algn="l">
+              <a:buNone/>
+            </a:pPr>
+            <a:r>
+              <a:rPr lang="en-US" sz="3200" b="1" dirty="0">
+                <a:solidFill>
+                  <a:srgbClr val="0D2B45"/>
+                </a:solidFill>
+                <a:latin typeface="Calibri" pitchFamily="34" charset="0"/>
+                <a:ea typeface="Calibri" pitchFamily="34" charset="-122"/>
+                <a:cs typeface="Calibri" pitchFamily="34" charset="-120"/>
+              </a:rPr>
+              <a:t>The Four-Layer Architecture</a:t>
+            </a:r>
+            <a:endParaRPr lang="en-US" sz="3200" dirty="0"/>
+          </a:p>
+        </p:txBody>
+      </p:sp>
+      <p:sp>
+        <p:nvSpPr>
+          <p:cNvPr id="3" name="Shape 1"/>
+          <p:cNvSpPr/>
+          <p:nvPr/>
+        </p:nvSpPr>
+        <p:spPr>
+          <a:xfrm>
+            <a:off x="457200" y="886968"/>
+            <a:ext cx="8229600" cy="36576"/>
+          </a:xfrm>
+          <a:prstGeom prst="rect">
+            <a:avLst/>
+          </a:prstGeom>
+          <a:solidFill>
+            <a:srgbClr val="028090"/>
+          </a:solidFill>
+          <a:ln/>
+        </p:spPr>
+        <p:txBody>
+          <a:bodyPr/>
+          <a:lstStyle/>
+          <a:p>
+            <a:endParaRPr lang="en-US"/>
+          </a:p>
+        </p:txBody>
+      </p:sp>
+      <p:sp>
+        <p:nvSpPr>
+          <p:cNvPr id="4" name="Shape 2"/>
+          <p:cNvSpPr/>
+          <p:nvPr/>
+        </p:nvSpPr>
+        <p:spPr>
+          <a:xfrm>
+            <a:off x="365760" y="1005840"/>
+            <a:ext cx="4389120" cy="594360"/>
+          </a:xfrm>
+          <a:prstGeom prst="rect">
+            <a:avLst/>
+          </a:prstGeom>
+          <a:solidFill>
+            <a:srgbClr val="0D2B45"/>
+          </a:solidFill>
+          <a:ln/>
+        </p:spPr>
+        <p:txBody>
+          <a:bodyPr/>
+          <a:lstStyle/>
+          <a:p>
+            <a:endParaRPr lang="en-US"/>
+          </a:p>
+        </p:txBody>
+      </p:sp>
+      <p:sp>
+        <p:nvSpPr>
+          <p:cNvPr id="5" name="Text 3"/>
+          <p:cNvSpPr/>
+          <p:nvPr/>
+        </p:nvSpPr>
+        <p:spPr>
+          <a:xfrm>
+            <a:off x="457200" y="1042416"/>
+            <a:ext cx="4206240" cy="256032"/>
+          </a:xfrm>
+          <a:prstGeom prst="rect">
+            <a:avLst/>
+          </a:prstGeom>
+          <a:noFill/>
+          <a:ln/>
+        </p:spPr>
+        <p:txBody>
+          <a:bodyPr wrap="square" lIns="0" tIns="0" rIns="0" bIns="0" rtlCol="0" anchor="ctr"/>
+          <a:lstStyle/>
+          <a:p>
+            <a:pPr marL="0" indent="0" algn="l">
+              <a:buNone/>
+            </a:pPr>
+            <a:r>
+              <a:rPr lang="en-US" sz="1400" b="1" dirty="0">
+                <a:solidFill>
+                  <a:srgbClr val="FFFFFF"/>
+                </a:solidFill>
+                <a:latin typeface="Calibri" pitchFamily="34" charset="0"/>
+                <a:ea typeface="Calibri" pitchFamily="34" charset="-122"/>
+                <a:cs typeface="Calibri" pitchFamily="34" charset="-120"/>
+              </a:rPr>
+              <a:t>Semantics</a:t>
+            </a:r>
+            <a:endParaRPr lang="en-US" sz="1400" dirty="0"/>
+          </a:p>
+        </p:txBody>
+      </p:sp>
+      <p:sp>
+        <p:nvSpPr>
+          <p:cNvPr id="6" name="Text 4"/>
+          <p:cNvSpPr/>
+          <p:nvPr/>
+        </p:nvSpPr>
+        <p:spPr>
+          <a:xfrm>
+            <a:off x="457200" y="1307592"/>
+            <a:ext cx="4206240" cy="228600"/>
+          </a:xfrm>
+          <a:prstGeom prst="rect">
+            <a:avLst/>
+          </a:prstGeom>
+          <a:noFill/>
+          <a:ln/>
+        </p:spPr>
+        <p:txBody>
+          <a:bodyPr wrap="square" lIns="0" tIns="0" rIns="0" bIns="0" rtlCol="0" anchor="ctr"/>
+          <a:lstStyle/>
+          <a:p>
+            <a:pPr marL="0" indent="0" algn="l">
+              <a:buNone/>
+            </a:pPr>
+            <a:r>
+              <a:rPr lang="en-US" sz="1000" dirty="0">
+                <a:solidFill>
+                  <a:srgbClr val="FFFFFF"/>
+                </a:solidFill>
+                <a:latin typeface="Calibri" pitchFamily="34" charset="0"/>
+                <a:ea typeface="Calibri" pitchFamily="34" charset="-122"/>
+                <a:cs typeface="Calibri" pitchFamily="34" charset="-120"/>
+              </a:rPr>
+              <a:t>EventSemantics, OccurrenceSemantics</a:t>
+            </a:r>
+            <a:endParaRPr lang="en-US" sz="1000" dirty="0"/>
+          </a:p>
+        </p:txBody>
+      </p:sp>
+      <p:sp>
+        <p:nvSpPr>
+          <p:cNvPr id="7" name="Shape 5"/>
+          <p:cNvSpPr/>
+          <p:nvPr/>
+        </p:nvSpPr>
+        <p:spPr>
+          <a:xfrm>
+            <a:off x="2377440" y="1600200"/>
+            <a:ext cx="54864" cy="155448"/>
+          </a:xfrm>
+          <a:prstGeom prst="rect">
+            <a:avLst/>
+          </a:prstGeom>
+          <a:solidFill>
+            <a:srgbClr val="8A9BB0"/>
+          </a:solidFill>
+          <a:ln/>
+        </p:spPr>
+        <p:txBody>
+          <a:bodyPr/>
+          <a:lstStyle/>
+          <a:p>
+            <a:endParaRPr lang="en-US"/>
+          </a:p>
+        </p:txBody>
+      </p:sp>
+      <p:sp>
+        <p:nvSpPr>
+          <p:cNvPr id="8" name="Shape 6"/>
+          <p:cNvSpPr/>
+          <p:nvPr/>
+        </p:nvSpPr>
+        <p:spPr>
+          <a:xfrm>
+            <a:off x="365760" y="1755648"/>
+            <a:ext cx="4389120" cy="594360"/>
+          </a:xfrm>
+          <a:prstGeom prst="rect">
+            <a:avLst/>
+          </a:prstGeom>
+          <a:solidFill>
+            <a:srgbClr val="028090"/>
+          </a:solidFill>
+          <a:ln/>
+        </p:spPr>
+        <p:txBody>
+          <a:bodyPr/>
+          <a:lstStyle/>
+          <a:p>
+            <a:endParaRPr lang="en-US"/>
+          </a:p>
+        </p:txBody>
+      </p:sp>
+      <p:sp>
+        <p:nvSpPr>
+          <p:cNvPr id="9" name="Text 7"/>
+          <p:cNvSpPr/>
+          <p:nvPr/>
+        </p:nvSpPr>
+        <p:spPr>
+          <a:xfrm>
+            <a:off x="457200" y="1792224"/>
+            <a:ext cx="4206240" cy="256032"/>
+          </a:xfrm>
+          <a:prstGeom prst="rect">
+            <a:avLst/>
+          </a:prstGeom>
+          <a:noFill/>
+          <a:ln/>
+        </p:spPr>
+        <p:txBody>
+          <a:bodyPr wrap="square" lIns="0" tIns="0" rIns="0" bIns="0" rtlCol="0" anchor="ctr"/>
+          <a:lstStyle/>
+          <a:p>
+            <a:pPr marL="0" indent="0" algn="l">
+              <a:buNone/>
+            </a:pPr>
+            <a:r>
+              <a:rPr lang="en-US" sz="1400" b="1" dirty="0">
+                <a:solidFill>
+                  <a:srgbClr val="FFFFFF"/>
+                </a:solidFill>
+                <a:latin typeface="Calibri" pitchFamily="34" charset="0"/>
+                <a:ea typeface="Calibri" pitchFamily="34" charset="-122"/>
+                <a:cs typeface="Calibri" pitchFamily="34" charset="-120"/>
+              </a:rPr>
+              <a:t>Validated Objects</a:t>
+            </a:r>
+            <a:endParaRPr lang="en-US" sz="1400" dirty="0"/>
+          </a:p>
+        </p:txBody>
+      </p:sp>
+      <p:sp>
+        <p:nvSpPr>
+          <p:cNvPr id="10" name="Text 8"/>
+          <p:cNvSpPr/>
+          <p:nvPr/>
+        </p:nvSpPr>
+        <p:spPr>
+          <a:xfrm>
+            <a:off x="457200" y="2057400"/>
+            <a:ext cx="4206240" cy="228600"/>
+          </a:xfrm>
+          <a:prstGeom prst="rect">
+            <a:avLst/>
+          </a:prstGeom>
+          <a:noFill/>
+          <a:ln/>
+        </p:spPr>
+        <p:txBody>
+          <a:bodyPr wrap="square" lIns="0" tIns="0" rIns="0" bIns="0" rtlCol="0" anchor="ctr"/>
+          <a:lstStyle/>
+          <a:p>
+            <a:pPr marL="0" indent="0" algn="l">
+              <a:buNone/>
+            </a:pPr>
+            <a:r>
+              <a:rPr lang="en-US" sz="1000" dirty="0">
+                <a:solidFill>
+                  <a:srgbClr val="FFFFFF"/>
+                </a:solidFill>
+                <a:latin typeface="Calibri" pitchFamily="34" charset="0"/>
+                <a:ea typeface="Calibri" pitchFamily="34" charset="-122"/>
+                <a:cs typeface="Calibri" pitchFamily="34" charset="-120"/>
+              </a:rPr>
+              <a:t>Events, EventsPerEntity, Occurrences</a:t>
+            </a:r>
+            <a:endParaRPr lang="en-US" sz="1000" dirty="0"/>
+          </a:p>
+        </p:txBody>
+      </p:sp>
+      <p:sp>
+        <p:nvSpPr>
+          <p:cNvPr id="11" name="Shape 9"/>
+          <p:cNvSpPr/>
+          <p:nvPr/>
+        </p:nvSpPr>
+        <p:spPr>
+          <a:xfrm>
+            <a:off x="2377440" y="2350008"/>
+            <a:ext cx="54864" cy="155448"/>
+          </a:xfrm>
+          <a:prstGeom prst="rect">
+            <a:avLst/>
+          </a:prstGeom>
+          <a:solidFill>
+            <a:srgbClr val="8A9BB0"/>
+          </a:solidFill>
+          <a:ln/>
+        </p:spPr>
+        <p:txBody>
+          <a:bodyPr/>
+          <a:lstStyle/>
+          <a:p>
+            <a:endParaRPr lang="en-US"/>
+          </a:p>
+        </p:txBody>
+      </p:sp>
+      <p:sp>
+        <p:nvSpPr>
+          <p:cNvPr id="12" name="Shape 10"/>
+          <p:cNvSpPr/>
+          <p:nvPr/>
+        </p:nvSpPr>
+        <p:spPr>
+          <a:xfrm>
+            <a:off x="365760" y="2505456"/>
+            <a:ext cx="4389120" cy="594360"/>
+          </a:xfrm>
+          <a:prstGeom prst="rect">
+            <a:avLst/>
+          </a:prstGeom>
+          <a:solidFill>
+            <a:srgbClr val="1C7293"/>
+          </a:solidFill>
+          <a:ln/>
+        </p:spPr>
+        <p:txBody>
+          <a:bodyPr/>
+          <a:lstStyle/>
+          <a:p>
+            <a:endParaRPr lang="en-US"/>
+          </a:p>
+        </p:txBody>
+      </p:sp>
+      <p:sp>
+        <p:nvSpPr>
+          <p:cNvPr id="13" name="Text 11"/>
+          <p:cNvSpPr/>
+          <p:nvPr/>
+        </p:nvSpPr>
+        <p:spPr>
+          <a:xfrm>
+            <a:off x="457200" y="2542032"/>
+            <a:ext cx="4206240" cy="256032"/>
+          </a:xfrm>
+          <a:prstGeom prst="rect">
+            <a:avLst/>
+          </a:prstGeom>
+          <a:noFill/>
+          <a:ln/>
+        </p:spPr>
+        <p:txBody>
+          <a:bodyPr wrap="square" lIns="0" tIns="0" rIns="0" bIns="0" rtlCol="0" anchor="ctr"/>
+          <a:lstStyle/>
+          <a:p>
+            <a:pPr marL="0" indent="0" algn="l">
+              <a:buNone/>
+            </a:pPr>
+            <a:r>
+              <a:rPr lang="en-US" sz="1400" b="1" dirty="0">
+                <a:solidFill>
+                  <a:srgbClr val="FFFFFF"/>
+                </a:solidFill>
+                <a:latin typeface="Calibri" pitchFamily="34" charset="0"/>
+                <a:ea typeface="Calibri" pitchFamily="34" charset="-122"/>
+                <a:cs typeface="Calibri" pitchFamily="34" charset="-120"/>
+              </a:rPr>
+              <a:t>Analyzers</a:t>
+            </a:r>
+            <a:endParaRPr lang="en-US" sz="1400" dirty="0"/>
+          </a:p>
+        </p:txBody>
+      </p:sp>
+      <p:sp>
+        <p:nvSpPr>
+          <p:cNvPr id="14" name="Text 12"/>
+          <p:cNvSpPr/>
+          <p:nvPr/>
+        </p:nvSpPr>
+        <p:spPr>
+          <a:xfrm>
+            <a:off x="457200" y="2807208"/>
+            <a:ext cx="4206240" cy="228600"/>
+          </a:xfrm>
+          <a:prstGeom prst="rect">
+            <a:avLst/>
+          </a:prstGeom>
+          <a:noFill/>
+          <a:ln/>
+        </p:spPr>
+        <p:txBody>
+          <a:bodyPr wrap="square" lIns="0" tIns="0" rIns="0" bIns="0" rtlCol="0" anchor="ctr"/>
+          <a:lstStyle/>
+          <a:p>
+            <a:pPr marL="0" indent="0" algn="l">
+              <a:buNone/>
+            </a:pPr>
+            <a:r>
+              <a:rPr lang="en-US" sz="1000" dirty="0">
+                <a:solidFill>
+                  <a:srgbClr val="FFFFFF"/>
+                </a:solidFill>
+                <a:latin typeface="Calibri" pitchFamily="34" charset="0"/>
+                <a:ea typeface="Calibri" pitchFamily="34" charset="-122"/>
+                <a:cs typeface="Calibri" pitchFamily="34" charset="-120"/>
+              </a:rPr>
+              <a:t>EventsWithinSpansAnalyzer, OccurrencesWithinSpansAnalyzer</a:t>
+            </a:r>
+            <a:endParaRPr lang="en-US" sz="1000" dirty="0"/>
+          </a:p>
+        </p:txBody>
+      </p:sp>
+      <p:sp>
+        <p:nvSpPr>
+          <p:cNvPr id="15" name="Shape 13"/>
+          <p:cNvSpPr/>
+          <p:nvPr/>
+        </p:nvSpPr>
+        <p:spPr>
+          <a:xfrm>
+            <a:off x="2377440" y="3099816"/>
+            <a:ext cx="54864" cy="155448"/>
+          </a:xfrm>
+          <a:prstGeom prst="rect">
+            <a:avLst/>
+          </a:prstGeom>
+          <a:solidFill>
+            <a:srgbClr val="8A9BB0"/>
+          </a:solidFill>
+          <a:ln/>
+        </p:spPr>
+        <p:txBody>
+          <a:bodyPr/>
+          <a:lstStyle/>
+          <a:p>
+            <a:endParaRPr lang="en-US"/>
+          </a:p>
+        </p:txBody>
+      </p:sp>
+      <p:sp>
+        <p:nvSpPr>
+          <p:cNvPr id="16" name="Shape 14"/>
+          <p:cNvSpPr/>
+          <p:nvPr/>
+        </p:nvSpPr>
+        <p:spPr>
+          <a:xfrm>
+            <a:off x="365760" y="3255264"/>
+            <a:ext cx="4389120" cy="594360"/>
+          </a:xfrm>
+          <a:prstGeom prst="rect">
+            <a:avLst/>
+          </a:prstGeom>
+          <a:solidFill>
+            <a:srgbClr val="028090"/>
+          </a:solidFill>
+          <a:ln/>
+        </p:spPr>
+        <p:txBody>
+          <a:bodyPr/>
+          <a:lstStyle/>
+          <a:p>
+            <a:endParaRPr lang="en-US"/>
+          </a:p>
+        </p:txBody>
+      </p:sp>
+      <p:sp>
+        <p:nvSpPr>
+          <p:cNvPr id="17" name="Text 15"/>
+          <p:cNvSpPr/>
+          <p:nvPr/>
+        </p:nvSpPr>
+        <p:spPr>
+          <a:xfrm>
+            <a:off x="457200" y="3291840"/>
+            <a:ext cx="4206240" cy="256032"/>
+          </a:xfrm>
+          <a:prstGeom prst="rect">
+            <a:avLst/>
+          </a:prstGeom>
+          <a:noFill/>
+          <a:ln/>
+        </p:spPr>
+        <p:txBody>
+          <a:bodyPr wrap="square" lIns="0" tIns="0" rIns="0" bIns="0" rtlCol="0" anchor="ctr"/>
+          <a:lstStyle/>
+          <a:p>
+            <a:pPr marL="0" indent="0" algn="l">
+              <a:buNone/>
+            </a:pPr>
+            <a:r>
+              <a:rPr lang="en-US" sz="1400" b="1" dirty="0">
+                <a:solidFill>
+                  <a:srgbClr val="FFFFFF"/>
+                </a:solidFill>
+                <a:latin typeface="Calibri" pitchFamily="34" charset="0"/>
+                <a:ea typeface="Calibri" pitchFamily="34" charset="-122"/>
+                <a:cs typeface="Calibri" pitchFamily="34" charset="-120"/>
+              </a:rPr>
+              <a:t>Intermediates</a:t>
+            </a:r>
+            <a:endParaRPr lang="en-US" sz="1400" dirty="0"/>
+          </a:p>
+        </p:txBody>
+      </p:sp>
+      <p:sp>
+        <p:nvSpPr>
+          <p:cNvPr id="18" name="Text 16"/>
+          <p:cNvSpPr/>
+          <p:nvPr/>
+        </p:nvSpPr>
+        <p:spPr>
+          <a:xfrm>
+            <a:off x="457200" y="3557016"/>
+            <a:ext cx="4206240" cy="228600"/>
+          </a:xfrm>
+          <a:prstGeom prst="rect">
+            <a:avLst/>
+          </a:prstGeom>
+          <a:noFill/>
+          <a:ln/>
+        </p:spPr>
+        <p:txBody>
+          <a:bodyPr wrap="square" lIns="0" tIns="0" rIns="0" bIns="0" rtlCol="0" anchor="ctr"/>
+          <a:lstStyle/>
+          <a:p>
+            <a:pPr marL="0" indent="0" algn="l">
+              <a:buNone/>
+            </a:pPr>
+            <a:r>
+              <a:rPr lang="en-US" sz="1000" dirty="0">
+                <a:solidFill>
+                  <a:srgbClr val="FFFFFF"/>
+                </a:solidFill>
+                <a:latin typeface="Calibri" pitchFamily="34" charset="0"/>
+                <a:ea typeface="Calibri" pitchFamily="34" charset="-122"/>
+                <a:cs typeface="Calibri" pitchFamily="34" charset="-120"/>
+              </a:rPr>
+              <a:t>PipeDelimitedIntermediateEvents + Occurrences</a:t>
+            </a:r>
+            <a:endParaRPr lang="en-US" sz="1000" dirty="0"/>
+          </a:p>
+        </p:txBody>
+      </p:sp>
+      <p:sp>
+        <p:nvSpPr>
+          <p:cNvPr id="19" name="Shape 17"/>
+          <p:cNvSpPr/>
+          <p:nvPr/>
+        </p:nvSpPr>
+        <p:spPr>
+          <a:xfrm>
+            <a:off x="2377440" y="3849624"/>
+            <a:ext cx="54864" cy="155448"/>
+          </a:xfrm>
+          <a:prstGeom prst="rect">
+            <a:avLst/>
+          </a:prstGeom>
+          <a:solidFill>
+            <a:srgbClr val="8A9BB0"/>
+          </a:solidFill>
+          <a:ln/>
+        </p:spPr>
+        <p:txBody>
+          <a:bodyPr/>
+          <a:lstStyle/>
+          <a:p>
+            <a:endParaRPr lang="en-US"/>
+          </a:p>
+        </p:txBody>
+      </p:sp>
+      <p:sp>
+        <p:nvSpPr>
+          <p:cNvPr id="20" name="Shape 18"/>
+          <p:cNvSpPr/>
+          <p:nvPr/>
+        </p:nvSpPr>
+        <p:spPr>
+          <a:xfrm>
+            <a:off x="365760" y="4005072"/>
+            <a:ext cx="4389120" cy="594360"/>
+          </a:xfrm>
+          <a:prstGeom prst="rect">
+            <a:avLst/>
+          </a:prstGeom>
+          <a:solidFill>
+            <a:srgbClr val="02C39A"/>
+          </a:solidFill>
+          <a:ln/>
+        </p:spPr>
+        <p:txBody>
+          <a:bodyPr/>
+          <a:lstStyle/>
+          <a:p>
+            <a:endParaRPr lang="en-US"/>
+          </a:p>
+        </p:txBody>
+      </p:sp>
+      <p:sp>
+        <p:nvSpPr>
+          <p:cNvPr id="21" name="Text 19"/>
+          <p:cNvSpPr/>
+          <p:nvPr/>
+        </p:nvSpPr>
+        <p:spPr>
+          <a:xfrm>
+            <a:off x="457200" y="4041648"/>
+            <a:ext cx="4206240" cy="256032"/>
+          </a:xfrm>
+          <a:prstGeom prst="rect">
+            <a:avLst/>
+          </a:prstGeom>
+          <a:noFill/>
+          <a:ln/>
+        </p:spPr>
+        <p:txBody>
+          <a:bodyPr wrap="square" lIns="0" tIns="0" rIns="0" bIns="0" rtlCol="0" anchor="ctr"/>
+          <a:lstStyle/>
+          <a:p>
+            <a:pPr marL="0" indent="0" algn="l">
+              <a:buNone/>
+            </a:pPr>
+            <a:r>
+              <a:rPr lang="en-US" sz="1400" b="1" dirty="0">
+                <a:solidFill>
+                  <a:srgbClr val="FFFFFF"/>
+                </a:solidFill>
+                <a:latin typeface="Calibri" pitchFamily="34" charset="0"/>
+                <a:ea typeface="Calibri" pitchFamily="34" charset="-122"/>
+                <a:cs typeface="Calibri" pitchFamily="34" charset="-120"/>
+              </a:rPr>
+              <a:t>Visualizers</a:t>
+            </a:r>
+            <a:endParaRPr lang="en-US" sz="1400" dirty="0"/>
+          </a:p>
+        </p:txBody>
+      </p:sp>
+      <p:sp>
+        <p:nvSpPr>
+          <p:cNvPr id="22" name="Text 20"/>
+          <p:cNvSpPr/>
+          <p:nvPr/>
+        </p:nvSpPr>
+        <p:spPr>
+          <a:xfrm>
+            <a:off x="457200" y="4306824"/>
+            <a:ext cx="4206240" cy="228600"/>
+          </a:xfrm>
+          <a:prstGeom prst="rect">
+            <a:avLst/>
+          </a:prstGeom>
+          <a:noFill/>
+          <a:ln/>
+        </p:spPr>
+        <p:txBody>
+          <a:bodyPr wrap="square" lIns="0" tIns="0" rIns="0" bIns="0" rtlCol="0" anchor="ctr"/>
+          <a:lstStyle/>
+          <a:p>
+            <a:pPr marL="0" indent="0" algn="l">
+              <a:buNone/>
+            </a:pPr>
+            <a:r>
+              <a:rPr lang="en-US" sz="1000" dirty="0">
+                <a:solidFill>
+                  <a:srgbClr val="FFFFFF"/>
+                </a:solidFill>
+                <a:latin typeface="Calibri" pitchFamily="34" charset="0"/>
+                <a:ea typeface="Calibri" pitchFamily="34" charset="-122"/>
+                <a:cs typeface="Calibri" pitchFamily="34" charset="-120"/>
+              </a:rPr>
+              <a:t>StackedEventsPlotter, ActivityOverTimePlotter</a:t>
+            </a:r>
+            <a:endParaRPr lang="en-US" sz="1000" dirty="0"/>
+          </a:p>
+        </p:txBody>
+      </p:sp>
+      <p:sp>
+        <p:nvSpPr>
+          <p:cNvPr id="23" name="Shape 21"/>
+          <p:cNvSpPr/>
+          <p:nvPr/>
+        </p:nvSpPr>
+        <p:spPr>
+          <a:xfrm>
+            <a:off x="5120640" y="1005840"/>
+            <a:ext cx="3657600" cy="594360"/>
+          </a:xfrm>
+          <a:prstGeom prst="rect">
+            <a:avLst/>
+          </a:prstGeom>
+          <a:solidFill>
+            <a:srgbClr val="FFFFFF"/>
+          </a:solidFill>
+          <a:ln w="19050">
+            <a:solidFill>
+              <a:srgbClr val="E8EFF5"/>
+            </a:solidFill>
+            <a:prstDash val="solid"/>
+          </a:ln>
+        </p:spPr>
+        <p:txBody>
+          <a:bodyPr/>
+          <a:lstStyle/>
+          <a:p>
+            <a:endParaRPr lang="en-US"/>
+          </a:p>
+        </p:txBody>
+      </p:sp>
+      <p:sp>
+        <p:nvSpPr>
+          <p:cNvPr id="24" name="Text 22"/>
+          <p:cNvSpPr/>
+          <p:nvPr/>
+        </p:nvSpPr>
+        <p:spPr>
+          <a:xfrm>
+            <a:off x="5212080" y="1051560"/>
+            <a:ext cx="3474720" cy="256032"/>
+          </a:xfrm>
+          <a:prstGeom prst="rect">
+            <a:avLst/>
+          </a:prstGeom>
+          <a:noFill/>
+          <a:ln/>
+        </p:spPr>
+        <p:txBody>
+          <a:bodyPr wrap="square" lIns="0" tIns="0" rIns="0" bIns="0" rtlCol="0" anchor="ctr"/>
+          <a:lstStyle/>
+          <a:p>
+            <a:pPr marL="0" indent="0" algn="l">
+              <a:buNone/>
+            </a:pPr>
+            <a:r>
+              <a:rPr lang="en-US" sz="1200" b="1" i="1" dirty="0">
+                <a:solidFill>
+                  <a:srgbClr val="028090"/>
+                </a:solidFill>
+                <a:latin typeface="Calibri" pitchFamily="34" charset="0"/>
+                <a:ea typeface="Calibri" pitchFamily="34" charset="-122"/>
+                <a:cs typeface="Calibri" pitchFamily="34" charset="-120"/>
+              </a:rPr>
+              <a:t>"I know what columns mean"</a:t>
+            </a:r>
+            <a:endParaRPr lang="en-US" sz="1200" dirty="0"/>
+          </a:p>
+        </p:txBody>
+      </p:sp>
+      <p:sp>
+        <p:nvSpPr>
+          <p:cNvPr id="25" name="Text 23"/>
+          <p:cNvSpPr/>
+          <p:nvPr/>
+        </p:nvSpPr>
+        <p:spPr>
+          <a:xfrm>
+            <a:off x="5212080" y="1307592"/>
+            <a:ext cx="3474720" cy="228600"/>
+          </a:xfrm>
+          <a:prstGeom prst="rect">
+            <a:avLst/>
+          </a:prstGeom>
+          <a:noFill/>
+          <a:ln/>
+        </p:spPr>
+        <p:txBody>
+          <a:bodyPr wrap="square" lIns="0" tIns="0" rIns="0" bIns="0" rtlCol="0" anchor="ctr"/>
+          <a:lstStyle/>
+          <a:p>
+            <a:pPr marL="0" indent="0" algn="l">
+              <a:buNone/>
+            </a:pPr>
+            <a:r>
+              <a:rPr lang="en-US" sz="1100" dirty="0">
+                <a:solidFill>
+                  <a:srgbClr val="1A2E3B"/>
+                </a:solidFill>
+                <a:latin typeface="Calibri" pitchFamily="34" charset="0"/>
+                <a:ea typeface="Calibri" pitchFamily="34" charset="-122"/>
+                <a:cs typeface="Calibri" pitchFamily="34" charset="-120"/>
+              </a:rPr>
+              <a:t>Decouples logic from schema</a:t>
+            </a:r>
+            <a:endParaRPr lang="en-US" sz="1100" dirty="0"/>
+          </a:p>
+        </p:txBody>
+      </p:sp>
+      <p:sp>
+        <p:nvSpPr>
+          <p:cNvPr id="26" name="Shape 24"/>
+          <p:cNvSpPr/>
+          <p:nvPr/>
+        </p:nvSpPr>
+        <p:spPr>
+          <a:xfrm>
+            <a:off x="5120640" y="1755648"/>
+            <a:ext cx="3657600" cy="594360"/>
+          </a:xfrm>
+          <a:prstGeom prst="rect">
+            <a:avLst/>
+          </a:prstGeom>
+          <a:solidFill>
+            <a:srgbClr val="FFFFFF"/>
+          </a:solidFill>
+          <a:ln w="19050">
+            <a:solidFill>
+              <a:srgbClr val="E8EFF5"/>
+            </a:solidFill>
+            <a:prstDash val="solid"/>
+          </a:ln>
+        </p:spPr>
+        <p:txBody>
+          <a:bodyPr/>
+          <a:lstStyle/>
+          <a:p>
+            <a:endParaRPr lang="en-US"/>
+          </a:p>
+        </p:txBody>
+      </p:sp>
+      <p:sp>
+        <p:nvSpPr>
+          <p:cNvPr id="27" name="Text 25"/>
+          <p:cNvSpPr/>
+          <p:nvPr/>
+        </p:nvSpPr>
+        <p:spPr>
+          <a:xfrm>
+            <a:off x="5212080" y="1801368"/>
+            <a:ext cx="3474720" cy="256032"/>
+          </a:xfrm>
+          <a:prstGeom prst="rect">
+            <a:avLst/>
+          </a:prstGeom>
+          <a:noFill/>
+          <a:ln/>
+        </p:spPr>
+        <p:txBody>
+          <a:bodyPr wrap="square" lIns="0" tIns="0" rIns="0" bIns="0" rtlCol="0" anchor="ctr"/>
+          <a:lstStyle/>
+          <a:p>
+            <a:pPr marL="0" indent="0" algn="l">
+              <a:buNone/>
+            </a:pPr>
+            <a:r>
+              <a:rPr lang="en-US" sz="1200" b="1" i="1" dirty="0">
+                <a:solidFill>
+                  <a:srgbClr val="028090"/>
+                </a:solidFill>
+                <a:latin typeface="Calibri" pitchFamily="34" charset="0"/>
+                <a:ea typeface="Calibri" pitchFamily="34" charset="-122"/>
+                <a:cs typeface="Calibri" pitchFamily="34" charset="-120"/>
+              </a:rPr>
+              <a:t>"My data is validated"</a:t>
+            </a:r>
+            <a:endParaRPr lang="en-US" sz="1200" dirty="0"/>
+          </a:p>
+        </p:txBody>
+      </p:sp>
+      <p:sp>
+        <p:nvSpPr>
+          <p:cNvPr id="28" name="Text 26"/>
+          <p:cNvSpPr/>
+          <p:nvPr/>
+        </p:nvSpPr>
+        <p:spPr>
+          <a:xfrm>
+            <a:off x="5212080" y="2057400"/>
+            <a:ext cx="3474720" cy="228600"/>
+          </a:xfrm>
+          <a:prstGeom prst="rect">
+            <a:avLst/>
+          </a:prstGeom>
+          <a:noFill/>
+          <a:ln/>
+        </p:spPr>
+        <p:txBody>
+          <a:bodyPr wrap="square" lIns="0" tIns="0" rIns="0" bIns="0" rtlCol="0" anchor="ctr"/>
+          <a:lstStyle/>
+          <a:p>
+            <a:pPr marL="0" indent="0" algn="l">
+              <a:buNone/>
+            </a:pPr>
+            <a:r>
+              <a:rPr lang="en-US" sz="1100" dirty="0">
+                <a:solidFill>
+                  <a:srgbClr val="1A2E3B"/>
+                </a:solidFill>
+                <a:latin typeface="Calibri" pitchFamily="34" charset="0"/>
+                <a:ea typeface="Calibri" pitchFamily="34" charset="-122"/>
+                <a:cs typeface="Calibri" pitchFamily="34" charset="-120"/>
+              </a:rPr>
+              <a:t>Triage, rejected rows, audit trail</a:t>
+            </a:r>
+            <a:endParaRPr lang="en-US" sz="1100" dirty="0"/>
+          </a:p>
+        </p:txBody>
+      </p:sp>
+      <p:sp>
+        <p:nvSpPr>
+          <p:cNvPr id="29" name="Shape 27"/>
+          <p:cNvSpPr/>
+          <p:nvPr/>
+        </p:nvSpPr>
+        <p:spPr>
+          <a:xfrm>
+            <a:off x="5120640" y="2505456"/>
+            <a:ext cx="3657600" cy="594360"/>
+          </a:xfrm>
+          <a:prstGeom prst="rect">
+            <a:avLst/>
+          </a:prstGeom>
+          <a:solidFill>
+            <a:srgbClr val="FFFFFF"/>
+          </a:solidFill>
+          <a:ln w="19050">
+            <a:solidFill>
+              <a:srgbClr val="E8EFF5"/>
+            </a:solidFill>
+            <a:prstDash val="solid"/>
+          </a:ln>
+        </p:spPr>
+        <p:txBody>
+          <a:bodyPr/>
+          <a:lstStyle/>
+          <a:p>
+            <a:endParaRPr lang="en-US"/>
+          </a:p>
+        </p:txBody>
+      </p:sp>
+      <p:sp>
+        <p:nvSpPr>
+          <p:cNvPr id="30" name="Text 28"/>
+          <p:cNvSpPr/>
+          <p:nvPr/>
+        </p:nvSpPr>
+        <p:spPr>
+          <a:xfrm>
+            <a:off x="5212080" y="2551176"/>
+            <a:ext cx="3474720" cy="256032"/>
+          </a:xfrm>
+          <a:prstGeom prst="rect">
+            <a:avLst/>
+          </a:prstGeom>
+          <a:noFill/>
+          <a:ln/>
+        </p:spPr>
+        <p:txBody>
+          <a:bodyPr wrap="square" lIns="0" tIns="0" rIns="0" bIns="0" rtlCol="0" anchor="ctr"/>
+          <a:lstStyle/>
+          <a:p>
+            <a:pPr marL="0" indent="0" algn="l">
+              <a:buNone/>
+            </a:pPr>
+            <a:r>
+              <a:rPr lang="en-US" sz="1200" b="1" i="1" dirty="0">
+                <a:solidFill>
+                  <a:srgbClr val="028090"/>
+                </a:solidFill>
+                <a:latin typeface="Calibri" pitchFamily="34" charset="0"/>
+                <a:ea typeface="Calibri" pitchFamily="34" charset="-122"/>
+                <a:cs typeface="Calibri" pitchFamily="34" charset="-120"/>
+              </a:rPr>
+              <a:t>"I compute the analysis"</a:t>
+            </a:r>
+            <a:endParaRPr lang="en-US" sz="1200" dirty="0"/>
+          </a:p>
+        </p:txBody>
+      </p:sp>
+      <p:sp>
+        <p:nvSpPr>
+          <p:cNvPr id="31" name="Text 29"/>
+          <p:cNvSpPr/>
+          <p:nvPr/>
+        </p:nvSpPr>
+        <p:spPr>
+          <a:xfrm>
+            <a:off x="5212080" y="2807208"/>
+            <a:ext cx="3474720" cy="228600"/>
+          </a:xfrm>
+          <a:prstGeom prst="rect">
+            <a:avLst/>
+          </a:prstGeom>
+          <a:noFill/>
+          <a:ln/>
+        </p:spPr>
+        <p:txBody>
+          <a:bodyPr wrap="square" lIns="0" tIns="0" rIns="0" bIns="0" rtlCol="0" anchor="ctr"/>
+          <a:lstStyle/>
+          <a:p>
+            <a:pPr marL="0" indent="0" algn="l">
+              <a:buNone/>
+            </a:pPr>
+            <a:r>
+              <a:rPr lang="en-US" sz="1100" dirty="0">
+                <a:solidFill>
+                  <a:srgbClr val="1A2E3B"/>
+                </a:solidFill>
+                <a:latin typeface="Calibri" pitchFamily="34" charset="0"/>
+                <a:ea typeface="Calibri" pitchFamily="34" charset="-122"/>
+                <a:cs typeface="Calibri" pitchFamily="34" charset="-120"/>
+              </a:rPr>
+              <a:t>Single responsibility per analyzer</a:t>
+            </a:r>
+            <a:endParaRPr lang="en-US" sz="1100" dirty="0"/>
+          </a:p>
+        </p:txBody>
+      </p:sp>
+      <p:sp>
+        <p:nvSpPr>
+          <p:cNvPr id="32" name="Shape 30"/>
+          <p:cNvSpPr/>
+          <p:nvPr/>
+        </p:nvSpPr>
+        <p:spPr>
+          <a:xfrm>
+            <a:off x="5120640" y="3255264"/>
+            <a:ext cx="3657600" cy="594360"/>
+          </a:xfrm>
+          <a:prstGeom prst="rect">
+            <a:avLst/>
+          </a:prstGeom>
+          <a:solidFill>
+            <a:srgbClr val="FFFFFF"/>
+          </a:solidFill>
+          <a:ln w="19050">
+            <a:solidFill>
+              <a:srgbClr val="E8EFF5"/>
+            </a:solidFill>
+            <a:prstDash val="solid"/>
+          </a:ln>
+        </p:spPr>
+        <p:txBody>
+          <a:bodyPr/>
+          <a:lstStyle/>
+          <a:p>
+            <a:endParaRPr lang="en-US"/>
+          </a:p>
+        </p:txBody>
+      </p:sp>
+      <p:sp>
+        <p:nvSpPr>
+          <p:cNvPr id="33" name="Text 31"/>
+          <p:cNvSpPr/>
+          <p:nvPr/>
+        </p:nvSpPr>
+        <p:spPr>
+          <a:xfrm>
+            <a:off x="5212080" y="3300984"/>
+            <a:ext cx="3474720" cy="256032"/>
+          </a:xfrm>
+          <a:prstGeom prst="rect">
+            <a:avLst/>
+          </a:prstGeom>
+          <a:noFill/>
+          <a:ln/>
+        </p:spPr>
+        <p:txBody>
+          <a:bodyPr wrap="square" lIns="0" tIns="0" rIns="0" bIns="0" rtlCol="0" anchor="ctr"/>
+          <a:lstStyle/>
+          <a:p>
+            <a:pPr marL="0" indent="0" algn="l">
+              <a:buNone/>
+            </a:pPr>
+            <a:r>
+              <a:rPr lang="en-US" sz="1200" b="1" i="1" dirty="0">
+                <a:solidFill>
+                  <a:srgbClr val="028090"/>
+                </a:solidFill>
+                <a:latin typeface="Calibri" pitchFamily="34" charset="0"/>
+                <a:ea typeface="Calibri" pitchFamily="34" charset="-122"/>
+                <a:cs typeface="Calibri" pitchFamily="34" charset="-120"/>
+              </a:rPr>
+              <a:t>"I am the handshake"</a:t>
+            </a:r>
+            <a:endParaRPr lang="en-US" sz="1200" dirty="0"/>
+          </a:p>
+        </p:txBody>
+      </p:sp>
+      <p:sp>
+        <p:nvSpPr>
+          <p:cNvPr id="34" name="Text 32"/>
+          <p:cNvSpPr/>
+          <p:nvPr/>
+        </p:nvSpPr>
+        <p:spPr>
+          <a:xfrm>
+            <a:off x="5212080" y="3557016"/>
+            <a:ext cx="3474720" cy="228600"/>
+          </a:xfrm>
+          <a:prstGeom prst="rect">
+            <a:avLst/>
+          </a:prstGeom>
+          <a:noFill/>
+          <a:ln/>
+        </p:spPr>
+        <p:txBody>
+          <a:bodyPr wrap="square" lIns="0" tIns="0" rIns="0" bIns="0" rtlCol="0" anchor="ctr"/>
+          <a:lstStyle/>
+          <a:p>
+            <a:pPr marL="0" indent="0" algn="l">
+              <a:buNone/>
+            </a:pPr>
+            <a:r>
+              <a:rPr lang="en-US" sz="1100" dirty="0">
+                <a:solidFill>
+                  <a:srgbClr val="1A2E3B"/>
+                </a:solidFill>
+                <a:latin typeface="Calibri" pitchFamily="34" charset="0"/>
+                <a:ea typeface="Calibri" pitchFamily="34" charset="-122"/>
+                <a:cs typeface="Calibri" pitchFamily="34" charset="-120"/>
+              </a:rPr>
+              <a:t>Pipe-delimited columnar contract</a:t>
+            </a:r>
+            <a:endParaRPr lang="en-US" sz="1100" dirty="0"/>
+          </a:p>
+        </p:txBody>
+      </p:sp>
+      <p:sp>
+        <p:nvSpPr>
+          <p:cNvPr id="35" name="Shape 33"/>
+          <p:cNvSpPr/>
+          <p:nvPr/>
+        </p:nvSpPr>
+        <p:spPr>
+          <a:xfrm>
+            <a:off x="5120640" y="4005072"/>
+            <a:ext cx="3657600" cy="594360"/>
+          </a:xfrm>
+          <a:prstGeom prst="rect">
+            <a:avLst/>
+          </a:prstGeom>
+          <a:solidFill>
+            <a:srgbClr val="FFFFFF"/>
+          </a:solidFill>
+          <a:ln w="19050">
+            <a:solidFill>
+              <a:srgbClr val="E8EFF5"/>
+            </a:solidFill>
+            <a:prstDash val="solid"/>
+          </a:ln>
+        </p:spPr>
+        <p:txBody>
+          <a:bodyPr/>
+          <a:lstStyle/>
+          <a:p>
+            <a:endParaRPr lang="en-US"/>
+          </a:p>
+        </p:txBody>
+      </p:sp>
+      <p:sp>
+        <p:nvSpPr>
+          <p:cNvPr id="36" name="Text 34"/>
+          <p:cNvSpPr/>
+          <p:nvPr/>
+        </p:nvSpPr>
+        <p:spPr>
+          <a:xfrm>
+            <a:off x="5212080" y="4050792"/>
+            <a:ext cx="3474720" cy="256032"/>
+          </a:xfrm>
+          <a:prstGeom prst="rect">
+            <a:avLst/>
+          </a:prstGeom>
+          <a:noFill/>
+          <a:ln/>
+        </p:spPr>
+        <p:txBody>
+          <a:bodyPr wrap="square" lIns="0" tIns="0" rIns="0" bIns="0" rtlCol="0" anchor="ctr"/>
+          <a:lstStyle/>
+          <a:p>
+            <a:pPr marL="0" indent="0" algn="l">
+              <a:buNone/>
+            </a:pPr>
+            <a:r>
+              <a:rPr lang="en-US" sz="1200" b="1" i="1" dirty="0">
+                <a:solidFill>
+                  <a:srgbClr val="028090"/>
+                </a:solidFill>
+                <a:latin typeface="Calibri" pitchFamily="34" charset="0"/>
+                <a:ea typeface="Calibri" pitchFamily="34" charset="-122"/>
+                <a:cs typeface="Calibri" pitchFamily="34" charset="-120"/>
+              </a:rPr>
+              <a:t>"I know how to draw"</a:t>
+            </a:r>
+            <a:endParaRPr lang="en-US" sz="1200" dirty="0"/>
+          </a:p>
+        </p:txBody>
+      </p:sp>
+      <p:sp>
+        <p:nvSpPr>
+          <p:cNvPr id="37" name="Text 35"/>
+          <p:cNvSpPr/>
+          <p:nvPr/>
+        </p:nvSpPr>
+        <p:spPr>
+          <a:xfrm>
+            <a:off x="5212080" y="4306824"/>
+            <a:ext cx="3474720" cy="228600"/>
+          </a:xfrm>
+          <a:prstGeom prst="rect">
+            <a:avLst/>
+          </a:prstGeom>
+          <a:noFill/>
+          <a:ln/>
+        </p:spPr>
+        <p:txBody>
+          <a:bodyPr wrap="square" lIns="0" tIns="0" rIns="0" bIns="0" rtlCol="0" anchor="ctr"/>
+          <a:lstStyle/>
+          <a:p>
+            <a:pPr marL="0" indent="0" algn="l">
+              <a:buNone/>
+            </a:pPr>
+            <a:r>
+              <a:rPr lang="en-US" sz="1100" dirty="0">
+                <a:solidFill>
+                  <a:srgbClr val="1A2E3B"/>
+                </a:solidFill>
+                <a:latin typeface="Calibri" pitchFamily="34" charset="0"/>
+                <a:ea typeface="Calibri" pitchFamily="34" charset="-122"/>
+                <a:cs typeface="Calibri" pitchFamily="34" charset="-120"/>
+              </a:rPr>
+              <a:t>Pure renderers, no data transforms</a:t>
+            </a:r>
+            <a:endParaRPr lang="en-US" sz="1100" dirty="0"/>
+          </a:p>
+        </p:txBody>
+      </p:sp>
+      <p:sp>
+        <p:nvSpPr>
+          <p:cNvPr id="38" name="Shape 36"/>
+          <p:cNvSpPr/>
+          <p:nvPr/>
+        </p:nvSpPr>
+        <p:spPr>
+          <a:xfrm>
+            <a:off x="4754880" y="1005840"/>
+            <a:ext cx="365760" cy="0"/>
+          </a:xfrm>
+          <a:prstGeom prst="line">
+            <a:avLst/>
+          </a:prstGeom>
+          <a:noFill/>
+          <a:ln w="12700">
+            <a:solidFill>
+              <a:srgbClr val="E8EFF5"/>
+            </a:solidFill>
+            <a:prstDash val="dash"/>
+          </a:ln>
+        </p:spPr>
+        <p:txBody>
+          <a:bodyPr/>
+          <a:lstStyle/>
+          <a:p>
+            <a:endParaRPr lang="en-US"/>
+          </a:p>
+        </p:txBody>
+      </p:sp>
+    </p:spTree>
+  </p:cSld>
+  <p:clrMapOvr>
+    <a:masterClrMapping/>
+  </p:clrMapOvr>
+</p:sld>
+</file>
+
+<file path=ppt/slides/slide41.xml><?xml version="1.0" encoding="utf-8"?>
+<p:sld xmlns:a="http://schemas.openxmlformats.org/drawingml/2006/main" xmlns:r="http://schemas.openxmlformats.org/officeDocument/2006/relationships" xmlns:p="http://schemas.openxmlformats.org/presentationml/2006/main">
+  <p:cSld name="Slide 4">
+    <p:bg>
+      <p:bgPr>
+        <a:solidFill>
+          <a:srgbClr val="F4F8FB"/>
+        </a:solidFill>
+        <a:effectLst/>
+      </p:bgPr>
+    </p:bg>
+    <p:spTree>
+      <p:nvGrpSpPr>
+        <p:cNvPr id="1" name=""/>
+        <p:cNvGrpSpPr/>
+        <p:nvPr/>
+      </p:nvGrpSpPr>
+      <p:grpSpPr>
+        <a:xfrm>
+          <a:off x="0" y="0"/>
+          <a:ext cx="0" cy="0"/>
+          <a:chOff x="0" y="0"/>
+          <a:chExt cx="0" cy="0"/>
+        </a:xfrm>
+      </p:grpSpPr>
+      <p:sp>
+        <p:nvSpPr>
+          <p:cNvPr id="2" name="Text 0"/>
+          <p:cNvSpPr/>
+          <p:nvPr/>
+        </p:nvSpPr>
+        <p:spPr>
+          <a:xfrm>
+            <a:off x="457200" y="228600"/>
+            <a:ext cx="8229600" cy="640080"/>
+          </a:xfrm>
+          <a:prstGeom prst="rect">
+            <a:avLst/>
+          </a:prstGeom>
+          <a:noFill/>
+          <a:ln/>
+        </p:spPr>
+        <p:txBody>
+          <a:bodyPr wrap="square" lIns="0" tIns="0" rIns="0" bIns="0" rtlCol="0" anchor="ctr"/>
+          <a:lstStyle/>
+          <a:p>
+            <a:pPr marL="0" indent="0" algn="l">
+              <a:buNone/>
+            </a:pPr>
+            <a:r>
+              <a:rPr lang="en-US" sz="3200" b="1" dirty="0">
+                <a:solidFill>
+                  <a:srgbClr val="0D2B45"/>
+                </a:solidFill>
+                <a:latin typeface="Calibri" pitchFamily="34" charset="0"/>
+                <a:ea typeface="Calibri" pitchFamily="34" charset="-122"/>
+                <a:cs typeface="Calibri" pitchFamily="34" charset="-120"/>
+              </a:rPr>
+              <a:t>Object Hierarchy</a:t>
+            </a:r>
+            <a:endParaRPr lang="en-US" sz="3200" dirty="0"/>
+          </a:p>
+        </p:txBody>
+      </p:sp>
+      <p:sp>
+        <p:nvSpPr>
+          <p:cNvPr id="3" name="Shape 1"/>
+          <p:cNvSpPr/>
+          <p:nvPr/>
+        </p:nvSpPr>
+        <p:spPr>
+          <a:xfrm>
+            <a:off x="457200" y="886968"/>
+            <a:ext cx="8229600" cy="36576"/>
+          </a:xfrm>
+          <a:prstGeom prst="rect">
+            <a:avLst/>
+          </a:prstGeom>
+          <a:solidFill>
+            <a:srgbClr val="028090"/>
+          </a:solidFill>
+          <a:ln/>
+        </p:spPr>
+        <p:txBody>
+          <a:bodyPr/>
+          <a:lstStyle/>
+          <a:p>
+            <a:endParaRPr lang="en-US"/>
+          </a:p>
+        </p:txBody>
+      </p:sp>
+      <p:sp>
+        <p:nvSpPr>
+          <p:cNvPr id="4" name="Shape 2"/>
+          <p:cNvSpPr/>
+          <p:nvPr/>
+        </p:nvSpPr>
+        <p:spPr>
+          <a:xfrm>
+            <a:off x="365760" y="1143000"/>
+            <a:ext cx="2011680" cy="384048"/>
+          </a:xfrm>
+          <a:prstGeom prst="roundRect">
+            <a:avLst>
+              <a:gd name="adj" fmla="val 19048"/>
+            </a:avLst>
+          </a:prstGeom>
+          <a:solidFill>
+            <a:srgbClr val="0D2B45"/>
+          </a:solidFill>
+          <a:ln/>
+        </p:spPr>
+        <p:txBody>
+          <a:bodyPr/>
+          <a:lstStyle/>
+          <a:p>
+            <a:endParaRPr lang="en-US"/>
+          </a:p>
+        </p:txBody>
+      </p:sp>
+      <p:sp>
+        <p:nvSpPr>
+          <p:cNvPr id="5" name="Text 3"/>
+          <p:cNvSpPr/>
+          <p:nvPr/>
+        </p:nvSpPr>
+        <p:spPr>
+          <a:xfrm>
+            <a:off x="365760" y="1143000"/>
+            <a:ext cx="2011680" cy="384048"/>
+          </a:xfrm>
+          <a:prstGeom prst="rect">
+            <a:avLst/>
+          </a:prstGeom>
+          <a:noFill/>
+          <a:ln/>
+        </p:spPr>
+        <p:txBody>
+          <a:bodyPr wrap="square" lIns="0" tIns="0" rIns="0" bIns="0" rtlCol="0" anchor="ctr"/>
+          <a:lstStyle/>
+          <a:p>
+            <a:pPr marL="0" indent="0" algn="ctr">
+              <a:buNone/>
+            </a:pPr>
+            <a:r>
+              <a:rPr lang="en-US" sz="1100" b="1" dirty="0">
+                <a:solidFill>
+                  <a:srgbClr val="FFFFFF"/>
+                </a:solidFill>
+                <a:latin typeface="Calibri" pitchFamily="34" charset="0"/>
+                <a:ea typeface="Calibri" pitchFamily="34" charset="-122"/>
+                <a:cs typeface="Calibri" pitchFamily="34" charset="-120"/>
+              </a:rPr>
+              <a:t>EventSemantics</a:t>
+            </a:r>
+            <a:endParaRPr lang="en-US" sz="1100" dirty="0"/>
+          </a:p>
+        </p:txBody>
+      </p:sp>
+      <p:sp>
+        <p:nvSpPr>
+          <p:cNvPr id="6" name="Shape 4"/>
+          <p:cNvSpPr/>
+          <p:nvPr/>
+        </p:nvSpPr>
+        <p:spPr>
+          <a:xfrm>
+            <a:off x="2514600" y="1143000"/>
+            <a:ext cx="2286000" cy="384048"/>
+          </a:xfrm>
+          <a:prstGeom prst="roundRect">
+            <a:avLst>
+              <a:gd name="adj" fmla="val 19048"/>
+            </a:avLst>
+          </a:prstGeom>
+          <a:solidFill>
+            <a:srgbClr val="0D2B45"/>
+          </a:solidFill>
+          <a:ln/>
+        </p:spPr>
+        <p:txBody>
+          <a:bodyPr/>
+          <a:lstStyle/>
+          <a:p>
+            <a:endParaRPr lang="en-US"/>
+          </a:p>
+        </p:txBody>
+      </p:sp>
+      <p:sp>
+        <p:nvSpPr>
+          <p:cNvPr id="7" name="Text 5"/>
+          <p:cNvSpPr/>
+          <p:nvPr/>
+        </p:nvSpPr>
+        <p:spPr>
+          <a:xfrm>
+            <a:off x="2514600" y="1143000"/>
+            <a:ext cx="2286000" cy="384048"/>
+          </a:xfrm>
+          <a:prstGeom prst="rect">
+            <a:avLst/>
+          </a:prstGeom>
+          <a:noFill/>
+          <a:ln/>
+        </p:spPr>
+        <p:txBody>
+          <a:bodyPr wrap="square" lIns="0" tIns="0" rIns="0" bIns="0" rtlCol="0" anchor="ctr"/>
+          <a:lstStyle/>
+          <a:p>
+            <a:pPr marL="0" indent="0" algn="ctr">
+              <a:buNone/>
+            </a:pPr>
+            <a:r>
+              <a:rPr lang="en-US" sz="1100" b="1" dirty="0">
+                <a:solidFill>
+                  <a:srgbClr val="FFFFFF"/>
+                </a:solidFill>
+                <a:latin typeface="Calibri" pitchFamily="34" charset="0"/>
+                <a:ea typeface="Calibri" pitchFamily="34" charset="-122"/>
+                <a:cs typeface="Calibri" pitchFamily="34" charset="-120"/>
+              </a:rPr>
+              <a:t>OccurrenceSemantics</a:t>
+            </a:r>
+            <a:endParaRPr lang="en-US" sz="1100" dirty="0"/>
+          </a:p>
+        </p:txBody>
+      </p:sp>
+      <p:sp>
+        <p:nvSpPr>
+          <p:cNvPr id="8" name="Shape 6"/>
+          <p:cNvSpPr/>
+          <p:nvPr/>
+        </p:nvSpPr>
+        <p:spPr>
+          <a:xfrm>
+            <a:off x="1417320" y="1527048"/>
+            <a:ext cx="0" cy="228600"/>
+          </a:xfrm>
+          <a:prstGeom prst="line">
+            <a:avLst/>
+          </a:prstGeom>
+          <a:noFill/>
+          <a:ln w="19050">
+            <a:solidFill>
+              <a:srgbClr val="8A9BB0"/>
+            </a:solidFill>
+            <a:prstDash val="solid"/>
+          </a:ln>
+        </p:spPr>
+        <p:txBody>
+          <a:bodyPr/>
+          <a:lstStyle/>
+          <a:p>
+            <a:endParaRPr lang="en-US"/>
+          </a:p>
+        </p:txBody>
+      </p:sp>
+      <p:sp>
+        <p:nvSpPr>
+          <p:cNvPr id="9" name="Shape 7"/>
+          <p:cNvSpPr/>
+          <p:nvPr/>
+        </p:nvSpPr>
+        <p:spPr>
+          <a:xfrm>
+            <a:off x="3657600" y="1527048"/>
+            <a:ext cx="0" cy="228600"/>
+          </a:xfrm>
+          <a:prstGeom prst="line">
+            <a:avLst/>
+          </a:prstGeom>
+          <a:noFill/>
+          <a:ln w="19050">
+            <a:solidFill>
+              <a:srgbClr val="8A9BB0"/>
+            </a:solidFill>
+            <a:prstDash val="solid"/>
+          </a:ln>
+        </p:spPr>
+        <p:txBody>
+          <a:bodyPr/>
+          <a:lstStyle/>
+          <a:p>
+            <a:endParaRPr lang="en-US"/>
+          </a:p>
+        </p:txBody>
+      </p:sp>
+      <p:sp>
+        <p:nvSpPr>
+          <p:cNvPr id="10" name="Shape 8"/>
+          <p:cNvSpPr/>
+          <p:nvPr/>
+        </p:nvSpPr>
+        <p:spPr>
+          <a:xfrm>
+            <a:off x="365760" y="1783080"/>
+            <a:ext cx="1280160" cy="384048"/>
+          </a:xfrm>
+          <a:prstGeom prst="roundRect">
+            <a:avLst>
+              <a:gd name="adj" fmla="val 19048"/>
+            </a:avLst>
+          </a:prstGeom>
+          <a:solidFill>
+            <a:srgbClr val="028090"/>
+          </a:solidFill>
+          <a:ln/>
+        </p:spPr>
+        <p:txBody>
+          <a:bodyPr/>
+          <a:lstStyle/>
+          <a:p>
+            <a:endParaRPr lang="en-US"/>
+          </a:p>
+        </p:txBody>
+      </p:sp>
+      <p:sp>
+        <p:nvSpPr>
+          <p:cNvPr id="11" name="Text 9"/>
+          <p:cNvSpPr/>
+          <p:nvPr/>
+        </p:nvSpPr>
+        <p:spPr>
+          <a:xfrm>
+            <a:off x="365760" y="1783080"/>
+            <a:ext cx="1280160" cy="384048"/>
+          </a:xfrm>
+          <a:prstGeom prst="rect">
+            <a:avLst/>
+          </a:prstGeom>
+          <a:noFill/>
+          <a:ln/>
+        </p:spPr>
+        <p:txBody>
+          <a:bodyPr wrap="square" lIns="0" tIns="0" rIns="0" bIns="0" rtlCol="0" anchor="ctr"/>
+          <a:lstStyle/>
+          <a:p>
+            <a:pPr marL="0" indent="0" algn="ctr">
+              <a:buNone/>
+            </a:pPr>
+            <a:r>
+              <a:rPr lang="en-US" sz="1100" b="1" dirty="0">
+                <a:solidFill>
+                  <a:srgbClr val="FFFFFF"/>
+                </a:solidFill>
+                <a:latin typeface="Calibri" pitchFamily="34" charset="0"/>
+                <a:ea typeface="Calibri" pitchFamily="34" charset="-122"/>
+                <a:cs typeface="Calibri" pitchFamily="34" charset="-120"/>
+              </a:rPr>
+              <a:t>Events</a:t>
+            </a:r>
+            <a:endParaRPr lang="en-US" sz="1100" dirty="0"/>
+          </a:p>
+        </p:txBody>
+      </p:sp>
+      <p:sp>
+        <p:nvSpPr>
+          <p:cNvPr id="12" name="Shape 10"/>
+          <p:cNvSpPr/>
+          <p:nvPr/>
+        </p:nvSpPr>
+        <p:spPr>
+          <a:xfrm>
+            <a:off x="1783080" y="1783080"/>
+            <a:ext cx="1737360" cy="384048"/>
+          </a:xfrm>
+          <a:prstGeom prst="roundRect">
+            <a:avLst>
+              <a:gd name="adj" fmla="val 19048"/>
+            </a:avLst>
+          </a:prstGeom>
+          <a:solidFill>
+            <a:srgbClr val="00A896"/>
+          </a:solidFill>
+          <a:ln/>
+        </p:spPr>
+        <p:txBody>
+          <a:bodyPr/>
+          <a:lstStyle/>
+          <a:p>
+            <a:endParaRPr lang="en-US"/>
+          </a:p>
+        </p:txBody>
+      </p:sp>
+      <p:sp>
+        <p:nvSpPr>
+          <p:cNvPr id="13" name="Text 11"/>
+          <p:cNvSpPr/>
+          <p:nvPr/>
+        </p:nvSpPr>
+        <p:spPr>
+          <a:xfrm>
+            <a:off x="1783080" y="1783080"/>
+            <a:ext cx="1737360" cy="384048"/>
+          </a:xfrm>
+          <a:prstGeom prst="rect">
+            <a:avLst/>
+          </a:prstGeom>
+          <a:noFill/>
+          <a:ln/>
+        </p:spPr>
+        <p:txBody>
+          <a:bodyPr wrap="square" lIns="0" tIns="0" rIns="0" bIns="0" rtlCol="0" anchor="ctr"/>
+          <a:lstStyle/>
+          <a:p>
+            <a:pPr marL="0" indent="0" algn="ctr">
+              <a:buNone/>
+            </a:pPr>
+            <a:r>
+              <a:rPr lang="en-US" sz="1100" b="1" dirty="0">
+                <a:solidFill>
+                  <a:srgbClr val="FFFFFF"/>
+                </a:solidFill>
+                <a:latin typeface="Calibri" pitchFamily="34" charset="0"/>
+                <a:ea typeface="Calibri" pitchFamily="34" charset="-122"/>
+                <a:cs typeface="Calibri" pitchFamily="34" charset="-120"/>
+              </a:rPr>
+              <a:t>EventsPerEntity</a:t>
+            </a:r>
+            <a:endParaRPr lang="en-US" sz="1100" dirty="0"/>
+          </a:p>
+        </p:txBody>
+      </p:sp>
+      <p:sp>
+        <p:nvSpPr>
+          <p:cNvPr id="14" name="Shape 12"/>
+          <p:cNvSpPr/>
+          <p:nvPr/>
+        </p:nvSpPr>
+        <p:spPr>
+          <a:xfrm>
+            <a:off x="3611880" y="1783080"/>
+            <a:ext cx="1463040" cy="384048"/>
+          </a:xfrm>
+          <a:prstGeom prst="roundRect">
+            <a:avLst>
+              <a:gd name="adj" fmla="val 19048"/>
+            </a:avLst>
+          </a:prstGeom>
+          <a:solidFill>
+            <a:srgbClr val="028090"/>
+          </a:solidFill>
+          <a:ln/>
+        </p:spPr>
+        <p:txBody>
+          <a:bodyPr/>
+          <a:lstStyle/>
+          <a:p>
+            <a:endParaRPr lang="en-US"/>
+          </a:p>
+        </p:txBody>
+      </p:sp>
+      <p:sp>
+        <p:nvSpPr>
+          <p:cNvPr id="15" name="Text 13"/>
+          <p:cNvSpPr/>
+          <p:nvPr/>
+        </p:nvSpPr>
+        <p:spPr>
+          <a:xfrm>
+            <a:off x="3611880" y="1783080"/>
+            <a:ext cx="1463040" cy="384048"/>
+          </a:xfrm>
+          <a:prstGeom prst="rect">
+            <a:avLst/>
+          </a:prstGeom>
+          <a:noFill/>
+          <a:ln/>
+        </p:spPr>
+        <p:txBody>
+          <a:bodyPr wrap="square" lIns="0" tIns="0" rIns="0" bIns="0" rtlCol="0" anchor="ctr"/>
+          <a:lstStyle/>
+          <a:p>
+            <a:pPr marL="0" indent="0" algn="ctr">
+              <a:buNone/>
+            </a:pPr>
+            <a:r>
+              <a:rPr lang="en-US" sz="1100" b="1" dirty="0">
+                <a:solidFill>
+                  <a:srgbClr val="FFFFFF"/>
+                </a:solidFill>
+                <a:latin typeface="Calibri" pitchFamily="34" charset="0"/>
+                <a:ea typeface="Calibri" pitchFamily="34" charset="-122"/>
+                <a:cs typeface="Calibri" pitchFamily="34" charset="-120"/>
+              </a:rPr>
+              <a:t>Occurrences</a:t>
+            </a:r>
+            <a:endParaRPr lang="en-US" sz="1100" dirty="0"/>
+          </a:p>
+        </p:txBody>
+      </p:sp>
+      <p:sp>
+        <p:nvSpPr>
+          <p:cNvPr id="16" name="Shape 14"/>
+          <p:cNvSpPr/>
+          <p:nvPr/>
+        </p:nvSpPr>
+        <p:spPr>
+          <a:xfrm>
+            <a:off x="5166360" y="1783080"/>
+            <a:ext cx="2011680" cy="384048"/>
+          </a:xfrm>
+          <a:prstGeom prst="roundRect">
+            <a:avLst>
+              <a:gd name="adj" fmla="val 19048"/>
+            </a:avLst>
+          </a:prstGeom>
+          <a:solidFill>
+            <a:srgbClr val="00A896"/>
+          </a:solidFill>
+          <a:ln/>
+        </p:spPr>
+        <p:txBody>
+          <a:bodyPr/>
+          <a:lstStyle/>
+          <a:p>
+            <a:endParaRPr lang="en-US"/>
+          </a:p>
+        </p:txBody>
+      </p:sp>
+      <p:sp>
+        <p:nvSpPr>
+          <p:cNvPr id="17" name="Text 15"/>
+          <p:cNvSpPr/>
+          <p:nvPr/>
+        </p:nvSpPr>
+        <p:spPr>
+          <a:xfrm>
+            <a:off x="5166360" y="1783080"/>
+            <a:ext cx="2011680" cy="384048"/>
+          </a:xfrm>
+          <a:prstGeom prst="rect">
+            <a:avLst/>
+          </a:prstGeom>
+          <a:noFill/>
+          <a:ln/>
+        </p:spPr>
+        <p:txBody>
+          <a:bodyPr wrap="square" lIns="0" tIns="0" rIns="0" bIns="0" rtlCol="0" anchor="ctr"/>
+          <a:lstStyle/>
+          <a:p>
+            <a:pPr marL="0" indent="0" algn="ctr">
+              <a:buNone/>
+            </a:pPr>
+            <a:r>
+              <a:rPr lang="en-US" sz="1100" b="1" dirty="0">
+                <a:solidFill>
+                  <a:srgbClr val="FFFFFF"/>
+                </a:solidFill>
+                <a:latin typeface="Calibri" pitchFamily="34" charset="0"/>
+                <a:ea typeface="Calibri" pitchFamily="34" charset="-122"/>
+                <a:cs typeface="Calibri" pitchFamily="34" charset="-120"/>
+              </a:rPr>
+              <a:t>OccurrencesPerEntity</a:t>
+            </a:r>
+            <a:endParaRPr lang="en-US" sz="1100" dirty="0"/>
+          </a:p>
+        </p:txBody>
+      </p:sp>
+      <p:sp>
+        <p:nvSpPr>
+          <p:cNvPr id="18" name="Shape 16"/>
+          <p:cNvSpPr/>
+          <p:nvPr/>
+        </p:nvSpPr>
+        <p:spPr>
+          <a:xfrm>
+            <a:off x="6172200" y="2167128"/>
+            <a:ext cx="0" cy="228600"/>
+          </a:xfrm>
+          <a:prstGeom prst="line">
+            <a:avLst/>
+          </a:prstGeom>
+          <a:noFill/>
+          <a:ln w="19050">
+            <a:solidFill>
+              <a:srgbClr val="02C39A"/>
+            </a:solidFill>
+            <a:prstDash val="dash"/>
+          </a:ln>
+        </p:spPr>
+        <p:txBody>
+          <a:bodyPr/>
+          <a:lstStyle/>
+          <a:p>
+            <a:endParaRPr lang="en-US"/>
+          </a:p>
+        </p:txBody>
+      </p:sp>
+      <p:sp>
+        <p:nvSpPr>
+          <p:cNvPr id="19" name="Text 17"/>
+          <p:cNvSpPr/>
+          <p:nvPr/>
+        </p:nvSpPr>
+        <p:spPr>
+          <a:xfrm>
+            <a:off x="6309360" y="2167128"/>
+            <a:ext cx="1371600" cy="228600"/>
+          </a:xfrm>
+          <a:prstGeom prst="rect">
+            <a:avLst/>
+          </a:prstGeom>
+          <a:noFill/>
+          <a:ln/>
+        </p:spPr>
+        <p:txBody>
+          <a:bodyPr wrap="square" rtlCol="0" anchor="ctr"/>
+          <a:lstStyle/>
+          <a:p>
+            <a:pPr marL="0" indent="0">
+              <a:buNone/>
+            </a:pPr>
+            <a:r>
+              <a:rPr lang="en-US" sz="900" i="1" dirty="0">
+                <a:solidFill>
+                  <a:srgbClr val="02C39A"/>
+                </a:solidFill>
+                <a:latin typeface="Calibri" pitchFamily="34" charset="0"/>
+                <a:ea typeface="Calibri" pitchFamily="34" charset="-122"/>
+                <a:cs typeface="Calibri" pitchFamily="34" charset="-120"/>
+              </a:rPr>
+              <a:t>build_span()</a:t>
+            </a:r>
+            <a:endParaRPr lang="en-US" sz="900" dirty="0"/>
+          </a:p>
+        </p:txBody>
+      </p:sp>
+      <p:sp>
+        <p:nvSpPr>
+          <p:cNvPr id="20" name="Shape 18"/>
+          <p:cNvSpPr/>
+          <p:nvPr/>
+        </p:nvSpPr>
+        <p:spPr>
+          <a:xfrm>
+            <a:off x="1417320" y="2167128"/>
+            <a:ext cx="0" cy="256032"/>
+          </a:xfrm>
+          <a:prstGeom prst="line">
+            <a:avLst/>
+          </a:prstGeom>
+          <a:noFill/>
+          <a:ln w="19050">
+            <a:solidFill>
+              <a:srgbClr val="8A9BB0"/>
+            </a:solidFill>
+            <a:prstDash val="solid"/>
+          </a:ln>
+        </p:spPr>
+        <p:txBody>
+          <a:bodyPr/>
+          <a:lstStyle/>
+          <a:p>
+            <a:endParaRPr lang="en-US"/>
+          </a:p>
+        </p:txBody>
+      </p:sp>
+      <p:sp>
+        <p:nvSpPr>
+          <p:cNvPr id="21" name="Shape 19"/>
+          <p:cNvSpPr/>
+          <p:nvPr/>
+        </p:nvSpPr>
+        <p:spPr>
+          <a:xfrm>
+            <a:off x="4343400" y="2167128"/>
+            <a:ext cx="0" cy="256032"/>
+          </a:xfrm>
+          <a:prstGeom prst="line">
+            <a:avLst/>
+          </a:prstGeom>
+          <a:noFill/>
+          <a:ln w="19050">
+            <a:solidFill>
+              <a:srgbClr val="8A9BB0"/>
+            </a:solidFill>
+            <a:prstDash val="solid"/>
+          </a:ln>
+        </p:spPr>
+        <p:txBody>
+          <a:bodyPr/>
+          <a:lstStyle/>
+          <a:p>
+            <a:endParaRPr lang="en-US"/>
+          </a:p>
+        </p:txBody>
+      </p:sp>
+      <p:sp>
+        <p:nvSpPr>
+          <p:cNvPr id="22" name="Shape 20"/>
+          <p:cNvSpPr/>
+          <p:nvPr/>
+        </p:nvSpPr>
+        <p:spPr>
+          <a:xfrm>
+            <a:off x="365760" y="2450592"/>
+            <a:ext cx="2834640" cy="384048"/>
+          </a:xfrm>
+          <a:prstGeom prst="roundRect">
+            <a:avLst>
+              <a:gd name="adj" fmla="val 19048"/>
+            </a:avLst>
+          </a:prstGeom>
+          <a:solidFill>
+            <a:srgbClr val="1C7293"/>
+          </a:solidFill>
+          <a:ln/>
+        </p:spPr>
+        <p:txBody>
+          <a:bodyPr/>
+          <a:lstStyle/>
+          <a:p>
+            <a:endParaRPr lang="en-US"/>
+          </a:p>
+        </p:txBody>
+      </p:sp>
+      <p:sp>
+        <p:nvSpPr>
+          <p:cNvPr id="23" name="Text 21"/>
+          <p:cNvSpPr/>
+          <p:nvPr/>
+        </p:nvSpPr>
+        <p:spPr>
+          <a:xfrm>
+            <a:off x="365760" y="2450592"/>
+            <a:ext cx="2834640" cy="384048"/>
+          </a:xfrm>
+          <a:prstGeom prst="rect">
+            <a:avLst/>
+          </a:prstGeom>
+          <a:noFill/>
+          <a:ln/>
+        </p:spPr>
+        <p:txBody>
+          <a:bodyPr wrap="square" lIns="0" tIns="0" rIns="0" bIns="0" rtlCol="0" anchor="ctr"/>
+          <a:lstStyle/>
+          <a:p>
+            <a:pPr marL="0" indent="0" algn="ctr">
+              <a:buNone/>
+            </a:pPr>
+            <a:r>
+              <a:rPr lang="en-US" sz="1100" b="1" dirty="0">
+                <a:solidFill>
+                  <a:srgbClr val="FFFFFF"/>
+                </a:solidFill>
+                <a:latin typeface="Calibri" pitchFamily="34" charset="0"/>
+                <a:ea typeface="Calibri" pitchFamily="34" charset="-122"/>
+                <a:cs typeface="Calibri" pitchFamily="34" charset="-120"/>
+              </a:rPr>
+              <a:t>EventsWithinSpansAnalyzer</a:t>
+            </a:r>
+            <a:endParaRPr lang="en-US" sz="1100" dirty="0"/>
+          </a:p>
+        </p:txBody>
+      </p:sp>
+      <p:sp>
+        <p:nvSpPr>
+          <p:cNvPr id="24" name="Shape 22"/>
+          <p:cNvSpPr/>
+          <p:nvPr/>
+        </p:nvSpPr>
+        <p:spPr>
+          <a:xfrm>
+            <a:off x="3337560" y="2450592"/>
+            <a:ext cx="2834640" cy="384048"/>
+          </a:xfrm>
+          <a:prstGeom prst="roundRect">
+            <a:avLst>
+              <a:gd name="adj" fmla="val 19048"/>
+            </a:avLst>
+          </a:prstGeom>
+          <a:solidFill>
+            <a:srgbClr val="1C7293"/>
+          </a:solidFill>
+          <a:ln/>
+        </p:spPr>
+        <p:txBody>
+          <a:bodyPr/>
+          <a:lstStyle/>
+          <a:p>
+            <a:endParaRPr lang="en-US"/>
+          </a:p>
+        </p:txBody>
+      </p:sp>
+      <p:sp>
+        <p:nvSpPr>
+          <p:cNvPr id="25" name="Text 23"/>
+          <p:cNvSpPr/>
+          <p:nvPr/>
+        </p:nvSpPr>
+        <p:spPr>
+          <a:xfrm>
+            <a:off x="3337560" y="2450592"/>
+            <a:ext cx="2834640" cy="384048"/>
+          </a:xfrm>
+          <a:prstGeom prst="rect">
+            <a:avLst/>
+          </a:prstGeom>
+          <a:noFill/>
+          <a:ln/>
+        </p:spPr>
+        <p:txBody>
+          <a:bodyPr wrap="square" lIns="0" tIns="0" rIns="0" bIns="0" rtlCol="0" anchor="ctr"/>
+          <a:lstStyle/>
+          <a:p>
+            <a:pPr marL="0" indent="0" algn="ctr">
+              <a:buNone/>
+            </a:pPr>
+            <a:r>
+              <a:rPr lang="en-US" sz="1100" b="1" dirty="0">
+                <a:solidFill>
+                  <a:srgbClr val="FFFFFF"/>
+                </a:solidFill>
+                <a:latin typeface="Calibri" pitchFamily="34" charset="0"/>
+                <a:ea typeface="Calibri" pitchFamily="34" charset="-122"/>
+                <a:cs typeface="Calibri" pitchFamily="34" charset="-120"/>
+              </a:rPr>
+              <a:t>OccurrencesWithinSpansAnalyzer</a:t>
+            </a:r>
+            <a:endParaRPr lang="en-US" sz="1100" dirty="0"/>
+          </a:p>
+        </p:txBody>
+      </p:sp>
+      <p:sp>
+        <p:nvSpPr>
+          <p:cNvPr id="26" name="Shape 24"/>
+          <p:cNvSpPr/>
+          <p:nvPr/>
+        </p:nvSpPr>
+        <p:spPr>
+          <a:xfrm>
+            <a:off x="1783080" y="2834640"/>
+            <a:ext cx="0" cy="256032"/>
+          </a:xfrm>
+          <a:prstGeom prst="line">
+            <a:avLst/>
+          </a:prstGeom>
+          <a:noFill/>
+          <a:ln w="19050">
+            <a:solidFill>
+              <a:srgbClr val="8A9BB0"/>
+            </a:solidFill>
+            <a:prstDash val="solid"/>
+          </a:ln>
+        </p:spPr>
+        <p:txBody>
+          <a:bodyPr/>
+          <a:lstStyle/>
+          <a:p>
+            <a:endParaRPr lang="en-US"/>
+          </a:p>
+        </p:txBody>
+      </p:sp>
+      <p:sp>
+        <p:nvSpPr>
+          <p:cNvPr id="27" name="Shape 25"/>
+          <p:cNvSpPr/>
+          <p:nvPr/>
+        </p:nvSpPr>
+        <p:spPr>
+          <a:xfrm>
+            <a:off x="4754880" y="2834640"/>
+            <a:ext cx="0" cy="256032"/>
+          </a:xfrm>
+          <a:prstGeom prst="line">
+            <a:avLst/>
+          </a:prstGeom>
+          <a:noFill/>
+          <a:ln w="19050">
+            <a:solidFill>
+              <a:srgbClr val="8A9BB0"/>
+            </a:solidFill>
+            <a:prstDash val="solid"/>
+          </a:ln>
+        </p:spPr>
+        <p:txBody>
+          <a:bodyPr/>
+          <a:lstStyle/>
+          <a:p>
+            <a:endParaRPr lang="en-US"/>
+          </a:p>
+        </p:txBody>
+      </p:sp>
+      <p:sp>
+        <p:nvSpPr>
+          <p:cNvPr id="28" name="Shape 26"/>
+          <p:cNvSpPr/>
+          <p:nvPr/>
+        </p:nvSpPr>
+        <p:spPr>
+          <a:xfrm>
+            <a:off x="365760" y="3090672"/>
+            <a:ext cx="8412480" cy="384048"/>
+          </a:xfrm>
+          <a:prstGeom prst="rect">
+            <a:avLst/>
+          </a:prstGeom>
+          <a:solidFill>
+            <a:srgbClr val="E8EFF5"/>
+          </a:solidFill>
+          <a:ln w="19050">
+            <a:solidFill>
+              <a:srgbClr val="8A9BB0"/>
+            </a:solidFill>
+            <a:prstDash val="solid"/>
+          </a:ln>
+        </p:spPr>
+        <p:txBody>
+          <a:bodyPr/>
+          <a:lstStyle/>
+          <a:p>
+            <a:endParaRPr lang="en-US"/>
+          </a:p>
+        </p:txBody>
+      </p:sp>
+      <p:sp>
+        <p:nvSpPr>
+          <p:cNvPr id="29" name="Text 27"/>
+          <p:cNvSpPr/>
+          <p:nvPr/>
+        </p:nvSpPr>
+        <p:spPr>
+          <a:xfrm>
+            <a:off x="365760" y="3090672"/>
+            <a:ext cx="8412480" cy="384048"/>
+          </a:xfrm>
+          <a:prstGeom prst="rect">
+            <a:avLst/>
+          </a:prstGeom>
+          <a:noFill/>
+          <a:ln/>
+        </p:spPr>
+        <p:txBody>
+          <a:bodyPr wrap="square" lIns="0" tIns="0" rIns="0" bIns="0" rtlCol="0" anchor="ctr"/>
+          <a:lstStyle/>
+          <a:p>
+            <a:pPr marL="0" indent="0" algn="ctr">
+              <a:buNone/>
+            </a:pPr>
+            <a:r>
+              <a:rPr lang="en-US" sz="1200" b="1" dirty="0">
+                <a:solidFill>
+                  <a:srgbClr val="0D2B45"/>
+                </a:solidFill>
+                <a:latin typeface="Calibri" pitchFamily="34" charset="0"/>
+                <a:ea typeface="Calibri" pitchFamily="34" charset="-122"/>
+                <a:cs typeface="Calibri" pitchFamily="34" charset="-120"/>
+              </a:rPr>
+              <a:t>PipeDelimitedIntermediate  (base — columnar contract + combine())</a:t>
+            </a:r>
+            <a:endParaRPr lang="en-US" sz="1200" dirty="0"/>
+          </a:p>
+        </p:txBody>
+      </p:sp>
+      <p:sp>
+        <p:nvSpPr>
+          <p:cNvPr id="30" name="Shape 28"/>
+          <p:cNvSpPr/>
+          <p:nvPr/>
+        </p:nvSpPr>
+        <p:spPr>
+          <a:xfrm>
+            <a:off x="1828800" y="3474720"/>
+            <a:ext cx="0" cy="256032"/>
+          </a:xfrm>
+          <a:prstGeom prst="line">
+            <a:avLst/>
+          </a:prstGeom>
+          <a:noFill/>
+          <a:ln w="19050">
+            <a:solidFill>
+              <a:srgbClr val="8A9BB0"/>
+            </a:solidFill>
+            <a:prstDash val="solid"/>
+          </a:ln>
+        </p:spPr>
+        <p:txBody>
+          <a:bodyPr/>
+          <a:lstStyle/>
+          <a:p>
+            <a:endParaRPr lang="en-US"/>
+          </a:p>
+        </p:txBody>
+      </p:sp>
+      <p:sp>
+        <p:nvSpPr>
+          <p:cNvPr id="31" name="Shape 29"/>
+          <p:cNvSpPr/>
+          <p:nvPr/>
+        </p:nvSpPr>
+        <p:spPr>
+          <a:xfrm>
+            <a:off x="6400800" y="3474720"/>
+            <a:ext cx="0" cy="256032"/>
+          </a:xfrm>
+          <a:prstGeom prst="line">
+            <a:avLst/>
+          </a:prstGeom>
+          <a:noFill/>
+          <a:ln w="19050">
+            <a:solidFill>
+              <a:srgbClr val="8A9BB0"/>
+            </a:solidFill>
+            <a:prstDash val="solid"/>
+          </a:ln>
+        </p:spPr>
+        <p:txBody>
+          <a:bodyPr/>
+          <a:lstStyle/>
+          <a:p>
+            <a:endParaRPr lang="en-US"/>
+          </a:p>
+        </p:txBody>
+      </p:sp>
+      <p:sp>
+        <p:nvSpPr>
+          <p:cNvPr id="32" name="Shape 30"/>
+          <p:cNvSpPr/>
+          <p:nvPr/>
+        </p:nvSpPr>
+        <p:spPr>
+          <a:xfrm>
+            <a:off x="365760" y="3730752"/>
+            <a:ext cx="3657600" cy="384048"/>
+          </a:xfrm>
+          <a:prstGeom prst="roundRect">
+            <a:avLst>
+              <a:gd name="adj" fmla="val 19048"/>
+            </a:avLst>
+          </a:prstGeom>
+          <a:solidFill>
+            <a:srgbClr val="028090"/>
+          </a:solidFill>
+          <a:ln/>
+        </p:spPr>
+        <p:txBody>
+          <a:bodyPr/>
+          <a:lstStyle/>
+          <a:p>
+            <a:endParaRPr lang="en-US"/>
+          </a:p>
+        </p:txBody>
+      </p:sp>
+      <p:sp>
+        <p:nvSpPr>
+          <p:cNvPr id="33" name="Text 31"/>
+          <p:cNvSpPr/>
+          <p:nvPr/>
+        </p:nvSpPr>
+        <p:spPr>
+          <a:xfrm>
+            <a:off x="365760" y="3730752"/>
+            <a:ext cx="3657600" cy="384048"/>
+          </a:xfrm>
+          <a:prstGeom prst="rect">
+            <a:avLst/>
+          </a:prstGeom>
+          <a:noFill/>
+          <a:ln/>
+        </p:spPr>
+        <p:txBody>
+          <a:bodyPr wrap="square" lIns="0" tIns="0" rIns="0" bIns="0" rtlCol="0" anchor="ctr"/>
+          <a:lstStyle/>
+          <a:p>
+            <a:pPr marL="0" indent="0" algn="ctr">
+              <a:buNone/>
+            </a:pPr>
+            <a:r>
+              <a:rPr lang="en-US" sz="1100" b="1" dirty="0">
+                <a:solidFill>
+                  <a:srgbClr val="FFFFFF"/>
+                </a:solidFill>
+                <a:latin typeface="Calibri" pitchFamily="34" charset="0"/>
+                <a:ea typeface="Calibri" pitchFamily="34" charset="-122"/>
+                <a:cs typeface="Calibri" pitchFamily="34" charset="-120"/>
+              </a:rPr>
+              <a:t>PipeDelimitedIntermediateEvents</a:t>
+            </a:r>
+            <a:endParaRPr lang="en-US" sz="1100" dirty="0"/>
+          </a:p>
+        </p:txBody>
+      </p:sp>
+      <p:sp>
+        <p:nvSpPr>
+          <p:cNvPr id="34" name="Shape 32"/>
+          <p:cNvSpPr/>
+          <p:nvPr/>
+        </p:nvSpPr>
+        <p:spPr>
+          <a:xfrm>
+            <a:off x="4572000" y="3730752"/>
+            <a:ext cx="3840480" cy="384048"/>
+          </a:xfrm>
+          <a:prstGeom prst="roundRect">
+            <a:avLst>
+              <a:gd name="adj" fmla="val 19048"/>
+            </a:avLst>
+          </a:prstGeom>
+          <a:solidFill>
+            <a:srgbClr val="028090"/>
+          </a:solidFill>
+          <a:ln/>
+        </p:spPr>
+        <p:txBody>
+          <a:bodyPr/>
+          <a:lstStyle/>
+          <a:p>
+            <a:endParaRPr lang="en-US"/>
+          </a:p>
+        </p:txBody>
+      </p:sp>
+      <p:sp>
+        <p:nvSpPr>
+          <p:cNvPr id="35" name="Text 33"/>
+          <p:cNvSpPr/>
+          <p:nvPr/>
+        </p:nvSpPr>
+        <p:spPr>
+          <a:xfrm>
+            <a:off x="4572000" y="3730752"/>
+            <a:ext cx="3840480" cy="384048"/>
+          </a:xfrm>
+          <a:prstGeom prst="rect">
+            <a:avLst/>
+          </a:prstGeom>
+          <a:noFill/>
+          <a:ln/>
+        </p:spPr>
+        <p:txBody>
+          <a:bodyPr wrap="square" lIns="0" tIns="0" rIns="0" bIns="0" rtlCol="0" anchor="ctr"/>
+          <a:lstStyle/>
+          <a:p>
+            <a:pPr marL="0" indent="0" algn="ctr">
+              <a:buNone/>
+            </a:pPr>
+            <a:r>
+              <a:rPr lang="en-US" sz="1100" b="1" dirty="0">
+                <a:solidFill>
+                  <a:srgbClr val="FFFFFF"/>
+                </a:solidFill>
+                <a:latin typeface="Calibri" pitchFamily="34" charset="0"/>
+                <a:ea typeface="Calibri" pitchFamily="34" charset="-122"/>
+                <a:cs typeface="Calibri" pitchFamily="34" charset="-120"/>
+              </a:rPr>
+              <a:t>PipeDelimitedIntermediateOccurrences</a:t>
+            </a:r>
+            <a:endParaRPr lang="en-US" sz="1100" dirty="0"/>
+          </a:p>
+        </p:txBody>
+      </p:sp>
+      <p:sp>
+        <p:nvSpPr>
+          <p:cNvPr id="36" name="Shape 34"/>
+          <p:cNvSpPr/>
+          <p:nvPr/>
+        </p:nvSpPr>
+        <p:spPr>
+          <a:xfrm>
+            <a:off x="2194560" y="4114800"/>
+            <a:ext cx="0" cy="256032"/>
+          </a:xfrm>
+          <a:prstGeom prst="line">
+            <a:avLst/>
+          </a:prstGeom>
+          <a:noFill/>
+          <a:ln w="19050">
+            <a:solidFill>
+              <a:srgbClr val="02C39A"/>
+            </a:solidFill>
+            <a:prstDash val="solid"/>
+          </a:ln>
+        </p:spPr>
+        <p:txBody>
+          <a:bodyPr/>
+          <a:lstStyle/>
+          <a:p>
+            <a:endParaRPr lang="en-US"/>
+          </a:p>
+        </p:txBody>
+      </p:sp>
+      <p:sp>
+        <p:nvSpPr>
+          <p:cNvPr id="37" name="Shape 35"/>
+          <p:cNvSpPr/>
+          <p:nvPr/>
+        </p:nvSpPr>
+        <p:spPr>
+          <a:xfrm>
+            <a:off x="6400800" y="4114800"/>
+            <a:ext cx="0" cy="256032"/>
+          </a:xfrm>
+          <a:prstGeom prst="line">
+            <a:avLst/>
+          </a:prstGeom>
+          <a:noFill/>
+          <a:ln w="19050">
+            <a:solidFill>
+              <a:srgbClr val="02C39A"/>
+            </a:solidFill>
+            <a:prstDash val="solid"/>
+          </a:ln>
+        </p:spPr>
+        <p:txBody>
+          <a:bodyPr/>
+          <a:lstStyle/>
+          <a:p>
+            <a:endParaRPr lang="en-US"/>
+          </a:p>
+        </p:txBody>
+      </p:sp>
+      <p:sp>
+        <p:nvSpPr>
+          <p:cNvPr id="38" name="Shape 36"/>
+          <p:cNvSpPr/>
+          <p:nvPr/>
+        </p:nvSpPr>
+        <p:spPr>
+          <a:xfrm>
+            <a:off x="365760" y="4370832"/>
+            <a:ext cx="2560320" cy="384048"/>
+          </a:xfrm>
+          <a:prstGeom prst="roundRect">
+            <a:avLst>
+              <a:gd name="adj" fmla="val 19048"/>
+            </a:avLst>
+          </a:prstGeom>
+          <a:solidFill>
+            <a:srgbClr val="02C39A"/>
+          </a:solidFill>
+          <a:ln/>
+        </p:spPr>
+        <p:txBody>
+          <a:bodyPr/>
+          <a:lstStyle/>
+          <a:p>
+            <a:endParaRPr lang="en-US"/>
+          </a:p>
+        </p:txBody>
+      </p:sp>
+      <p:sp>
+        <p:nvSpPr>
+          <p:cNvPr id="39" name="Text 37"/>
+          <p:cNvSpPr/>
+          <p:nvPr/>
+        </p:nvSpPr>
+        <p:spPr>
+          <a:xfrm>
+            <a:off x="365760" y="4370832"/>
+            <a:ext cx="2560320" cy="384048"/>
+          </a:xfrm>
+          <a:prstGeom prst="rect">
+            <a:avLst/>
+          </a:prstGeom>
+          <a:noFill/>
+          <a:ln/>
+        </p:spPr>
+        <p:txBody>
+          <a:bodyPr wrap="square" lIns="0" tIns="0" rIns="0" bIns="0" rtlCol="0" anchor="ctr"/>
+          <a:lstStyle/>
+          <a:p>
+            <a:pPr marL="0" indent="0" algn="ctr">
+              <a:buNone/>
+            </a:pPr>
+            <a:r>
+              <a:rPr lang="en-US" sz="1100" b="1" dirty="0">
+                <a:solidFill>
+                  <a:srgbClr val="0D2B45"/>
+                </a:solidFill>
+                <a:latin typeface="Calibri" pitchFamily="34" charset="0"/>
+                <a:ea typeface="Calibri" pitchFamily="34" charset="-122"/>
+                <a:cs typeface="Calibri" pitchFamily="34" charset="-120"/>
+              </a:rPr>
+              <a:t>StackedEventsPlotter</a:t>
+            </a:r>
+            <a:endParaRPr lang="en-US" sz="1100" dirty="0"/>
+          </a:p>
+        </p:txBody>
+      </p:sp>
+      <p:sp>
+        <p:nvSpPr>
+          <p:cNvPr id="40" name="Shape 38"/>
+          <p:cNvSpPr/>
+          <p:nvPr/>
+        </p:nvSpPr>
+        <p:spPr>
+          <a:xfrm>
+            <a:off x="3017520" y="4370832"/>
+            <a:ext cx="2468880" cy="384048"/>
+          </a:xfrm>
+          <a:prstGeom prst="roundRect">
+            <a:avLst>
+              <a:gd name="adj" fmla="val 19048"/>
+            </a:avLst>
+          </a:prstGeom>
+          <a:solidFill>
+            <a:srgbClr val="02C39A"/>
+          </a:solidFill>
+          <a:ln/>
+        </p:spPr>
+        <p:txBody>
+          <a:bodyPr/>
+          <a:lstStyle/>
+          <a:p>
+            <a:endParaRPr lang="en-US"/>
+          </a:p>
+        </p:txBody>
+      </p:sp>
+      <p:sp>
+        <p:nvSpPr>
+          <p:cNvPr id="41" name="Text 39"/>
+          <p:cNvSpPr/>
+          <p:nvPr/>
+        </p:nvSpPr>
+        <p:spPr>
+          <a:xfrm>
+            <a:off x="3017520" y="4370832"/>
+            <a:ext cx="2468880" cy="384048"/>
+          </a:xfrm>
+          <a:prstGeom prst="rect">
+            <a:avLst/>
+          </a:prstGeom>
+          <a:noFill/>
+          <a:ln/>
+        </p:spPr>
+        <p:txBody>
+          <a:bodyPr wrap="square" lIns="0" tIns="0" rIns="0" bIns="0" rtlCol="0" anchor="ctr"/>
+          <a:lstStyle/>
+          <a:p>
+            <a:pPr marL="0" indent="0" algn="ctr">
+              <a:buNone/>
+            </a:pPr>
+            <a:r>
+              <a:rPr lang="en-US" sz="1100" b="1" dirty="0">
+                <a:solidFill>
+                  <a:srgbClr val="0D2B45"/>
+                </a:solidFill>
+                <a:latin typeface="Calibri" pitchFamily="34" charset="0"/>
+                <a:ea typeface="Calibri" pitchFamily="34" charset="-122"/>
+                <a:cs typeface="Calibri" pitchFamily="34" charset="-120"/>
+              </a:rPr>
+              <a:t>ActivityOverTimePlotter</a:t>
+            </a:r>
+            <a:endParaRPr lang="en-US" sz="1100" dirty="0"/>
+          </a:p>
+        </p:txBody>
+      </p:sp>
+      <p:sp>
+        <p:nvSpPr>
+          <p:cNvPr id="42" name="Shape 40"/>
+          <p:cNvSpPr/>
+          <p:nvPr/>
+        </p:nvSpPr>
+        <p:spPr>
+          <a:xfrm>
+            <a:off x="5577840" y="4370832"/>
+            <a:ext cx="2926080" cy="384048"/>
+          </a:xfrm>
+          <a:prstGeom prst="roundRect">
+            <a:avLst>
+              <a:gd name="adj" fmla="val 19048"/>
+            </a:avLst>
+          </a:prstGeom>
+          <a:solidFill>
+            <a:srgbClr val="02C39A"/>
+          </a:solidFill>
+          <a:ln/>
+        </p:spPr>
+        <p:txBody>
+          <a:bodyPr/>
+          <a:lstStyle/>
+          <a:p>
+            <a:endParaRPr lang="en-US"/>
+          </a:p>
+        </p:txBody>
+      </p:sp>
+      <p:sp>
+        <p:nvSpPr>
+          <p:cNvPr id="43" name="Text 41"/>
+          <p:cNvSpPr/>
+          <p:nvPr/>
+        </p:nvSpPr>
+        <p:spPr>
+          <a:xfrm>
+            <a:off x="5577840" y="4370832"/>
+            <a:ext cx="2926080" cy="384048"/>
+          </a:xfrm>
+          <a:prstGeom prst="rect">
+            <a:avLst/>
+          </a:prstGeom>
+          <a:noFill/>
+          <a:ln/>
+        </p:spPr>
+        <p:txBody>
+          <a:bodyPr wrap="square" lIns="0" tIns="0" rIns="0" bIns="0" rtlCol="0" anchor="ctr"/>
+          <a:lstStyle/>
+          <a:p>
+            <a:pPr marL="0" indent="0" algn="ctr">
+              <a:buNone/>
+            </a:pPr>
+            <a:r>
+              <a:rPr lang="en-US" sz="1100" b="1" dirty="0">
+                <a:solidFill>
+                  <a:srgbClr val="0D2B45"/>
+                </a:solidFill>
+                <a:latin typeface="Calibri" pitchFamily="34" charset="0"/>
+                <a:ea typeface="Calibri" pitchFamily="34" charset="-122"/>
+                <a:cs typeface="Calibri" pitchFamily="34" charset="-120"/>
+              </a:rPr>
+              <a:t>EventAnalysisHistogramPlotter</a:t>
+            </a:r>
+            <a:endParaRPr lang="en-US" sz="1100" dirty="0"/>
+          </a:p>
+        </p:txBody>
+      </p:sp>
+    </p:spTree>
+  </p:cSld>
+  <p:clrMapOvr>
+    <a:masterClrMapping/>
+  </p:clrMapOvr>
+</p:sld>
+</file>
+
+<file path=ppt/slides/slide42.xml><?xml version="1.0" encoding="utf-8"?>
 <p:sld xmlns:a="http://schemas.openxmlformats.org/drawingml/2006/main" xmlns:r="http://schemas.openxmlformats.org/officeDocument/2006/relationships" xmlns:p="http://schemas.openxmlformats.org/presentationml/2006/main">
   <p:cSld name="Slide 5">
     <p:bg>
@@ -16284,7 +16389,7 @@
 </p:sld>
 </file>
 
-<file path=ppt/slides/slide41.xml><?xml version="1.0" encoding="utf-8"?>
+<file path=ppt/slides/slide43.xml><?xml version="1.0" encoding="utf-8"?>
 <p:sld xmlns:a="http://schemas.openxmlformats.org/drawingml/2006/main" xmlns:r="http://schemas.openxmlformats.org/officeDocument/2006/relationships" xmlns:p="http://schemas.openxmlformats.org/presentationml/2006/main">
   <p:cSld name="Slide 6">
     <p:bg>
@@ -17228,7 +17333,7 @@
 </p:sld>
 </file>
 
-<file path=ppt/slides/slide42.xml><?xml version="1.0" encoding="utf-8"?>
+<file path=ppt/slides/slide44.xml><?xml version="1.0" encoding="utf-8"?>
 <p:sld xmlns:a="http://schemas.openxmlformats.org/drawingml/2006/main" xmlns:r="http://schemas.openxmlformats.org/officeDocument/2006/relationships" xmlns:p="http://schemas.openxmlformats.org/presentationml/2006/main">
   <p:cSld name="Slide 7">
     <p:bg>
@@ -17729,7 +17834,7 @@
 </p:sld>
 </file>
 
-<file path=ppt/slides/slide43.xml><?xml version="1.0" encoding="utf-8"?>
+<file path=ppt/slides/slide45.xml><?xml version="1.0" encoding="utf-8"?>
 <p:sld xmlns:a="http://schemas.openxmlformats.org/drawingml/2006/main" xmlns:r="http://schemas.openxmlformats.org/officeDocument/2006/relationships" xmlns:p="http://schemas.openxmlformats.org/presentationml/2006/main">
   <p:cSld name="Slide 8">
     <p:bg>
@@ -18376,7 +18481,7 @@
 </p:sld>
 </file>
 
-<file path=ppt/slides/slide44.xml><?xml version="1.0" encoding="utf-8"?>
+<file path=ppt/slides/slide46.xml><?xml version="1.0" encoding="utf-8"?>
 <p:sld xmlns:a="http://schemas.openxmlformats.org/drawingml/2006/main" xmlns:r="http://schemas.openxmlformats.org/officeDocument/2006/relationships" xmlns:p="http://schemas.openxmlformats.org/presentationml/2006/main">
   <p:cSld name="Slide 9">
     <p:bg>
@@ -19452,17 +19557,21 @@
           <a:p>
             <a:pPr algn="ctr"/>
             <a:r>
-              <a:rPr lang="en-US" sz="1200" b="1">
+              <a:rPr lang="en-US" sz="1200" b="1" dirty="0" err="1">
                 <a:latin typeface="Consolas" panose="020B0609020204030204" pitchFamily="49" charset="0"/>
                 <a:cs typeface="Times New Roman" panose="02020603050405020304" pitchFamily="18" charset="0"/>
               </a:rPr>
               <a:t>EventSemantics</a:t>
             </a:r>
+            <a:endParaRPr lang="en-US" sz="1200" b="1" dirty="0">
+              <a:latin typeface="Consolas" panose="020B0609020204030204" pitchFamily="49" charset="0"/>
+              <a:cs typeface="Times New Roman" panose="02020603050405020304" pitchFamily="18" charset="0"/>
+            </a:endParaRPr>
           </a:p>
           <a:p>
             <a:pPr algn="ctr"/>
             <a:r>
-              <a:rPr lang="en-US" sz="1200">
+              <a:rPr lang="en-US" sz="1200" dirty="0">
                 <a:latin typeface="Centaur" panose="02030504050205020304" pitchFamily="18" charset="0"/>
                 <a:cs typeface="Times New Roman" panose="02020603050405020304" pitchFamily="18" charset="0"/>
               </a:rPr>
@@ -19472,70 +19581,126 @@
           <a:p>
             <a:pPr algn="ctr"/>
             <a:r>
-              <a:rPr lang="en-US" sz="1200">
+              <a:rPr lang="en-US" sz="1200" dirty="0" err="1">
                 <a:latin typeface="Centaur" panose="02030504050205020304" pitchFamily="18" charset="0"/>
                 <a:cs typeface="Times New Roman" panose="02020603050405020304" pitchFamily="18" charset="0"/>
               </a:rPr>
-              <a:t>entity_id_col: str</a:t>
-            </a:r>
-          </a:p>
-          <a:p>
-            <a:pPr algn="ctr"/>
-            <a:r>
-              <a:rPr lang="en-US" sz="1200">
+              <a:t>entity_id_col</a:t>
+            </a:r>
+            <a:r>
+              <a:rPr lang="en-US" sz="1200" dirty="0">
                 <a:latin typeface="Centaur" panose="02030504050205020304" pitchFamily="18" charset="0"/>
                 <a:cs typeface="Times New Roman" panose="02020603050405020304" pitchFamily="18" charset="0"/>
               </a:rPr>
-              <a:t>start_time_col: str</a:t>
+              <a:t>: str</a:t>
             </a:r>
           </a:p>
           <a:p>
             <a:pPr algn="ctr"/>
             <a:r>
-              <a:rPr lang="en-US" sz="1200">
+              <a:rPr lang="en-US" sz="1200" dirty="0" err="1">
                 <a:latin typeface="Centaur" panose="02030504050205020304" pitchFamily="18" charset="0"/>
                 <a:cs typeface="Times New Roman" panose="02020603050405020304" pitchFamily="18" charset="0"/>
               </a:rPr>
-              <a:t>end_time_col: str</a:t>
-            </a:r>
-            <a:br>
-              <a:rPr lang="en-US" sz="1200">
+              <a:t>start_time_col</a:t>
+            </a:r>
+            <a:r>
+              <a:rPr lang="en-US" sz="1200" dirty="0">
                 <a:latin typeface="Centaur" panose="02030504050205020304" pitchFamily="18" charset="0"/>
                 <a:cs typeface="Times New Roman" panose="02020603050405020304" pitchFamily="18" charset="0"/>
               </a:rPr>
-            </a:br>
-            <a:r>
-              <a:rPr lang="en-US" sz="1200">
+              <a:t>: str</a:t>
+            </a:r>
+          </a:p>
+          <a:p>
+            <a:pPr algn="ctr"/>
+            <a:r>
+              <a:rPr lang="en-US" sz="1200" dirty="0" err="1">
                 <a:latin typeface="Centaur" panose="02030504050205020304" pitchFamily="18" charset="0"/>
                 <a:cs typeface="Times New Roman" panose="02020603050405020304" pitchFamily="18" charset="0"/>
               </a:rPr>
-              <a:t>event_id_col: str|None</a:t>
-            </a:r>
-            <a:br>
-              <a:rPr lang="en-US" sz="1200">
+              <a:t>end_time_col</a:t>
+            </a:r>
+            <a:r>
+              <a:rPr lang="en-US" sz="1200" dirty="0">
                 <a:latin typeface="Centaur" panose="02030504050205020304" pitchFamily="18" charset="0"/>
                 <a:cs typeface="Times New Roman" panose="02020603050405020304" pitchFamily="18" charset="0"/>
               </a:rPr>
-            </a:br>
-            <a:r>
-              <a:rPr lang="en-US" sz="1200">
+              <a:t>: str</a:t>
+            </a:r>
+            <a:br>
+              <a:rPr lang="en-US" sz="1200" dirty="0">
                 <a:latin typeface="Centaur" panose="02030504050205020304" pitchFamily="18" charset="0"/>
                 <a:cs typeface="Times New Roman" panose="02020603050405020304" pitchFamily="18" charset="0"/>
               </a:rPr>
-              <a:t>event_type_col: str|None</a:t>
-            </a:r>
-            <a:br>
-              <a:rPr lang="en-US" sz="1200">
+            </a:br>
+            <a:r>
+              <a:rPr lang="en-US" sz="1200" dirty="0" err="1">
                 <a:latin typeface="Centaur" panose="02030504050205020304" pitchFamily="18" charset="0"/>
                 <a:cs typeface="Times New Roman" panose="02020603050405020304" pitchFamily="18" charset="0"/>
               </a:rPr>
-            </a:br>
-            <a:r>
-              <a:rPr lang="en-US" sz="1200">
+              <a:t>event_id_col</a:t>
+            </a:r>
+            <a:r>
+              <a:rPr lang="en-US" sz="1200" dirty="0">
                 <a:latin typeface="Centaur" panose="02030504050205020304" pitchFamily="18" charset="0"/>
                 <a:cs typeface="Times New Roman" panose="02020603050405020304" pitchFamily="18" charset="0"/>
               </a:rPr>
-              <a:t>metadata_cols: list[str]</a:t>
+              <a:t>: </a:t>
+            </a:r>
+            <a:r>
+              <a:rPr lang="en-US" sz="1200" dirty="0" err="1">
+                <a:latin typeface="Centaur" panose="02030504050205020304" pitchFamily="18" charset="0"/>
+                <a:cs typeface="Times New Roman" panose="02020603050405020304" pitchFamily="18" charset="0"/>
+              </a:rPr>
+              <a:t>str|None</a:t>
+            </a:r>
+            <a:br>
+              <a:rPr lang="en-US" sz="1200" dirty="0">
+                <a:latin typeface="Centaur" panose="02030504050205020304" pitchFamily="18" charset="0"/>
+                <a:cs typeface="Times New Roman" panose="02020603050405020304" pitchFamily="18" charset="0"/>
+              </a:rPr>
+            </a:br>
+            <a:r>
+              <a:rPr lang="en-US" sz="1200" dirty="0" err="1">
+                <a:latin typeface="Centaur" panose="02030504050205020304" pitchFamily="18" charset="0"/>
+                <a:cs typeface="Times New Roman" panose="02020603050405020304" pitchFamily="18" charset="0"/>
+              </a:rPr>
+              <a:t>event_type_col</a:t>
+            </a:r>
+            <a:r>
+              <a:rPr lang="en-US" sz="1200" dirty="0">
+                <a:latin typeface="Centaur" panose="02030504050205020304" pitchFamily="18" charset="0"/>
+                <a:cs typeface="Times New Roman" panose="02020603050405020304" pitchFamily="18" charset="0"/>
+              </a:rPr>
+              <a:t>: </a:t>
+            </a:r>
+            <a:r>
+              <a:rPr lang="en-US" sz="1200" dirty="0" err="1">
+                <a:latin typeface="Centaur" panose="02030504050205020304" pitchFamily="18" charset="0"/>
+                <a:cs typeface="Times New Roman" panose="02020603050405020304" pitchFamily="18" charset="0"/>
+              </a:rPr>
+              <a:t>str|None</a:t>
+            </a:r>
+            <a:br>
+              <a:rPr lang="en-US" sz="1200" dirty="0">
+                <a:latin typeface="Centaur" panose="02030504050205020304" pitchFamily="18" charset="0"/>
+                <a:cs typeface="Times New Roman" panose="02020603050405020304" pitchFamily="18" charset="0"/>
+              </a:rPr>
+            </a:br>
+            <a:r>
+              <a:rPr lang="en-US" sz="1200" dirty="0" err="1">
+                <a:latin typeface="Centaur" panose="02030504050205020304" pitchFamily="18" charset="0"/>
+                <a:cs typeface="Times New Roman" panose="02020603050405020304" pitchFamily="18" charset="0"/>
+              </a:rPr>
+              <a:t>metadata_cols</a:t>
+            </a:r>
+            <a:r>
+              <a:rPr lang="en-US" sz="1200" dirty="0">
+                <a:latin typeface="Centaur" panose="02030504050205020304" pitchFamily="18" charset="0"/>
+                <a:cs typeface="Times New Roman" panose="02020603050405020304" pitchFamily="18" charset="0"/>
+              </a:rPr>
+              <a:t>: list[str]</a:t>
             </a:r>
           </a:p>
         </p:txBody>
@@ -19907,14 +20072,14 @@
           <a:p>
             <a:pPr algn="ctr"/>
             <a:r>
-              <a:rPr lang="en-US" sz="1100"/>
+              <a:rPr lang="en-US" sz="1100" dirty="0"/>
               <a:t>Validates on construction that the entries in the configuration are sensical. If you write a cleaning-thing that does not exist or an option that does not exist, it throws the error. </a:t>
             </a:r>
           </a:p>
           <a:p>
             <a:pPr algn="ctr"/>
             <a:r>
-              <a:rPr lang="en-US" sz="1100"/>
+              <a:rPr lang="en-US" sz="1100" dirty="0"/>
               <a:t>Once again, declarative construction acts both as configuration and documentation"</a:t>
             </a:r>
           </a:p>
@@ -21503,73 +21668,81 @@
           <a:lstStyle/>
           <a:p>
             <a:r>
-              <a:rPr lang="en-US" sz="1400" b="1"/>
+              <a:rPr lang="en-US" sz="1400" b="1" dirty="0"/>
               <a:t>Vignette # 2:</a:t>
             </a:r>
           </a:p>
           <a:p>
             <a:r>
-              <a:rPr lang="en-US" sz="1400"/>
-              <a:t>You have cleaned your hospitalization data. You now have 11,200 stays across 8,400 patients. Before you can report anything, you need to understand how long hospitalizations last. You reach for matplotlib.Before you write a single line of plotting code, you need to answer a question that sounds trivial: "What exactly am I plotting, and will I be able to reproduce it?</a:t>
-            </a:r>
-          </a:p>
-          <a:p>
-            <a:endParaRPr lang="en-US" sz="1400"/>
-          </a:p>
-          <a:p>
-            <a:r>
-              <a:rPr lang="en-US" sz="1400" b="1"/>
+              <a:rPr lang="en-US" sz="1400" dirty="0"/>
+              <a:t>You have cleaned your hospitalization data. You now have 11,200 hospitalizations across 8,400 patients. Before you can report anything, you need to understand how long hospitalizations last. You reach for matplotlib. Before you write a single line of plotting code, you need to answer a question that sounds trivial: "What exactly am I plotting, and will I be able to reproduce it?</a:t>
+            </a:r>
+          </a:p>
+          <a:p>
+            <a:endParaRPr lang="en-US" sz="1400" dirty="0"/>
+          </a:p>
+          <a:p>
+            <a:r>
+              <a:rPr lang="en-US" sz="1400" b="1" dirty="0"/>
               <a:t>Problem 1</a:t>
             </a:r>
             <a:r>
-              <a:rPr lang="en-US" sz="1400"/>
+              <a:rPr lang="en-US" sz="1400" dirty="0"/>
               <a:t> — The bin width is a scientific choice, not a formatting detail: A 1-day bin width shows noise. A 30-day bin width hides clinically meaningful variation. 7-day bins align with weekly discharge patterns. The choice belongs in your methods section — not buried in bins=range(0, 180, 7) on line 34 of a script.</a:t>
             </a:r>
           </a:p>
           <a:p>
-            <a:endParaRPr lang="en-US" sz="1400"/>
-          </a:p>
-          <a:p>
-            <a:r>
-              <a:rPr lang="en-US" sz="1400" b="1"/>
+            <a:endParaRPr lang="en-US" sz="1400" dirty="0"/>
+          </a:p>
+          <a:p>
+            <a:r>
+              <a:rPr lang="en-US" sz="1400" b="1" dirty="0"/>
               <a:t>Problem 2</a:t>
             </a:r>
             <a:r>
-              <a:rPr lang="en-US" sz="1400"/>
-              <a:t> — Percentile lines require decisions too: Which percentiles do you report — 25th, 50th, 75th, 90th? Do you label them on the plot? At what font size? A script that hardcodes np.percentile(durations, [25, 50, 75]) has made all of these choices silently.</a:t>
-            </a:r>
-          </a:p>
-          <a:p>
-            <a:endParaRPr lang="en-US" sz="1400"/>
-          </a:p>
-          <a:p>
-            <a:r>
-              <a:rPr lang="en-US" sz="1400" b="1"/>
+              <a:rPr lang="en-US" sz="1400" dirty="0"/>
+              <a:t> — Percentile lines require decisions too: Which percentiles do you report — 25th, 50th, 75th, 90th? Do you label them on the plot? At what font size? A script that hardcodes </a:t>
+            </a:r>
+            <a:r>
+              <a:rPr lang="en-US" sz="1400" dirty="0" err="1"/>
+              <a:t>np.percentile</a:t>
+            </a:r>
+            <a:r>
+              <a:rPr lang="en-US" sz="1400" dirty="0"/>
+              <a:t>(durations, [25, 50, 75]) has made all of these choices silently.</a:t>
+            </a:r>
+          </a:p>
+          <a:p>
+            <a:endParaRPr lang="en-US" sz="1400" dirty="0"/>
+          </a:p>
+          <a:p>
+            <a:r>
+              <a:rPr lang="en-US" sz="1400" b="1" dirty="0"/>
               <a:t>Problem 3</a:t>
             </a:r>
             <a:r>
-              <a:rPr lang="en-US" sz="1400"/>
+              <a:rPr lang="en-US" sz="1400" dirty="0"/>
               <a:t> — Stratification multiplies the problem: When your supervisor asks you to break the histogram down by hospital or DRG category, you now need consistent bin widths, consistent colors, and consistent percentile lines across every stratum. A script that hardcodes these for the unstratified case has to be rewritten for every stratification. </a:t>
             </a:r>
           </a:p>
           <a:p>
-            <a:endParaRPr lang="en-US" sz="1400"/>
-          </a:p>
-          <a:p>
-            <a:r>
-              <a:rPr lang="en-US" sz="1400" b="1"/>
+            <a:endParaRPr lang="en-US" sz="1400" dirty="0"/>
+          </a:p>
+          <a:p>
+            <a:r>
+              <a:rPr lang="en-US" sz="1400" b="1" dirty="0"/>
               <a:t>Problem 4</a:t>
             </a:r>
             <a:r>
-              <a:rPr lang="en-US" sz="1400"/>
+              <a:rPr lang="en-US" sz="1400" dirty="0"/>
               <a:t> — Rerunning next month on updated data: Your data warehouse refreshes quarterly. When you rerun the analysis, are you using the same bins? The same color? The same percentile cutoffs? If these choices live in your script, the answer is "probably, unless someone edited it."</a:t>
             </a:r>
           </a:p>
           <a:p>
-            <a:endParaRPr lang="en-US" sz="1400"/>
-          </a:p>
-          <a:p>
-            <a:endParaRPr lang="en-US" sz="1400"/>
+            <a:endParaRPr lang="en-US" sz="1400" dirty="0"/>
+          </a:p>
+          <a:p>
+            <a:endParaRPr lang="en-US" sz="1400" dirty="0"/>
           </a:p>
         </p:txBody>
       </p:sp>

--- a/docs/eventus_architecture.pptx
+++ b/docs/eventus_architecture.pptx
@@ -600,7 +600,7 @@
           <a:p>
             <a:fld id="{846CE7D5-CF57-46EF-B807-FDD0502418D4}" type="datetimeFigureOut">
               <a:rPr lang="en-US" smtClean="0"/>
-              <a:t>5/18/2026</a:t>
+              <a:t>5/19/2026</a:t>
             </a:fld>
             <a:endParaRPr lang="en-US"/>
           </a:p>
@@ -845,7 +845,7 @@
           <a:p>
             <a:fld id="{846CE7D5-CF57-46EF-B807-FDD0502418D4}" type="datetimeFigureOut">
               <a:rPr lang="en-US" smtClean="0"/>
-              <a:t>5/18/2026</a:t>
+              <a:t>5/19/2026</a:t>
             </a:fld>
             <a:endParaRPr lang="en-US"/>
           </a:p>
@@ -3897,7 +3897,7 @@
             </a:r>
             <a:r>
               <a:rPr lang="en-US" sz="1400" b="1"/>
-              <a:t># 3:</a:t>
+              <a:t># 3: Calculate and visualize events duration</a:t>
             </a:r>
             <a:endParaRPr lang="en-US" sz="1400" b="1" dirty="0"/>
           </a:p>
@@ -4009,7 +4009,7 @@
             </a:r>
             <a:r>
               <a:rPr lang="en-US" sz="1400"/>
-              <a:t>When yourcollaborator asks for duration by facility, you need consistent bins,consistent colors, and consistent percentile lines across bothfacilities. A script hardcoded for the unstratified case has to berewritten.</a:t>
+              <a:t>When your collaborator asks for duration by facility, you need consistent bins,consistent colors, and consistent percentile lines across bothfacilities. A script hardcoded for the unstratified case has to berewritten.</a:t>
             </a:r>
             <a:endParaRPr lang="en-US" sz="1400" dirty="0"/>
           </a:p>
